--- a/pitch/pixel-pattern-pitch.pptx
+++ b/pitch/pixel-pattern-pitch.pptx
@@ -4264,7 +4264,7 @@
                 </a:solidFill>
                 <a:latin typeface="Segoe UI"/>
               </a:rPr>
-              <a:t>HACKATHON · [NOMBRE DEL HACKATHON]</a:t>
+              <a:t>PITCH · 4 MINUTOS</a:t>
             </a:r>
           </a:p>
         </p:txBody>
@@ -9180,7 +9180,7 @@
                 </a:solidFill>
                 <a:latin typeface="Segoe UI"/>
               </a:rPr>
-              <a:t>Patrones dispersos, sin progreso</a:t>
+              <a:t>Dispersos en Pinterest, sin forma de hacerlos</a:t>
             </a:r>
           </a:p>
         </p:txBody>
@@ -14567,7 +14567,7 @@
                 </a:solidFill>
                 <a:latin typeface="Segoe UI"/>
               </a:rPr>
-              <a:t>Lista de materiales y placas</a:t>
+              <a:t>Lista de materiales y nº de placas</a:t>
             </a:r>
           </a:p>
         </p:txBody>

--- a/pitch/pixel-pattern-pitch.pptx
+++ b/pitch/pixel-pattern-pitch.pptx
@@ -512,7 +512,7 @@
           <a:lstStyle/>
           <a:p>
             <a:r>
-              <a:t>≈ 15 s — Buenas, somos [Nombre del equipo] y esto es Pixel Pattern. En cuatro minutos os enseñamos cómo convertir una foto en un patrón de HAMA o punto de cruz y cómo compartirlo con una comunidad que los hace. Vamos al lío.</a:t>
+              <a:t>≈ 15 s — Buenas, somos [Nombre del equipo] y esto es Pixel Pattern. En cuatro minutos os enseñamos cómo convertir una foto en un patrón real de HAMA o punto de cruz, cómo hacerlo con progreso y cómo compartirlo y remezclarlo con la comunidad. Vamos al lío.</a:t>
             </a:r>
           </a:p>
         </p:txBody>
@@ -582,7 +582,7 @@
           <a:lstStyle/>
           <a:p>
             <a:r>
-              <a:t>≈ 20 s — ¿Y después? Más marcas de cuentas e hilos, una app móvil con cámara, patrones 3D para HAMA y, a más largo plazo, una tienda de kits con los materiales exactos de cada patrón. Cerrar el círculo entre la idea y la manualidad.</a:t>
+              <a:t>≈ 10 s — ¿Y después? Más marcas y paletas, una app móvil con cámara, patrones en 3D para HAMA y, a más largo plazo, una tienda de kits con los materiales exactos de cada patrón. Cerrar el círculo entre la idea y la manualidad.</a:t>
             </a:r>
           </a:p>
         </p:txBody>
@@ -652,7 +652,7 @@
           <a:lstStyle/>
           <a:p>
             <a:r>
-              <a:t>≈ 15 s — Esto es Pixel Pattern: una forma más rápida de pasar de una foto a algo que puedes hacer con las manos, y una comunidad para compartirlo. El código y la demo están en el QR. Gracias, y ahora... ¡a hacer patrones!</a:t>
+              <a:t>≈ 15 s — Esto es Pixel Pattern: una forma más rápida de pasar de una foto a algo que puedes hacer con las manos, y una comunidad para compartirlo. El código, la demo y los 76 tests están en el QR. Gracias, y ahora... ¡a hacer patrones!</a:t>
             </a:r>
           </a:p>
         </p:txBody>
@@ -722,7 +722,7 @@
           <a:lstStyle/>
           <a:p>
             <a:r>
-              <a:t>≈ 30 s — Si alguna vez habéis hecho un patrón desde una foto, conocéis el dolor: cuentas cuadraditos a mano y buscas un color que se parezca... y resulta que no existe en Hama ni en DMC. Y lo que hay en Pinterest o en blogs está en una imagen, sin lista de materiales ni progreso. El patrón es bonito; hacerlo es otra historia.</a:t>
+              <a:t>≈ 25 s — Si alguna vez habéis hecho un patrón desde una foto, conocéis el dolor: cuentas cuadraditos a mano y buscas un color que se parezca... y resulta que no existe en Hama ni en DMC. Y lo que hay en Pinterest o en blogs está en una imagen: sin lista de materiales, sin progreso y sin saber cuántas placas necesitas. Un patrón de 128 × 128 son 16.384 celdas. El patrón es bonito; hacerlo es otra historia.</a:t>
             </a:r>
           </a:p>
         </p:txBody>
@@ -792,7 +792,7 @@
           <a:lstStyle/>
           <a:p>
             <a:r>
-              <a:t>≈ 25 s — Pixel Pattern junta las tres piezas que faltaban. Conviertes una foto o un dibujo en un patrón con colores reales de fabricante; lo editas cuenta a cuenta y te llevas un PDF con la lista de materiales; y lo publicas en una comunidad con feed, perfiles y remix. Crear, hacer y compartir, por fin juntos.</a:t>
+              <a:t>≈ 20 s — Pixel Pattern junta las tres piezas que faltaban. Conviertes una foto o un dibujo en un patrón con colores reales de fabricante; lo editas cuenta a cuenta, con deshacer y simetría, y te llevas la lista de materiales y el PDF; y lo publicas en una comunidad con feed, perfiles, búsqueda y remix. Crear, hacer y compartir, por fin juntos.</a:t>
             </a:r>
           </a:p>
         </p:txBody>
@@ -862,7 +862,7 @@
           <a:lstStyle/>
           <a:p>
             <a:r>
-              <a:t>≈ 30 s — Aquí está el corazón del producto. Subes una foto y, con un par de ajustes, la simplificamos a un dibujo: menos colores y formas más limpias. Después la pasamos a la paleta real de Hama o DMC, así que cada color se puede comprar. Y si algo no te convence, cambias las cuentas una a una en el editor.</a:t>
+              <a:t>≈ 45 s — Aquí está el corazón del producto. Subes una foto y, con un par de ajustes, la simplificamos a un dibujo: eliges ancho, hasta 128 celdas, y entre 2 y 64 colores. Después la pasamos a la paleta real de Hama o DMC, así que cada color se puede comprar. En una foto de demo tarda entre 0,3 y 0,6 segundos a 128 píxeles. Y si algo no te convence, cambias las cuentas una a una en el editor.</a:t>
             </a:r>
           </a:p>
         </p:txBody>
@@ -932,7 +932,7 @@
           <a:lstStyle/>
           <a:p>
             <a:r>
-              <a:t>≈ 40 s — Por dentro es una cadena de pasos. Suavizamos con OpenCV para quitar ruido; reducimos a la rejilla; agrupamos los colores con k-means en espacio CIELAB, no en RGB. ¿Por qué? Porque CIELAB mide la distancia de color como la percibe el ojo: dos rojos casi iguales quedan cerca, y no nos llevamos un azul raro solo porque lo digan los números. Después emparejamos con la paleta real del fabricante, limpiamos píxeles sueltos y listo.</a:t>
+              <a:t>≈ 30 s — Por dentro es una cadena de pasos. Suavizamos con OpenCV (bilateral o mean-shift) para quitar ruido; reducimos a la rejilla; agrupamos los colores con k-means en espacio CIELAB, no en RGB. ¿Por qué? Porque CIELAB mide la distancia de color como la percibe el ojo: dos rojos casi iguales quedan cerca, y no nos llevamos un azul raro solo porque lo digan los números. Después emparejamos con la paleta real: 60 colores Hama y 190 DMC. Limpiamos ruido y celdas aisladas, añadimos contorno Canny si hace falta y sale un PatternData listo para editar.</a:t>
             </a:r>
           </a:p>
         </p:txBody>
@@ -1002,7 +1002,7 @@
           <a:lstStyle/>
           <a:p>
             <a:r>
-              <a:t>≈ 30 s — Una vez publicado, cualquiera puede abrirlo en modo hacer. Se sigue color por color, que es como se trabaja de verdad: pones todas las cuentas de un color y no vas cambiando de bote. Marcas las que llevas, ves el progreso y tienes la lista de materiales con las cuentas y las placas. Al terminar, exportas el PDF y lo imprimes.</a:t>
+              <a:t>≈ 45 s — Una vez publicado, cualquiera puede abrirlo en modo hacer. Se sigue color por color, que es como se trabaja de verdad: pones todas las cuentas de un color y no vas cambiando de bote. Marcas celdas o una fila entera, ves el progreso y la lista de materiales con cuentas y placas de 29 × 29. El progreso se guarda en el navegador: si cierras, vuelves donde lo dejaste. Y al terminar, exportas el PDF A4 con la carta y la leyenda.</a:t>
             </a:r>
           </a:p>
         </p:txBody>
@@ -1072,7 +1072,7 @@
           <a:lstStyle/>
           <a:p>
             <a:r>
-              <a:t>≈ 30 s — La parte social es intencionadamente familiar: feed tipo Instagram, con likes, guardados y comentarios; perfiles a los que seguir; y un botón de remix para adaptar el patrón de otra persona. El buscador encuentra perfiles, patrones y hashtags: buscas gato o pixel art y encuentras ideas y gente a la que seguir. La comunidad es lo que hace crecer el catálogo.</a:t>
+              <a:t>≈ 35 s — La parte social es intencionadamente familiar: feed con «Explorar» y «Siguiendo», likes, guardados, comentarios y perfiles a los que seguir. Cualquier patrón se abre en modo hacer o se remezcla con el botón Remix. Y el buscador encuentra perfiles, patrones y #tags sin depender de los acentos: si buscas «corazon» aparece «Corazón pixelado», y «#gato» hace búsqueda exacta de tag. La comunidad es lo que hace crecer el catálogo.</a:t>
             </a:r>
           </a:p>
         </p:txBody>
@@ -1142,7 +1142,7 @@
           <a:lstStyle/>
           <a:p>
             <a:r>
-              <a:t>≈ 25 s — Técnicamente no hay magia: React y TypeScript en el frontend, FastAPI y SQLite detrás, y un motor en Python con NumPy, OpenCV y scikit-learn. El PDF se genera con ReportLab. Todo habla por una API REST con el mismo contrato de datos, PatternData. Eso nos permitió construir en paralelo sin pisarnos.</a:t>
+              <a:t>≈ 20 s — Técnicamente no hay magia: React 18 y TypeScript en el frontend, FastAPI y SQLite detrás, y un motor en Python con NumPy, OpenCV, scikit-learn y ReportLab para el PDF. Todo habla por una API REST con el mismo contrato, PatternData. Eso nos permitió construir en paralelo sin pisarnos y tener 76 tests en verde.</a:t>
             </a:r>
           </a:p>
         </p:txBody>
@@ -1212,7 +1212,7 @@
           <a:lstStyle/>
           <a:p>
             <a:r>
-              <a:t>≈ 25 s — Y aquí está la parte de la que estamos más orgullosos: cinco personas, cinco ramas y un contrato de API cerrado desde el minuto cero. Cada persona era dueña de sus archivos, así que los merges salieron limpios. Trabajamos con agentes de IA de opencode: nos repartimos el producto, no los conflictos de Git.</a:t>
+              <a:t>≈ 20 s — Y aquí está la parte de la que estamos más orgullosos: cinco personas, cinco ramas y un contrato de API cerrado desde el minuto cero. Cada persona era dueña de sus archivos, así que los merges salieron limpios. En total, 10.905 líneas propias y 834 compartidas, con 76 tests en verde. Trabajamos con agentes de IA de opencode: nos repartimos el producto, no los conflictos de Git.</a:t>
             </a:r>
           </a:p>
         </p:txBody>
@@ -4214,7 +4214,7 @@
     <p:bg>
       <p:bgPr>
         <a:solidFill>
-          <a:srgbClr val="FBF8F4"/>
+          <a:srgbClr val="FFF9F5"/>
         </a:solidFill>
         <a:effectLst/>
       </p:bgPr>
@@ -4260,11 +4260,11 @@
             <a:r>
               <a:rPr sz="1050" b="1" i="0" spc="190">
                 <a:solidFill>
-                  <a:srgbClr val="E8456B"/>
+                  <a:srgbClr val="C9587E"/>
                 </a:solidFill>
                 <a:latin typeface="Segoe UI"/>
               </a:rPr>
-              <a:t>PITCH · 4 MINUTOS</a:t>
+              <a:t>HACKATHON · [NOMBRE DEL HACKATHON]</a:t>
             </a:r>
           </a:p>
         </p:txBody>
@@ -4303,7 +4303,7 @@
             <a:r>
               <a:rPr sz="6800" b="1" i="0">
                 <a:solidFill>
-                  <a:srgbClr val="1F1D2B"/>
+                  <a:srgbClr val="3D3A4F"/>
                 </a:solidFill>
                 <a:latin typeface="Segoe UI"/>
               </a:rPr>
@@ -4325,7 +4325,7 @@
             <a:r>
               <a:rPr sz="6800" b="1" i="0">
                 <a:solidFill>
-                  <a:srgbClr val="1F1D2B"/>
+                  <a:srgbClr val="3D3A4F"/>
                 </a:solidFill>
                 <a:latin typeface="Segoe UI"/>
               </a:rPr>
@@ -4349,7 +4349,7 @@
             <a:avLst/>
           </a:prstGeom>
           <a:solidFill>
-            <a:srgbClr val="E8456B"/>
+            <a:srgbClr val="C9587E"/>
           </a:solidFill>
           <a:ln>
             <a:noFill/>
@@ -4397,7 +4397,7 @@
             <a:r>
               <a:rPr sz="2200" b="0" i="0">
                 <a:solidFill>
-                  <a:srgbClr val="6E6A7C"/>
+                  <a:srgbClr val="8A8699"/>
                 </a:solidFill>
                 <a:latin typeface="Segoe UI"/>
               </a:rPr>
@@ -4419,7 +4419,7 @@
             <a:r>
               <a:rPr sz="2200" b="0" i="0">
                 <a:solidFill>
-                  <a:srgbClr val="6E6A7C"/>
+                  <a:srgbClr val="8A8699"/>
                 </a:solidFill>
                 <a:latin typeface="Segoe UI"/>
               </a:rPr>
@@ -4443,7 +4443,7 @@
             <a:avLst/>
           </a:prstGeom>
           <a:solidFill>
-            <a:srgbClr val="E8456B"/>
+            <a:srgbClr val="C9587E"/>
           </a:solidFill>
           <a:ln>
             <a:noFill/>
@@ -4472,7 +4472,7 @@
             <a:avLst/>
           </a:prstGeom>
           <a:solidFill>
-            <a:srgbClr val="E8456B"/>
+            <a:srgbClr val="C9587E"/>
           </a:solidFill>
           <a:ln>
             <a:noFill/>
@@ -4501,7 +4501,7 @@
             <a:avLst/>
           </a:prstGeom>
           <a:solidFill>
-            <a:srgbClr val="E8456B"/>
+            <a:srgbClr val="C9587E"/>
           </a:solidFill>
           <a:ln>
             <a:noFill/>
@@ -4530,7 +4530,7 @@
             <a:avLst/>
           </a:prstGeom>
           <a:solidFill>
-            <a:srgbClr val="E8456B"/>
+            <a:srgbClr val="C9587E"/>
           </a:solidFill>
           <a:ln>
             <a:noFill/>
@@ -4559,7 +4559,7 @@
             <a:avLst/>
           </a:prstGeom>
           <a:solidFill>
-            <a:srgbClr val="E8456B"/>
+            <a:srgbClr val="C9587E"/>
           </a:solidFill>
           <a:ln>
             <a:noFill/>
@@ -4588,7 +4588,7 @@
             <a:avLst/>
           </a:prstGeom>
           <a:solidFill>
-            <a:srgbClr val="E8456B"/>
+            <a:srgbClr val="C9587E"/>
           </a:solidFill>
           <a:ln>
             <a:noFill/>
@@ -4617,7 +4617,7 @@
             <a:avLst/>
           </a:prstGeom>
           <a:solidFill>
-            <a:srgbClr val="E8456B"/>
+            <a:srgbClr val="C9587E"/>
           </a:solidFill>
           <a:ln>
             <a:noFill/>
@@ -4646,7 +4646,7 @@
             <a:avLst/>
           </a:prstGeom>
           <a:solidFill>
-            <a:srgbClr val="E8456B"/>
+            <a:srgbClr val="C9587E"/>
           </a:solidFill>
           <a:ln>
             <a:noFill/>
@@ -4675,7 +4675,7 @@
             <a:avLst/>
           </a:prstGeom>
           <a:solidFill>
-            <a:srgbClr val="E8456B"/>
+            <a:srgbClr val="C9587E"/>
           </a:solidFill>
           <a:ln>
             <a:noFill/>
@@ -4704,7 +4704,7 @@
             <a:avLst/>
           </a:prstGeom>
           <a:solidFill>
-            <a:srgbClr val="E8456B"/>
+            <a:srgbClr val="C9587E"/>
           </a:solidFill>
           <a:ln>
             <a:noFill/>
@@ -4733,7 +4733,7 @@
             <a:avLst/>
           </a:prstGeom>
           <a:solidFill>
-            <a:srgbClr val="E8456B"/>
+            <a:srgbClr val="C9587E"/>
           </a:solidFill>
           <a:ln>
             <a:noFill/>
@@ -4762,7 +4762,7 @@
             <a:avLst/>
           </a:prstGeom>
           <a:solidFill>
-            <a:srgbClr val="E8456B"/>
+            <a:srgbClr val="C9587E"/>
           </a:solidFill>
           <a:ln>
             <a:noFill/>
@@ -4791,7 +4791,7 @@
             <a:avLst/>
           </a:prstGeom>
           <a:solidFill>
-            <a:srgbClr val="E8456B"/>
+            <a:srgbClr val="C9587E"/>
           </a:solidFill>
           <a:ln>
             <a:noFill/>
@@ -4820,7 +4820,7 @@
             <a:avLst/>
           </a:prstGeom>
           <a:solidFill>
-            <a:srgbClr val="E8456B"/>
+            <a:srgbClr val="C9587E"/>
           </a:solidFill>
           <a:ln>
             <a:noFill/>
@@ -4849,7 +4849,7 @@
             <a:avLst/>
           </a:prstGeom>
           <a:solidFill>
-            <a:srgbClr val="E8456B"/>
+            <a:srgbClr val="C9587E"/>
           </a:solidFill>
           <a:ln>
             <a:noFill/>
@@ -4878,7 +4878,7 @@
             <a:avLst/>
           </a:prstGeom>
           <a:solidFill>
-            <a:srgbClr val="E8456B"/>
+            <a:srgbClr val="C9587E"/>
           </a:solidFill>
           <a:ln>
             <a:noFill/>
@@ -4907,7 +4907,7 @@
             <a:avLst/>
           </a:prstGeom>
           <a:solidFill>
-            <a:srgbClr val="E8456B"/>
+            <a:srgbClr val="C9587E"/>
           </a:solidFill>
           <a:ln>
             <a:noFill/>
@@ -4936,7 +4936,7 @@
             <a:avLst/>
           </a:prstGeom>
           <a:solidFill>
-            <a:srgbClr val="E8456B"/>
+            <a:srgbClr val="C9587E"/>
           </a:solidFill>
           <a:ln>
             <a:noFill/>
@@ -4965,7 +4965,7 @@
             <a:avLst/>
           </a:prstGeom>
           <a:solidFill>
-            <a:srgbClr val="E8456B"/>
+            <a:srgbClr val="C9587E"/>
           </a:solidFill>
           <a:ln>
             <a:noFill/>
@@ -4994,7 +4994,7 @@
             <a:avLst/>
           </a:prstGeom>
           <a:solidFill>
-            <a:srgbClr val="E8456B"/>
+            <a:srgbClr val="C9587E"/>
           </a:solidFill>
           <a:ln>
             <a:noFill/>
@@ -5023,7 +5023,7 @@
             <a:avLst/>
           </a:prstGeom>
           <a:solidFill>
-            <a:srgbClr val="E8456B"/>
+            <a:srgbClr val="C9587E"/>
           </a:solidFill>
           <a:ln>
             <a:noFill/>
@@ -5052,7 +5052,7 @@
             <a:avLst/>
           </a:prstGeom>
           <a:solidFill>
-            <a:srgbClr val="E8456B"/>
+            <a:srgbClr val="C9587E"/>
           </a:solidFill>
           <a:ln>
             <a:noFill/>
@@ -5081,7 +5081,7 @@
             <a:avLst/>
           </a:prstGeom>
           <a:solidFill>
-            <a:srgbClr val="E8456B"/>
+            <a:srgbClr val="C9587E"/>
           </a:solidFill>
           <a:ln>
             <a:noFill/>
@@ -5110,7 +5110,7 @@
             <a:avLst/>
           </a:prstGeom>
           <a:solidFill>
-            <a:srgbClr val="E8456B"/>
+            <a:srgbClr val="C9587E"/>
           </a:solidFill>
           <a:ln>
             <a:noFill/>
@@ -5139,7 +5139,7 @@
             <a:avLst/>
           </a:prstGeom>
           <a:solidFill>
-            <a:srgbClr val="E8456B"/>
+            <a:srgbClr val="C9587E"/>
           </a:solidFill>
           <a:ln>
             <a:noFill/>
@@ -5168,7 +5168,7 @@
             <a:avLst/>
           </a:prstGeom>
           <a:solidFill>
-            <a:srgbClr val="E8456B"/>
+            <a:srgbClr val="C9587E"/>
           </a:solidFill>
           <a:ln>
             <a:noFill/>
@@ -5197,7 +5197,7 @@
             <a:avLst/>
           </a:prstGeom>
           <a:solidFill>
-            <a:srgbClr val="E8456B"/>
+            <a:srgbClr val="C9587E"/>
           </a:solidFill>
           <a:ln>
             <a:noFill/>
@@ -5226,7 +5226,7 @@
             <a:avLst/>
           </a:prstGeom>
           <a:solidFill>
-            <a:srgbClr val="E8456B"/>
+            <a:srgbClr val="C9587E"/>
           </a:solidFill>
           <a:ln>
             <a:noFill/>
@@ -5255,7 +5255,7 @@
             <a:avLst/>
           </a:prstGeom>
           <a:solidFill>
-            <a:srgbClr val="E8456B"/>
+            <a:srgbClr val="C9587E"/>
           </a:solidFill>
           <a:ln>
             <a:noFill/>
@@ -5284,7 +5284,7 @@
             <a:avLst/>
           </a:prstGeom>
           <a:solidFill>
-            <a:srgbClr val="E8456B"/>
+            <a:srgbClr val="C9587E"/>
           </a:solidFill>
           <a:ln>
             <a:noFill/>
@@ -5313,7 +5313,7 @@
             <a:avLst/>
           </a:prstGeom>
           <a:solidFill>
-            <a:srgbClr val="E8456B"/>
+            <a:srgbClr val="C9587E"/>
           </a:solidFill>
           <a:ln>
             <a:noFill/>
@@ -5342,7 +5342,7 @@
             <a:avLst/>
           </a:prstGeom>
           <a:solidFill>
-            <a:srgbClr val="E8456B"/>
+            <a:srgbClr val="C9587E"/>
           </a:solidFill>
           <a:ln>
             <a:noFill/>
@@ -5371,7 +5371,7 @@
             <a:avLst/>
           </a:prstGeom>
           <a:solidFill>
-            <a:srgbClr val="E8456B"/>
+            <a:srgbClr val="C9587E"/>
           </a:solidFill>
           <a:ln>
             <a:noFill/>
@@ -5400,7 +5400,7 @@
             <a:avLst/>
           </a:prstGeom>
           <a:solidFill>
-            <a:srgbClr val="E8456B"/>
+            <a:srgbClr val="C9587E"/>
           </a:solidFill>
           <a:ln>
             <a:noFill/>
@@ -5429,7 +5429,7 @@
             <a:avLst/>
           </a:prstGeom>
           <a:solidFill>
-            <a:srgbClr val="E8456B"/>
+            <a:srgbClr val="C9587E"/>
           </a:solidFill>
           <a:ln>
             <a:noFill/>
@@ -5458,7 +5458,7 @@
             <a:avLst/>
           </a:prstGeom>
           <a:solidFill>
-            <a:srgbClr val="E8456B"/>
+            <a:srgbClr val="C9587E"/>
           </a:solidFill>
           <a:ln>
             <a:noFill/>
@@ -5487,7 +5487,7 @@
             <a:avLst/>
           </a:prstGeom>
           <a:solidFill>
-            <a:srgbClr val="E8456B"/>
+            <a:srgbClr val="C9587E"/>
           </a:solidFill>
           <a:ln>
             <a:noFill/>
@@ -5516,7 +5516,7 @@
             <a:avLst/>
           </a:prstGeom>
           <a:solidFill>
-            <a:srgbClr val="E8456B"/>
+            <a:srgbClr val="C9587E"/>
           </a:solidFill>
           <a:ln>
             <a:noFill/>
@@ -5545,7 +5545,7 @@
             <a:avLst/>
           </a:prstGeom>
           <a:solidFill>
-            <a:srgbClr val="E8456B"/>
+            <a:srgbClr val="C9587E"/>
           </a:solidFill>
           <a:ln>
             <a:noFill/>
@@ -5574,7 +5574,7 @@
             <a:avLst/>
           </a:prstGeom>
           <a:solidFill>
-            <a:srgbClr val="E8456B"/>
+            <a:srgbClr val="C9587E"/>
           </a:solidFill>
           <a:ln>
             <a:noFill/>
@@ -5603,7 +5603,7 @@
             <a:avLst/>
           </a:prstGeom>
           <a:solidFill>
-            <a:srgbClr val="E8456B"/>
+            <a:srgbClr val="C9587E"/>
           </a:solidFill>
           <a:ln>
             <a:noFill/>
@@ -5632,7 +5632,7 @@
             <a:avLst/>
           </a:prstGeom>
           <a:solidFill>
-            <a:srgbClr val="E8456B"/>
+            <a:srgbClr val="C9587E"/>
           </a:solidFill>
           <a:ln>
             <a:noFill/>
@@ -5661,7 +5661,7 @@
             <a:avLst/>
           </a:prstGeom>
           <a:solidFill>
-            <a:srgbClr val="E8456B"/>
+            <a:srgbClr val="C9587E"/>
           </a:solidFill>
           <a:ln>
             <a:noFill/>
@@ -5690,7 +5690,7 @@
             <a:avLst/>
           </a:prstGeom>
           <a:solidFill>
-            <a:srgbClr val="E8456B"/>
+            <a:srgbClr val="C9587E"/>
           </a:solidFill>
           <a:ln>
             <a:noFill/>
@@ -5719,7 +5719,7 @@
             <a:avLst/>
           </a:prstGeom>
           <a:solidFill>
-            <a:srgbClr val="E8456B"/>
+            <a:srgbClr val="C9587E"/>
           </a:solidFill>
           <a:ln>
             <a:noFill/>
@@ -5748,7 +5748,7 @@
             <a:avLst/>
           </a:prstGeom>
           <a:solidFill>
-            <a:srgbClr val="E8456B"/>
+            <a:srgbClr val="C9587E"/>
           </a:solidFill>
           <a:ln>
             <a:noFill/>
@@ -5796,7 +5796,7 @@
             <a:r>
               <a:rPr sz="1150" b="0" i="0" spc="120">
                 <a:solidFill>
-                  <a:srgbClr val="6E6A7C"/>
+                  <a:srgbClr val="8A8699"/>
                 </a:solidFill>
                 <a:latin typeface="Segoe UI"/>
               </a:rPr>
@@ -5839,7 +5839,7 @@
             <a:r>
               <a:rPr sz="1300" b="1" i="0">
                 <a:solidFill>
-                  <a:srgbClr val="1F1D2B"/>
+                  <a:srgbClr val="3D3A4F"/>
                 </a:solidFill>
                 <a:latin typeface="Segoe UI"/>
               </a:rPr>
@@ -5882,7 +5882,7 @@
             <a:r>
               <a:rPr sz="1300" b="0" i="0">
                 <a:solidFill>
-                  <a:srgbClr val="6E6A7C"/>
+                  <a:srgbClr val="8A8699"/>
                 </a:solidFill>
                 <a:latin typeface="Segoe UI"/>
               </a:rPr>
@@ -5905,7 +5905,7 @@
     <p:bg>
       <p:bgPr>
         <a:solidFill>
-          <a:srgbClr val="FBF8F4"/>
+          <a:srgbClr val="FFF9F5"/>
         </a:solidFill>
         <a:effectLst/>
       </p:bgPr>
@@ -5951,7 +5951,7 @@
             <a:r>
               <a:rPr sz="1050" b="1" i="0" spc="190">
                 <a:solidFill>
-                  <a:srgbClr val="E8456B"/>
+                  <a:srgbClr val="C9587E"/>
                 </a:solidFill>
                 <a:latin typeface="Segoe UI"/>
               </a:rPr>
@@ -5994,7 +5994,7 @@
             <a:r>
               <a:rPr sz="4000" b="1" i="0">
                 <a:solidFill>
-                  <a:srgbClr val="1F1D2B"/>
+                  <a:srgbClr val="3D3A4F"/>
                 </a:solidFill>
                 <a:latin typeface="Segoe UI"/>
               </a:rPr>
@@ -6018,7 +6018,7 @@
             <a:avLst/>
           </a:prstGeom>
           <a:solidFill>
-            <a:srgbClr val="E8456B"/>
+            <a:srgbClr val="C9587E"/>
           </a:solidFill>
           <a:ln>
             <a:noFill/>
@@ -6053,7 +6053,7 @@
           </a:solidFill>
           <a:ln w="12700">
             <a:solidFill>
-              <a:srgbClr val="E7DED4"/>
+              <a:srgbClr val="F1E7E2"/>
             </a:solidFill>
           </a:ln>
           <a:effectLst>
@@ -6106,7 +6106,7 @@
             <a:r>
               <a:rPr sz="1050" b="1" i="0" spc="120">
                 <a:solidFill>
-                  <a:srgbClr val="E8456B"/>
+                  <a:srgbClr val="C9587E"/>
                 </a:solidFill>
                 <a:latin typeface="Segoe UI"/>
               </a:rPr>
@@ -6149,7 +6149,7 @@
             <a:r>
               <a:rPr sz="1850" b="1" i="0">
                 <a:solidFill>
-                  <a:srgbClr val="1F1D2B"/>
+                  <a:srgbClr val="3D3A4F"/>
                 </a:solidFill>
                 <a:latin typeface="Segoe UI"/>
               </a:rPr>
@@ -6173,7 +6173,7 @@
             <a:avLst/>
           </a:prstGeom>
           <a:solidFill>
-            <a:srgbClr val="E7DED4"/>
+            <a:srgbClr val="F1E7E2"/>
           </a:solidFill>
           <a:ln>
             <a:noFill/>
@@ -6221,11 +6221,11 @@
             <a:r>
               <a:rPr sz="1200" b="0" i="0">
                 <a:solidFill>
-                  <a:srgbClr val="6E6A7C"/>
+                  <a:srgbClr val="8A8699"/>
                 </a:solidFill>
                 <a:latin typeface="Segoe UI"/>
               </a:rPr>
-              <a:t>Cuentas e hilos de más fabricantes</a:t>
+              <a:t>Paletas de más fabricantes</a:t>
             </a:r>
           </a:p>
         </p:txBody>
@@ -6251,7 +6251,7 @@
           </a:solidFill>
           <a:ln w="12700">
             <a:solidFill>
-              <a:srgbClr val="E7DED4"/>
+              <a:srgbClr val="F1E7E2"/>
             </a:solidFill>
           </a:ln>
           <a:effectLst>
@@ -6304,7 +6304,7 @@
             <a:r>
               <a:rPr sz="1050" b="1" i="0" spc="120">
                 <a:solidFill>
-                  <a:srgbClr val="E8456B"/>
+                  <a:srgbClr val="C9587E"/>
                 </a:solidFill>
                 <a:latin typeface="Segoe UI"/>
               </a:rPr>
@@ -6347,7 +6347,7 @@
             <a:r>
               <a:rPr sz="1850" b="1" i="0">
                 <a:solidFill>
-                  <a:srgbClr val="1F1D2B"/>
+                  <a:srgbClr val="3D3A4F"/>
                 </a:solidFill>
                 <a:latin typeface="Segoe UI"/>
               </a:rPr>
@@ -6371,7 +6371,7 @@
             <a:avLst/>
           </a:prstGeom>
           <a:solidFill>
-            <a:srgbClr val="E7DED4"/>
+            <a:srgbClr val="F1E7E2"/>
           </a:solidFill>
           <a:ln>
             <a:noFill/>
@@ -6419,7 +6419,7 @@
             <a:r>
               <a:rPr sz="1200" b="0" i="0">
                 <a:solidFill>
-                  <a:srgbClr val="6E6A7C"/>
+                  <a:srgbClr val="8A8699"/>
                 </a:solidFill>
                 <a:latin typeface="Segoe UI"/>
               </a:rPr>
@@ -6449,7 +6449,7 @@
           </a:solidFill>
           <a:ln w="12700">
             <a:solidFill>
-              <a:srgbClr val="E7DED4"/>
+              <a:srgbClr val="F1E7E2"/>
             </a:solidFill>
           </a:ln>
           <a:effectLst>
@@ -6502,7 +6502,7 @@
             <a:r>
               <a:rPr sz="1050" b="1" i="0" spc="120">
                 <a:solidFill>
-                  <a:srgbClr val="E8456B"/>
+                  <a:srgbClr val="C9587E"/>
                 </a:solidFill>
                 <a:latin typeface="Segoe UI"/>
               </a:rPr>
@@ -6545,7 +6545,7 @@
             <a:r>
               <a:rPr sz="1850" b="1" i="0">
                 <a:solidFill>
-                  <a:srgbClr val="1F1D2B"/>
+                  <a:srgbClr val="3D3A4F"/>
                 </a:solidFill>
                 <a:latin typeface="Segoe UI"/>
               </a:rPr>
@@ -6569,7 +6569,7 @@
             <a:avLst/>
           </a:prstGeom>
           <a:solidFill>
-            <a:srgbClr val="E7DED4"/>
+            <a:srgbClr val="F1E7E2"/>
           </a:solidFill>
           <a:ln>
             <a:noFill/>
@@ -6617,7 +6617,7 @@
             <a:r>
               <a:rPr sz="1200" b="0" i="0">
                 <a:solidFill>
-                  <a:srgbClr val="6E6A7C"/>
+                  <a:srgbClr val="8A8699"/>
                 </a:solidFill>
                 <a:latin typeface="Segoe UI"/>
               </a:rPr>
@@ -6647,7 +6647,7 @@
           </a:solidFill>
           <a:ln w="12700">
             <a:solidFill>
-              <a:srgbClr val="E7DED4"/>
+              <a:srgbClr val="F1E7E2"/>
             </a:solidFill>
           </a:ln>
           <a:effectLst>
@@ -6700,7 +6700,7 @@
             <a:r>
               <a:rPr sz="1050" b="1" i="0" spc="120">
                 <a:solidFill>
-                  <a:srgbClr val="E8456B"/>
+                  <a:srgbClr val="C9587E"/>
                 </a:solidFill>
                 <a:latin typeface="Segoe UI"/>
               </a:rPr>
@@ -6743,7 +6743,7 @@
             <a:r>
               <a:rPr sz="1850" b="1" i="0">
                 <a:solidFill>
-                  <a:srgbClr val="1F1D2B"/>
+                  <a:srgbClr val="3D3A4F"/>
                 </a:solidFill>
                 <a:latin typeface="Segoe UI"/>
               </a:rPr>
@@ -6767,7 +6767,7 @@
             <a:avLst/>
           </a:prstGeom>
           <a:solidFill>
-            <a:srgbClr val="E7DED4"/>
+            <a:srgbClr val="F1E7E2"/>
           </a:solidFill>
           <a:ln>
             <a:noFill/>
@@ -6815,7 +6815,7 @@
             <a:r>
               <a:rPr sz="1200" b="0" i="0">
                 <a:solidFill>
-                  <a:srgbClr val="6E6A7C"/>
+                  <a:srgbClr val="8A8699"/>
                 </a:solidFill>
                 <a:latin typeface="Segoe UI"/>
               </a:rPr>
@@ -6839,7 +6839,7 @@
             <a:avLst/>
           </a:prstGeom>
           <a:solidFill>
-            <a:srgbClr val="E7DED4"/>
+            <a:srgbClr val="F1E7E2"/>
           </a:solidFill>
           <a:ln>
             <a:noFill/>
@@ -6887,7 +6887,7 @@
             <a:r>
               <a:rPr sz="900" b="0" i="0">
                 <a:solidFill>
-                  <a:srgbClr val="6E6A7C"/>
+                  <a:srgbClr val="8A8699"/>
                 </a:solidFill>
                 <a:latin typeface="Segoe UI"/>
               </a:rPr>
@@ -6930,7 +6930,7 @@
             <a:r>
               <a:rPr sz="900" b="0" i="0">
                 <a:solidFill>
-                  <a:srgbClr val="6E6A7C"/>
+                  <a:srgbClr val="8A8699"/>
                 </a:solidFill>
                 <a:latin typeface="Segoe UI"/>
               </a:rPr>
@@ -6953,7 +6953,7 @@
     <p:bg>
       <p:bgPr>
         <a:solidFill>
-          <a:srgbClr val="FBF8F4"/>
+          <a:srgbClr val="FFF9F5"/>
         </a:solidFill>
         <a:effectLst/>
       </p:bgPr>
@@ -6999,7 +6999,7 @@
             <a:r>
               <a:rPr sz="1050" b="1" i="0" spc="190">
                 <a:solidFill>
-                  <a:srgbClr val="E8456B"/>
+                  <a:srgbClr val="C9587E"/>
                 </a:solidFill>
                 <a:latin typeface="Segoe UI"/>
               </a:rPr>
@@ -7042,7 +7042,7 @@
             <a:r>
               <a:rPr sz="4800" b="1" i="0">
                 <a:solidFill>
-                  <a:srgbClr val="1F1D2B"/>
+                  <a:srgbClr val="3D3A4F"/>
                 </a:solidFill>
                 <a:latin typeface="Segoe UI"/>
               </a:rPr>
@@ -7085,7 +7085,7 @@
             <a:r>
               <a:rPr sz="6000" b="1" i="0">
                 <a:solidFill>
-                  <a:srgbClr val="E8456B"/>
+                  <a:srgbClr val="C9587E"/>
                 </a:solidFill>
                 <a:latin typeface="Segoe UI"/>
               </a:rPr>
@@ -7109,7 +7109,7 @@
             <a:avLst/>
           </a:prstGeom>
           <a:solidFill>
-            <a:srgbClr val="E8456B"/>
+            <a:srgbClr val="C9587E"/>
           </a:solidFill>
           <a:ln>
             <a:noFill/>
@@ -7157,11 +7157,11 @@
             <a:r>
               <a:rPr sz="1800" b="0" i="0">
                 <a:solidFill>
-                  <a:srgbClr val="1F1D2B"/>
+                  <a:srgbClr val="3D3A4F"/>
                 </a:solidFill>
                 <a:latin typeface="Segoe UI"/>
               </a:rPr>
-              <a:t>Demo y código en el QR.</a:t>
+              <a:t>Demo, código y tests en el QR.</a:t>
             </a:r>
           </a:p>
         </p:txBody>
@@ -7200,7 +7200,7 @@
             <a:r>
               <a:rPr sz="1300" b="0" i="0">
                 <a:solidFill>
-                  <a:srgbClr val="6E6A7C"/>
+                  <a:srgbClr val="8A8699"/>
                 </a:solidFill>
                 <a:latin typeface="Segoe UI"/>
               </a:rPr>
@@ -7243,7 +7243,7 @@
             <a:r>
               <a:rPr sz="1150" b="0" i="0">
                 <a:solidFill>
-                  <a:srgbClr val="6E6A7C"/>
+                  <a:srgbClr val="8A8699"/>
                 </a:solidFill>
                 <a:latin typeface="Segoe UI"/>
               </a:rPr>
@@ -7273,7 +7273,7 @@
           </a:solidFill>
           <a:ln w="19050">
             <a:solidFill>
-              <a:srgbClr val="E8456B"/>
+              <a:srgbClr val="C9587E"/>
             </a:solidFill>
             <a:prstDash val="dash"/>
           </a:ln>
@@ -7320,7 +7320,7 @@
             <a:r>
               <a:rPr sz="1300" b="0" i="0">
                 <a:solidFill>
-                  <a:srgbClr val="6E6A7C"/>
+                  <a:srgbClr val="8A8699"/>
                 </a:solidFill>
                 <a:latin typeface="Segoe UI"/>
               </a:rPr>
@@ -7342,7 +7342,7 @@
             <a:r>
               <a:rPr sz="1300" b="0" i="0">
                 <a:solidFill>
-                  <a:srgbClr val="6E6A7C"/>
+                  <a:srgbClr val="8A8699"/>
                 </a:solidFill>
                 <a:latin typeface="Segoe UI"/>
               </a:rPr>
@@ -7366,7 +7366,7 @@
             <a:avLst/>
           </a:prstGeom>
           <a:solidFill>
-            <a:srgbClr val="E8456B"/>
+            <a:srgbClr val="C9587E"/>
           </a:solidFill>
           <a:ln>
             <a:noFill/>
@@ -7395,7 +7395,7 @@
             <a:avLst/>
           </a:prstGeom>
           <a:solidFill>
-            <a:srgbClr val="E8456B"/>
+            <a:srgbClr val="C9587E"/>
           </a:solidFill>
           <a:ln>
             <a:noFill/>
@@ -7424,7 +7424,7 @@
             <a:avLst/>
           </a:prstGeom>
           <a:solidFill>
-            <a:srgbClr val="E8456B"/>
+            <a:srgbClr val="C9587E"/>
           </a:solidFill>
           <a:ln>
             <a:noFill/>
@@ -7453,7 +7453,7 @@
             <a:avLst/>
           </a:prstGeom>
           <a:solidFill>
-            <a:srgbClr val="E8456B"/>
+            <a:srgbClr val="C9587E"/>
           </a:solidFill>
           <a:ln>
             <a:noFill/>
@@ -7482,7 +7482,7 @@
             <a:avLst/>
           </a:prstGeom>
           <a:solidFill>
-            <a:srgbClr val="E8456B"/>
+            <a:srgbClr val="C9587E"/>
           </a:solidFill>
           <a:ln>
             <a:noFill/>
@@ -7511,7 +7511,7 @@
             <a:avLst/>
           </a:prstGeom>
           <a:solidFill>
-            <a:srgbClr val="E8456B"/>
+            <a:srgbClr val="C9587E"/>
           </a:solidFill>
           <a:ln>
             <a:noFill/>
@@ -7540,7 +7540,7 @@
             <a:avLst/>
           </a:prstGeom>
           <a:solidFill>
-            <a:srgbClr val="E8456B"/>
+            <a:srgbClr val="C9587E"/>
           </a:solidFill>
           <a:ln>
             <a:noFill/>
@@ -7569,7 +7569,7 @@
             <a:avLst/>
           </a:prstGeom>
           <a:solidFill>
-            <a:srgbClr val="E8456B"/>
+            <a:srgbClr val="C9587E"/>
           </a:solidFill>
           <a:ln>
             <a:noFill/>
@@ -7598,7 +7598,7 @@
             <a:avLst/>
           </a:prstGeom>
           <a:solidFill>
-            <a:srgbClr val="E8456B"/>
+            <a:srgbClr val="C9587E"/>
           </a:solidFill>
           <a:ln>
             <a:noFill/>
@@ -7627,7 +7627,7 @@
             <a:avLst/>
           </a:prstGeom>
           <a:solidFill>
-            <a:srgbClr val="E8456B"/>
+            <a:srgbClr val="C9587E"/>
           </a:solidFill>
           <a:ln>
             <a:noFill/>
@@ -7656,7 +7656,7 @@
             <a:avLst/>
           </a:prstGeom>
           <a:solidFill>
-            <a:srgbClr val="E8456B"/>
+            <a:srgbClr val="C9587E"/>
           </a:solidFill>
           <a:ln>
             <a:noFill/>
@@ -7685,7 +7685,7 @@
             <a:avLst/>
           </a:prstGeom>
           <a:solidFill>
-            <a:srgbClr val="E8456B"/>
+            <a:srgbClr val="C9587E"/>
           </a:solidFill>
           <a:ln>
             <a:noFill/>
@@ -7714,7 +7714,7 @@
             <a:avLst/>
           </a:prstGeom>
           <a:solidFill>
-            <a:srgbClr val="E8456B"/>
+            <a:srgbClr val="C9587E"/>
           </a:solidFill>
           <a:ln>
             <a:noFill/>
@@ -7743,7 +7743,7 @@
             <a:avLst/>
           </a:prstGeom>
           <a:solidFill>
-            <a:srgbClr val="E8456B"/>
+            <a:srgbClr val="C9587E"/>
           </a:solidFill>
           <a:ln>
             <a:noFill/>
@@ -7772,7 +7772,7 @@
             <a:avLst/>
           </a:prstGeom>
           <a:solidFill>
-            <a:srgbClr val="E8456B"/>
+            <a:srgbClr val="C9587E"/>
           </a:solidFill>
           <a:ln>
             <a:noFill/>
@@ -7801,7 +7801,7 @@
             <a:avLst/>
           </a:prstGeom>
           <a:solidFill>
-            <a:srgbClr val="E8456B"/>
+            <a:srgbClr val="C9587E"/>
           </a:solidFill>
           <a:ln>
             <a:noFill/>
@@ -7830,7 +7830,7 @@
             <a:avLst/>
           </a:prstGeom>
           <a:solidFill>
-            <a:srgbClr val="E8456B"/>
+            <a:srgbClr val="C9587E"/>
           </a:solidFill>
           <a:ln>
             <a:noFill/>
@@ -7859,7 +7859,7 @@
             <a:avLst/>
           </a:prstGeom>
           <a:solidFill>
-            <a:srgbClr val="E8456B"/>
+            <a:srgbClr val="C9587E"/>
           </a:solidFill>
           <a:ln>
             <a:noFill/>
@@ -7888,7 +7888,7 @@
             <a:avLst/>
           </a:prstGeom>
           <a:solidFill>
-            <a:srgbClr val="E8456B"/>
+            <a:srgbClr val="C9587E"/>
           </a:solidFill>
           <a:ln>
             <a:noFill/>
@@ -7917,7 +7917,7 @@
             <a:avLst/>
           </a:prstGeom>
           <a:solidFill>
-            <a:srgbClr val="E8456B"/>
+            <a:srgbClr val="C9587E"/>
           </a:solidFill>
           <a:ln>
             <a:noFill/>
@@ -7946,7 +7946,7 @@
             <a:avLst/>
           </a:prstGeom>
           <a:solidFill>
-            <a:srgbClr val="E8456B"/>
+            <a:srgbClr val="C9587E"/>
           </a:solidFill>
           <a:ln>
             <a:noFill/>
@@ -7975,7 +7975,7 @@
             <a:avLst/>
           </a:prstGeom>
           <a:solidFill>
-            <a:srgbClr val="E8456B"/>
+            <a:srgbClr val="C9587E"/>
           </a:solidFill>
           <a:ln>
             <a:noFill/>
@@ -8004,7 +8004,7 @@
             <a:avLst/>
           </a:prstGeom>
           <a:solidFill>
-            <a:srgbClr val="E8456B"/>
+            <a:srgbClr val="C9587E"/>
           </a:solidFill>
           <a:ln>
             <a:noFill/>
@@ -8033,7 +8033,7 @@
             <a:avLst/>
           </a:prstGeom>
           <a:solidFill>
-            <a:srgbClr val="E8456B"/>
+            <a:srgbClr val="C9587E"/>
           </a:solidFill>
           <a:ln>
             <a:noFill/>
@@ -8062,7 +8062,7 @@
             <a:avLst/>
           </a:prstGeom>
           <a:solidFill>
-            <a:srgbClr val="E8456B"/>
+            <a:srgbClr val="C9587E"/>
           </a:solidFill>
           <a:ln>
             <a:noFill/>
@@ -8091,7 +8091,7 @@
             <a:avLst/>
           </a:prstGeom>
           <a:solidFill>
-            <a:srgbClr val="E8456B"/>
+            <a:srgbClr val="C9587E"/>
           </a:solidFill>
           <a:ln>
             <a:noFill/>
@@ -8120,7 +8120,7 @@
             <a:avLst/>
           </a:prstGeom>
           <a:solidFill>
-            <a:srgbClr val="E8456B"/>
+            <a:srgbClr val="C9587E"/>
           </a:solidFill>
           <a:ln>
             <a:noFill/>
@@ -8149,7 +8149,7 @@
             <a:avLst/>
           </a:prstGeom>
           <a:solidFill>
-            <a:srgbClr val="E8456B"/>
+            <a:srgbClr val="C9587E"/>
           </a:solidFill>
           <a:ln>
             <a:noFill/>
@@ -8178,7 +8178,7 @@
             <a:avLst/>
           </a:prstGeom>
           <a:solidFill>
-            <a:srgbClr val="E8456B"/>
+            <a:srgbClr val="C9587E"/>
           </a:solidFill>
           <a:ln>
             <a:noFill/>
@@ -8207,7 +8207,7 @@
             <a:avLst/>
           </a:prstGeom>
           <a:solidFill>
-            <a:srgbClr val="E8456B"/>
+            <a:srgbClr val="C9587E"/>
           </a:solidFill>
           <a:ln>
             <a:noFill/>
@@ -8236,7 +8236,7 @@
             <a:avLst/>
           </a:prstGeom>
           <a:solidFill>
-            <a:srgbClr val="E8456B"/>
+            <a:srgbClr val="C9587E"/>
           </a:solidFill>
           <a:ln>
             <a:noFill/>
@@ -8265,7 +8265,7 @@
             <a:avLst/>
           </a:prstGeom>
           <a:solidFill>
-            <a:srgbClr val="E8456B"/>
+            <a:srgbClr val="C9587E"/>
           </a:solidFill>
           <a:ln>
             <a:noFill/>
@@ -8294,7 +8294,7 @@
             <a:avLst/>
           </a:prstGeom>
           <a:solidFill>
-            <a:srgbClr val="E8456B"/>
+            <a:srgbClr val="C9587E"/>
           </a:solidFill>
           <a:ln>
             <a:noFill/>
@@ -8323,7 +8323,7 @@
             <a:avLst/>
           </a:prstGeom>
           <a:solidFill>
-            <a:srgbClr val="E8456B"/>
+            <a:srgbClr val="C9587E"/>
           </a:solidFill>
           <a:ln>
             <a:noFill/>
@@ -8352,7 +8352,7 @@
             <a:avLst/>
           </a:prstGeom>
           <a:solidFill>
-            <a:srgbClr val="E8456B"/>
+            <a:srgbClr val="C9587E"/>
           </a:solidFill>
           <a:ln>
             <a:noFill/>
@@ -8381,7 +8381,7 @@
             <a:avLst/>
           </a:prstGeom>
           <a:solidFill>
-            <a:srgbClr val="E8456B"/>
+            <a:srgbClr val="C9587E"/>
           </a:solidFill>
           <a:ln>
             <a:noFill/>
@@ -8410,7 +8410,7 @@
             <a:avLst/>
           </a:prstGeom>
           <a:solidFill>
-            <a:srgbClr val="E8456B"/>
+            <a:srgbClr val="C9587E"/>
           </a:solidFill>
           <a:ln>
             <a:noFill/>
@@ -8439,7 +8439,7 @@
             <a:avLst/>
           </a:prstGeom>
           <a:solidFill>
-            <a:srgbClr val="E8456B"/>
+            <a:srgbClr val="C9587E"/>
           </a:solidFill>
           <a:ln>
             <a:noFill/>
@@ -8468,7 +8468,7 @@
             <a:avLst/>
           </a:prstGeom>
           <a:solidFill>
-            <a:srgbClr val="E8456B"/>
+            <a:srgbClr val="C9587E"/>
           </a:solidFill>
           <a:ln>
             <a:noFill/>
@@ -8497,7 +8497,7 @@
             <a:avLst/>
           </a:prstGeom>
           <a:solidFill>
-            <a:srgbClr val="E8456B"/>
+            <a:srgbClr val="C9587E"/>
           </a:solidFill>
           <a:ln>
             <a:noFill/>
@@ -8526,7 +8526,7 @@
             <a:avLst/>
           </a:prstGeom>
           <a:solidFill>
-            <a:srgbClr val="E8456B"/>
+            <a:srgbClr val="C9587E"/>
           </a:solidFill>
           <a:ln>
             <a:noFill/>
@@ -8555,7 +8555,7 @@
             <a:avLst/>
           </a:prstGeom>
           <a:solidFill>
-            <a:srgbClr val="E8456B"/>
+            <a:srgbClr val="C9587E"/>
           </a:solidFill>
           <a:ln>
             <a:noFill/>
@@ -8584,7 +8584,7 @@
             <a:avLst/>
           </a:prstGeom>
           <a:solidFill>
-            <a:srgbClr val="E8456B"/>
+            <a:srgbClr val="C9587E"/>
           </a:solidFill>
           <a:ln>
             <a:noFill/>
@@ -8613,7 +8613,7 @@
             <a:avLst/>
           </a:prstGeom>
           <a:solidFill>
-            <a:srgbClr val="E8456B"/>
+            <a:srgbClr val="C9587E"/>
           </a:solidFill>
           <a:ln>
             <a:noFill/>
@@ -8642,7 +8642,7 @@
             <a:avLst/>
           </a:prstGeom>
           <a:solidFill>
-            <a:srgbClr val="E8456B"/>
+            <a:srgbClr val="C9587E"/>
           </a:solidFill>
           <a:ln>
             <a:noFill/>
@@ -8671,7 +8671,7 @@
             <a:avLst/>
           </a:prstGeom>
           <a:solidFill>
-            <a:srgbClr val="E8456B"/>
+            <a:srgbClr val="C9587E"/>
           </a:solidFill>
           <a:ln>
             <a:noFill/>
@@ -8719,7 +8719,7 @@
             <a:r>
               <a:rPr sz="900" b="0" i="0">
                 <a:solidFill>
-                  <a:srgbClr val="6E6A7C"/>
+                  <a:srgbClr val="8A8699"/>
                 </a:solidFill>
                 <a:latin typeface="Segoe UI"/>
               </a:rPr>
@@ -8742,7 +8742,7 @@
     <p:bg>
       <p:bgPr>
         <a:solidFill>
-          <a:srgbClr val="FBF8F4"/>
+          <a:srgbClr val="FFF9F5"/>
         </a:solidFill>
         <a:effectLst/>
       </p:bgPr>
@@ -8788,7 +8788,7 @@
             <a:r>
               <a:rPr sz="1050" b="1" i="0" spc="190">
                 <a:solidFill>
-                  <a:srgbClr val="E8456B"/>
+                  <a:srgbClr val="C9587E"/>
                 </a:solidFill>
                 <a:latin typeface="Segoe UI"/>
               </a:rPr>
@@ -8831,7 +8831,7 @@
             <a:r>
               <a:rPr sz="4000" b="1" i="0">
                 <a:solidFill>
-                  <a:srgbClr val="1F1D2B"/>
+                  <a:srgbClr val="3D3A4F"/>
                 </a:solidFill>
                 <a:latin typeface="Segoe UI"/>
               </a:rPr>
@@ -8855,7 +8855,7 @@
             <a:avLst/>
           </a:prstGeom>
           <a:solidFill>
-            <a:srgbClr val="E8456B"/>
+            <a:srgbClr val="C9587E"/>
           </a:solidFill>
           <a:ln>
             <a:noFill/>
@@ -8903,7 +8903,7 @@
             <a:r>
               <a:rPr sz="1150" b="1" i="0" spc="120">
                 <a:solidFill>
-                  <a:srgbClr val="E8456B"/>
+                  <a:srgbClr val="C9587E"/>
                 </a:solidFill>
                 <a:latin typeface="Segoe UI"/>
               </a:rPr>
@@ -8946,7 +8946,7 @@
             <a:r>
               <a:rPr sz="1900" b="0" i="0">
                 <a:solidFill>
-                  <a:srgbClr val="1F1D2B"/>
+                  <a:srgbClr val="3D3A4F"/>
                 </a:solidFill>
                 <a:latin typeface="Segoe UI"/>
               </a:rPr>
@@ -8970,7 +8970,7 @@
             <a:avLst/>
           </a:prstGeom>
           <a:solidFill>
-            <a:srgbClr val="E7DED4"/>
+            <a:srgbClr val="F1E7E2"/>
           </a:solidFill>
           <a:ln>
             <a:noFill/>
@@ -9018,7 +9018,7 @@
             <a:r>
               <a:rPr sz="1150" b="1" i="0" spc="120">
                 <a:solidFill>
-                  <a:srgbClr val="E8456B"/>
+                  <a:srgbClr val="C9587E"/>
                 </a:solidFill>
                 <a:latin typeface="Segoe UI"/>
               </a:rPr>
@@ -9061,7 +9061,7 @@
             <a:r>
               <a:rPr sz="1900" b="0" i="0">
                 <a:solidFill>
-                  <a:srgbClr val="1F1D2B"/>
+                  <a:srgbClr val="3D3A4F"/>
                 </a:solidFill>
                 <a:latin typeface="Segoe UI"/>
               </a:rPr>
@@ -9085,7 +9085,7 @@
             <a:avLst/>
           </a:prstGeom>
           <a:solidFill>
-            <a:srgbClr val="E7DED4"/>
+            <a:srgbClr val="F1E7E2"/>
           </a:solidFill>
           <a:ln>
             <a:noFill/>
@@ -9133,7 +9133,7 @@
             <a:r>
               <a:rPr sz="1150" b="1" i="0" spc="120">
                 <a:solidFill>
-                  <a:srgbClr val="E8456B"/>
+                  <a:srgbClr val="C9587E"/>
                 </a:solidFill>
                 <a:latin typeface="Segoe UI"/>
               </a:rPr>
@@ -9176,11 +9176,11 @@
             <a:r>
               <a:rPr sz="1900" b="0" i="0">
                 <a:solidFill>
-                  <a:srgbClr val="1F1D2B"/>
+                  <a:srgbClr val="3D3A4F"/>
                 </a:solidFill>
                 <a:latin typeface="Segoe UI"/>
               </a:rPr>
-              <a:t>Dispersos en Pinterest, sin forma de hacerlos</a:t>
+              <a:t>Patrones en imágenes, sin progreso ni materiales</a:t>
             </a:r>
           </a:p>
         </p:txBody>
@@ -9206,7 +9206,7 @@
           </a:solidFill>
           <a:ln w="12700">
             <a:solidFill>
-              <a:srgbClr val="E7DED4"/>
+              <a:srgbClr val="F1E7E2"/>
             </a:solidFill>
           </a:ln>
           <a:effectLst>
@@ -9257,13 +9257,13 @@
               </a:spcAft>
             </a:pPr>
             <a:r>
-              <a:rPr sz="6200" b="1" i="0">
+              <a:rPr sz="5400" b="1" i="0">
                 <a:solidFill>
-                  <a:srgbClr val="E8456B"/>
+                  <a:srgbClr val="C9587E"/>
                 </a:solidFill>
                 <a:latin typeface="Segoe UI"/>
               </a:rPr>
-              <a:t>4.800</a:t>
+              <a:t>16.384</a:t>
             </a:r>
           </a:p>
         </p:txBody>
@@ -9302,1214 +9302,25 @@
             <a:r>
               <a:rPr sz="1400" b="0" i="0">
                 <a:solidFill>
-                  <a:srgbClr val="6E6A7C"/>
+                  <a:srgbClr val="8A8699"/>
                 </a:solidFill>
                 <a:latin typeface="Segoe UI"/>
               </a:rPr>
-              <a:t>cuentas en 80 × 60</a:t>
-            </a:r>
-          </a:p>
-        </p:txBody>
-      </p:sp>
-      <p:sp>
-        <p:nvSpPr>
-          <p:cNvPr id="16" name="Rectangle 15"/>
-          <p:cNvSpPr/>
-          <p:nvPr/>
-        </p:nvSpPr>
-        <p:spPr>
-          <a:xfrm>
-            <a:off x="7827264" y="4087368"/>
-            <a:ext cx="141732" cy="141732"/>
-          </a:xfrm>
-          <a:prstGeom prst="rect">
-            <a:avLst/>
-          </a:prstGeom>
-          <a:solidFill>
-            <a:srgbClr val="E7DED4"/>
-          </a:solidFill>
-          <a:ln>
-            <a:noFill/>
-          </a:ln>
-        </p:spPr>
-        <p:txBody>
-          <a:bodyPr rtlCol="0" anchor="ctr"/>
-          <a:lstStyle/>
-          <a:p>
-            <a:pPr algn="ctr"/>
-          </a:p>
-        </p:txBody>
-      </p:sp>
-      <p:sp>
-        <p:nvSpPr>
-          <p:cNvPr id="17" name="Rectangle 16"/>
-          <p:cNvSpPr/>
-          <p:nvPr/>
-        </p:nvSpPr>
-        <p:spPr>
-          <a:xfrm>
-            <a:off x="8010144" y="4087368"/>
-            <a:ext cx="141732" cy="141732"/>
-          </a:xfrm>
-          <a:prstGeom prst="rect">
-            <a:avLst/>
-          </a:prstGeom>
-          <a:solidFill>
-            <a:srgbClr val="E8456B"/>
-          </a:solidFill>
-          <a:ln>
-            <a:noFill/>
-          </a:ln>
-        </p:spPr>
-        <p:txBody>
-          <a:bodyPr rtlCol="0" anchor="ctr"/>
-          <a:lstStyle/>
-          <a:p>
-            <a:pPr algn="ctr"/>
-          </a:p>
-        </p:txBody>
-      </p:sp>
-      <p:sp>
-        <p:nvSpPr>
-          <p:cNvPr id="18" name="Rectangle 17"/>
-          <p:cNvSpPr/>
-          <p:nvPr/>
-        </p:nvSpPr>
-        <p:spPr>
-          <a:xfrm>
-            <a:off x="8193024" y="4087368"/>
-            <a:ext cx="141732" cy="141732"/>
-          </a:xfrm>
-          <a:prstGeom prst="rect">
-            <a:avLst/>
-          </a:prstGeom>
-          <a:solidFill>
-            <a:srgbClr val="E7DED4"/>
-          </a:solidFill>
-          <a:ln>
-            <a:noFill/>
-          </a:ln>
-        </p:spPr>
-        <p:txBody>
-          <a:bodyPr rtlCol="0" anchor="ctr"/>
-          <a:lstStyle/>
-          <a:p>
-            <a:pPr algn="ctr"/>
-          </a:p>
-        </p:txBody>
-      </p:sp>
-      <p:sp>
-        <p:nvSpPr>
-          <p:cNvPr id="19" name="Rectangle 18"/>
-          <p:cNvSpPr/>
-          <p:nvPr/>
-        </p:nvSpPr>
-        <p:spPr>
-          <a:xfrm>
-            <a:off x="8375904" y="4087368"/>
-            <a:ext cx="141732" cy="141732"/>
-          </a:xfrm>
-          <a:prstGeom prst="rect">
-            <a:avLst/>
-          </a:prstGeom>
-          <a:solidFill>
-            <a:srgbClr val="E7DED4"/>
-          </a:solidFill>
-          <a:ln>
-            <a:noFill/>
-          </a:ln>
-        </p:spPr>
-        <p:txBody>
-          <a:bodyPr rtlCol="0" anchor="ctr"/>
-          <a:lstStyle/>
-          <a:p>
-            <a:pPr algn="ctr"/>
-          </a:p>
-        </p:txBody>
-      </p:sp>
-      <p:sp>
-        <p:nvSpPr>
-          <p:cNvPr id="20" name="Rectangle 19"/>
-          <p:cNvSpPr/>
-          <p:nvPr/>
-        </p:nvSpPr>
-        <p:spPr>
-          <a:xfrm>
-            <a:off x="8558784" y="4087368"/>
-            <a:ext cx="141732" cy="141732"/>
-          </a:xfrm>
-          <a:prstGeom prst="rect">
-            <a:avLst/>
-          </a:prstGeom>
-          <a:solidFill>
-            <a:srgbClr val="E8456B"/>
-          </a:solidFill>
-          <a:ln>
-            <a:noFill/>
-          </a:ln>
-        </p:spPr>
-        <p:txBody>
-          <a:bodyPr rtlCol="0" anchor="ctr"/>
-          <a:lstStyle/>
-          <a:p>
-            <a:pPr algn="ctr"/>
-          </a:p>
-        </p:txBody>
-      </p:sp>
-      <p:sp>
-        <p:nvSpPr>
-          <p:cNvPr id="21" name="Rectangle 20"/>
-          <p:cNvSpPr/>
-          <p:nvPr/>
-        </p:nvSpPr>
-        <p:spPr>
-          <a:xfrm>
-            <a:off x="8741664" y="4087368"/>
-            <a:ext cx="141732" cy="141732"/>
-          </a:xfrm>
-          <a:prstGeom prst="rect">
-            <a:avLst/>
-          </a:prstGeom>
-          <a:solidFill>
-            <a:srgbClr val="E7DED4"/>
-          </a:solidFill>
-          <a:ln>
-            <a:noFill/>
-          </a:ln>
-        </p:spPr>
-        <p:txBody>
-          <a:bodyPr rtlCol="0" anchor="ctr"/>
-          <a:lstStyle/>
-          <a:p>
-            <a:pPr algn="ctr"/>
-          </a:p>
-        </p:txBody>
-      </p:sp>
-      <p:sp>
-        <p:nvSpPr>
-          <p:cNvPr id="22" name="Rectangle 21"/>
-          <p:cNvSpPr/>
-          <p:nvPr/>
-        </p:nvSpPr>
-        <p:spPr>
-          <a:xfrm>
-            <a:off x="8924544" y="4087368"/>
-            <a:ext cx="141732" cy="141732"/>
-          </a:xfrm>
-          <a:prstGeom prst="rect">
-            <a:avLst/>
-          </a:prstGeom>
-          <a:solidFill>
-            <a:srgbClr val="E7DED4"/>
-          </a:solidFill>
-          <a:ln>
-            <a:noFill/>
-          </a:ln>
-        </p:spPr>
-        <p:txBody>
-          <a:bodyPr rtlCol="0" anchor="ctr"/>
-          <a:lstStyle/>
-          <a:p>
-            <a:pPr algn="ctr"/>
-          </a:p>
-        </p:txBody>
-      </p:sp>
-      <p:sp>
-        <p:nvSpPr>
-          <p:cNvPr id="23" name="Rectangle 22"/>
-          <p:cNvSpPr/>
-          <p:nvPr/>
-        </p:nvSpPr>
-        <p:spPr>
-          <a:xfrm>
-            <a:off x="9107424" y="4087368"/>
-            <a:ext cx="141732" cy="141732"/>
-          </a:xfrm>
-          <a:prstGeom prst="rect">
-            <a:avLst/>
-          </a:prstGeom>
-          <a:solidFill>
-            <a:srgbClr val="E7DED4"/>
-          </a:solidFill>
-          <a:ln>
-            <a:noFill/>
-          </a:ln>
-        </p:spPr>
-        <p:txBody>
-          <a:bodyPr rtlCol="0" anchor="ctr"/>
-          <a:lstStyle/>
-          <a:p>
-            <a:pPr algn="ctr"/>
-          </a:p>
-        </p:txBody>
-      </p:sp>
-      <p:sp>
-        <p:nvSpPr>
-          <p:cNvPr id="24" name="Rectangle 23"/>
-          <p:cNvSpPr/>
-          <p:nvPr/>
-        </p:nvSpPr>
-        <p:spPr>
-          <a:xfrm>
-            <a:off x="7827264" y="4270248"/>
-            <a:ext cx="141732" cy="141732"/>
-          </a:xfrm>
-          <a:prstGeom prst="rect">
-            <a:avLst/>
-          </a:prstGeom>
-          <a:solidFill>
-            <a:srgbClr val="E7DED4"/>
-          </a:solidFill>
-          <a:ln>
-            <a:noFill/>
-          </a:ln>
-        </p:spPr>
-        <p:txBody>
-          <a:bodyPr rtlCol="0" anchor="ctr"/>
-          <a:lstStyle/>
-          <a:p>
-            <a:pPr algn="ctr"/>
-          </a:p>
-        </p:txBody>
-      </p:sp>
-      <p:sp>
-        <p:nvSpPr>
-          <p:cNvPr id="25" name="Rectangle 24"/>
-          <p:cNvSpPr/>
-          <p:nvPr/>
-        </p:nvSpPr>
-        <p:spPr>
-          <a:xfrm>
-            <a:off x="8010144" y="4270248"/>
-            <a:ext cx="141732" cy="141732"/>
-          </a:xfrm>
-          <a:prstGeom prst="rect">
-            <a:avLst/>
-          </a:prstGeom>
-          <a:solidFill>
-            <a:srgbClr val="E7DED4"/>
-          </a:solidFill>
-          <a:ln>
-            <a:noFill/>
-          </a:ln>
-        </p:spPr>
-        <p:txBody>
-          <a:bodyPr rtlCol="0" anchor="ctr"/>
-          <a:lstStyle/>
-          <a:p>
-            <a:pPr algn="ctr"/>
-          </a:p>
-        </p:txBody>
-      </p:sp>
-      <p:sp>
-        <p:nvSpPr>
-          <p:cNvPr id="26" name="Rectangle 25"/>
-          <p:cNvSpPr/>
-          <p:nvPr/>
-        </p:nvSpPr>
-        <p:spPr>
-          <a:xfrm>
-            <a:off x="8193024" y="4270248"/>
-            <a:ext cx="141732" cy="141732"/>
-          </a:xfrm>
-          <a:prstGeom prst="rect">
-            <a:avLst/>
-          </a:prstGeom>
-          <a:solidFill>
-            <a:srgbClr val="E8456B"/>
-          </a:solidFill>
-          <a:ln>
-            <a:noFill/>
-          </a:ln>
-        </p:spPr>
-        <p:txBody>
-          <a:bodyPr rtlCol="0" anchor="ctr"/>
-          <a:lstStyle/>
-          <a:p>
-            <a:pPr algn="ctr"/>
-          </a:p>
-        </p:txBody>
-      </p:sp>
-      <p:sp>
-        <p:nvSpPr>
-          <p:cNvPr id="27" name="Rectangle 26"/>
-          <p:cNvSpPr/>
-          <p:nvPr/>
-        </p:nvSpPr>
-        <p:spPr>
-          <a:xfrm>
-            <a:off x="8375904" y="4270248"/>
-            <a:ext cx="141732" cy="141732"/>
-          </a:xfrm>
-          <a:prstGeom prst="rect">
-            <a:avLst/>
-          </a:prstGeom>
-          <a:solidFill>
-            <a:srgbClr val="E7DED4"/>
-          </a:solidFill>
-          <a:ln>
-            <a:noFill/>
-          </a:ln>
-        </p:spPr>
-        <p:txBody>
-          <a:bodyPr rtlCol="0" anchor="ctr"/>
-          <a:lstStyle/>
-          <a:p>
-            <a:pPr algn="ctr"/>
-          </a:p>
-        </p:txBody>
-      </p:sp>
-      <p:sp>
-        <p:nvSpPr>
-          <p:cNvPr id="28" name="Rectangle 27"/>
-          <p:cNvSpPr/>
-          <p:nvPr/>
-        </p:nvSpPr>
-        <p:spPr>
-          <a:xfrm>
-            <a:off x="8558784" y="4270248"/>
-            <a:ext cx="141732" cy="141732"/>
-          </a:xfrm>
-          <a:prstGeom prst="rect">
-            <a:avLst/>
-          </a:prstGeom>
-          <a:solidFill>
-            <a:srgbClr val="E7DED4"/>
-          </a:solidFill>
-          <a:ln>
-            <a:noFill/>
-          </a:ln>
-        </p:spPr>
-        <p:txBody>
-          <a:bodyPr rtlCol="0" anchor="ctr"/>
-          <a:lstStyle/>
-          <a:p>
-            <a:pPr algn="ctr"/>
-          </a:p>
-        </p:txBody>
-      </p:sp>
-      <p:sp>
-        <p:nvSpPr>
-          <p:cNvPr id="29" name="Rectangle 28"/>
-          <p:cNvSpPr/>
-          <p:nvPr/>
-        </p:nvSpPr>
-        <p:spPr>
-          <a:xfrm>
-            <a:off x="8741664" y="4270248"/>
-            <a:ext cx="141732" cy="141732"/>
-          </a:xfrm>
-          <a:prstGeom prst="rect">
-            <a:avLst/>
-          </a:prstGeom>
-          <a:solidFill>
-            <a:srgbClr val="E7DED4"/>
-          </a:solidFill>
-          <a:ln>
-            <a:noFill/>
-          </a:ln>
-        </p:spPr>
-        <p:txBody>
-          <a:bodyPr rtlCol="0" anchor="ctr"/>
-          <a:lstStyle/>
-          <a:p>
-            <a:pPr algn="ctr"/>
-          </a:p>
-        </p:txBody>
-      </p:sp>
-      <p:sp>
-        <p:nvSpPr>
-          <p:cNvPr id="30" name="Rectangle 29"/>
-          <p:cNvSpPr/>
-          <p:nvPr/>
-        </p:nvSpPr>
-        <p:spPr>
-          <a:xfrm>
-            <a:off x="8924544" y="4270248"/>
-            <a:ext cx="141732" cy="141732"/>
-          </a:xfrm>
-          <a:prstGeom prst="rect">
-            <a:avLst/>
-          </a:prstGeom>
-          <a:solidFill>
-            <a:srgbClr val="E7DED4"/>
-          </a:solidFill>
-          <a:ln>
-            <a:noFill/>
-          </a:ln>
-        </p:spPr>
-        <p:txBody>
-          <a:bodyPr rtlCol="0" anchor="ctr"/>
-          <a:lstStyle/>
-          <a:p>
-            <a:pPr algn="ctr"/>
-          </a:p>
-        </p:txBody>
-      </p:sp>
-      <p:sp>
-        <p:nvSpPr>
-          <p:cNvPr id="31" name="Rectangle 30"/>
-          <p:cNvSpPr/>
-          <p:nvPr/>
-        </p:nvSpPr>
-        <p:spPr>
-          <a:xfrm>
-            <a:off x="9107424" y="4270248"/>
-            <a:ext cx="141732" cy="141732"/>
-          </a:xfrm>
-          <a:prstGeom prst="rect">
-            <a:avLst/>
-          </a:prstGeom>
-          <a:solidFill>
-            <a:srgbClr val="E7DED4"/>
-          </a:solidFill>
-          <a:ln>
-            <a:noFill/>
-          </a:ln>
-        </p:spPr>
-        <p:txBody>
-          <a:bodyPr rtlCol="0" anchor="ctr"/>
-          <a:lstStyle/>
-          <a:p>
-            <a:pPr algn="ctr"/>
-          </a:p>
-        </p:txBody>
-      </p:sp>
-      <p:sp>
-        <p:nvSpPr>
-          <p:cNvPr id="32" name="Rectangle 31"/>
-          <p:cNvSpPr/>
-          <p:nvPr/>
-        </p:nvSpPr>
-        <p:spPr>
-          <a:xfrm>
-            <a:off x="7827264" y="4453128"/>
-            <a:ext cx="141732" cy="141732"/>
-          </a:xfrm>
-          <a:prstGeom prst="rect">
-            <a:avLst/>
-          </a:prstGeom>
-          <a:solidFill>
-            <a:srgbClr val="E8456B"/>
-          </a:solidFill>
-          <a:ln>
-            <a:noFill/>
-          </a:ln>
-        </p:spPr>
-        <p:txBody>
-          <a:bodyPr rtlCol="0" anchor="ctr"/>
-          <a:lstStyle/>
-          <a:p>
-            <a:pPr algn="ctr"/>
-          </a:p>
-        </p:txBody>
-      </p:sp>
-      <p:sp>
-        <p:nvSpPr>
-          <p:cNvPr id="33" name="Rectangle 32"/>
-          <p:cNvSpPr/>
-          <p:nvPr/>
-        </p:nvSpPr>
-        <p:spPr>
-          <a:xfrm>
-            <a:off x="8010144" y="4453128"/>
-            <a:ext cx="141732" cy="141732"/>
-          </a:xfrm>
-          <a:prstGeom prst="rect">
-            <a:avLst/>
-          </a:prstGeom>
-          <a:solidFill>
-            <a:srgbClr val="E7DED4"/>
-          </a:solidFill>
-          <a:ln>
-            <a:noFill/>
-          </a:ln>
-        </p:spPr>
-        <p:txBody>
-          <a:bodyPr rtlCol="0" anchor="ctr"/>
-          <a:lstStyle/>
-          <a:p>
-            <a:pPr algn="ctr"/>
-          </a:p>
-        </p:txBody>
-      </p:sp>
-      <p:sp>
-        <p:nvSpPr>
-          <p:cNvPr id="34" name="Rectangle 33"/>
-          <p:cNvSpPr/>
-          <p:nvPr/>
-        </p:nvSpPr>
-        <p:spPr>
-          <a:xfrm>
-            <a:off x="8193024" y="4453128"/>
-            <a:ext cx="141732" cy="141732"/>
-          </a:xfrm>
-          <a:prstGeom prst="rect">
-            <a:avLst/>
-          </a:prstGeom>
-          <a:solidFill>
-            <a:srgbClr val="E7DED4"/>
-          </a:solidFill>
-          <a:ln>
-            <a:noFill/>
-          </a:ln>
-        </p:spPr>
-        <p:txBody>
-          <a:bodyPr rtlCol="0" anchor="ctr"/>
-          <a:lstStyle/>
-          <a:p>
-            <a:pPr algn="ctr"/>
-          </a:p>
-        </p:txBody>
-      </p:sp>
-      <p:sp>
-        <p:nvSpPr>
-          <p:cNvPr id="35" name="Rectangle 34"/>
-          <p:cNvSpPr/>
-          <p:nvPr/>
-        </p:nvSpPr>
-        <p:spPr>
-          <a:xfrm>
-            <a:off x="8375904" y="4453128"/>
-            <a:ext cx="141732" cy="141732"/>
-          </a:xfrm>
-          <a:prstGeom prst="rect">
-            <a:avLst/>
-          </a:prstGeom>
-          <a:solidFill>
-            <a:srgbClr val="E7DED4"/>
-          </a:solidFill>
-          <a:ln>
-            <a:noFill/>
-          </a:ln>
-        </p:spPr>
-        <p:txBody>
-          <a:bodyPr rtlCol="0" anchor="ctr"/>
-          <a:lstStyle/>
-          <a:p>
-            <a:pPr algn="ctr"/>
-          </a:p>
-        </p:txBody>
-      </p:sp>
-      <p:sp>
-        <p:nvSpPr>
-          <p:cNvPr id="36" name="Rectangle 35"/>
-          <p:cNvSpPr/>
-          <p:nvPr/>
-        </p:nvSpPr>
-        <p:spPr>
-          <a:xfrm>
-            <a:off x="8558784" y="4453128"/>
-            <a:ext cx="141732" cy="141732"/>
-          </a:xfrm>
-          <a:prstGeom prst="rect">
-            <a:avLst/>
-          </a:prstGeom>
-          <a:solidFill>
-            <a:srgbClr val="E7DED4"/>
-          </a:solidFill>
-          <a:ln>
-            <a:noFill/>
-          </a:ln>
-        </p:spPr>
-        <p:txBody>
-          <a:bodyPr rtlCol="0" anchor="ctr"/>
-          <a:lstStyle/>
-          <a:p>
-            <a:pPr algn="ctr"/>
-          </a:p>
-        </p:txBody>
-      </p:sp>
-      <p:sp>
-        <p:nvSpPr>
-          <p:cNvPr id="37" name="Rectangle 36"/>
-          <p:cNvSpPr/>
-          <p:nvPr/>
-        </p:nvSpPr>
-        <p:spPr>
-          <a:xfrm>
-            <a:off x="8741664" y="4453128"/>
-            <a:ext cx="141732" cy="141732"/>
-          </a:xfrm>
-          <a:prstGeom prst="rect">
-            <a:avLst/>
-          </a:prstGeom>
-          <a:solidFill>
-            <a:srgbClr val="E8456B"/>
-          </a:solidFill>
-          <a:ln>
-            <a:noFill/>
-          </a:ln>
-        </p:spPr>
-        <p:txBody>
-          <a:bodyPr rtlCol="0" anchor="ctr"/>
-          <a:lstStyle/>
-          <a:p>
-            <a:pPr algn="ctr"/>
-          </a:p>
-        </p:txBody>
-      </p:sp>
-      <p:sp>
-        <p:nvSpPr>
-          <p:cNvPr id="38" name="Rectangle 37"/>
-          <p:cNvSpPr/>
-          <p:nvPr/>
-        </p:nvSpPr>
-        <p:spPr>
-          <a:xfrm>
-            <a:off x="8924544" y="4453128"/>
-            <a:ext cx="141732" cy="141732"/>
-          </a:xfrm>
-          <a:prstGeom prst="rect">
-            <a:avLst/>
-          </a:prstGeom>
-          <a:solidFill>
-            <a:srgbClr val="E7DED4"/>
-          </a:solidFill>
-          <a:ln>
-            <a:noFill/>
-          </a:ln>
-        </p:spPr>
-        <p:txBody>
-          <a:bodyPr rtlCol="0" anchor="ctr"/>
-          <a:lstStyle/>
-          <a:p>
-            <a:pPr algn="ctr"/>
-          </a:p>
-        </p:txBody>
-      </p:sp>
-      <p:sp>
-        <p:nvSpPr>
-          <p:cNvPr id="39" name="Rectangle 38"/>
-          <p:cNvSpPr/>
-          <p:nvPr/>
-        </p:nvSpPr>
-        <p:spPr>
-          <a:xfrm>
-            <a:off x="9107424" y="4453128"/>
-            <a:ext cx="141732" cy="141732"/>
-          </a:xfrm>
-          <a:prstGeom prst="rect">
-            <a:avLst/>
-          </a:prstGeom>
-          <a:solidFill>
-            <a:srgbClr val="E7DED4"/>
-          </a:solidFill>
-          <a:ln>
-            <a:noFill/>
-          </a:ln>
-        </p:spPr>
-        <p:txBody>
-          <a:bodyPr rtlCol="0" anchor="ctr"/>
-          <a:lstStyle/>
-          <a:p>
-            <a:pPr algn="ctr"/>
-          </a:p>
-        </p:txBody>
-      </p:sp>
-      <p:sp>
-        <p:nvSpPr>
-          <p:cNvPr id="40" name="Rectangle 39"/>
-          <p:cNvSpPr/>
-          <p:nvPr/>
-        </p:nvSpPr>
-        <p:spPr>
-          <a:xfrm>
-            <a:off x="7827264" y="4636008"/>
-            <a:ext cx="141732" cy="141732"/>
-          </a:xfrm>
-          <a:prstGeom prst="rect">
-            <a:avLst/>
-          </a:prstGeom>
-          <a:solidFill>
-            <a:srgbClr val="E7DED4"/>
-          </a:solidFill>
-          <a:ln>
-            <a:noFill/>
-          </a:ln>
-        </p:spPr>
-        <p:txBody>
-          <a:bodyPr rtlCol="0" anchor="ctr"/>
-          <a:lstStyle/>
-          <a:p>
-            <a:pPr algn="ctr"/>
-          </a:p>
-        </p:txBody>
-      </p:sp>
-      <p:sp>
-        <p:nvSpPr>
-          <p:cNvPr id="41" name="Rectangle 40"/>
-          <p:cNvSpPr/>
-          <p:nvPr/>
-        </p:nvSpPr>
-        <p:spPr>
-          <a:xfrm>
-            <a:off x="8010144" y="4636008"/>
-            <a:ext cx="141732" cy="141732"/>
-          </a:xfrm>
-          <a:prstGeom prst="rect">
-            <a:avLst/>
-          </a:prstGeom>
-          <a:solidFill>
-            <a:srgbClr val="E7DED4"/>
-          </a:solidFill>
-          <a:ln>
-            <a:noFill/>
-          </a:ln>
-        </p:spPr>
-        <p:txBody>
-          <a:bodyPr rtlCol="0" anchor="ctr"/>
-          <a:lstStyle/>
-          <a:p>
-            <a:pPr algn="ctr"/>
-          </a:p>
-        </p:txBody>
-      </p:sp>
-      <p:sp>
-        <p:nvSpPr>
-          <p:cNvPr id="42" name="Rectangle 41"/>
-          <p:cNvSpPr/>
-          <p:nvPr/>
-        </p:nvSpPr>
-        <p:spPr>
-          <a:xfrm>
-            <a:off x="8193024" y="4636008"/>
-            <a:ext cx="141732" cy="141732"/>
-          </a:xfrm>
-          <a:prstGeom prst="rect">
-            <a:avLst/>
-          </a:prstGeom>
-          <a:solidFill>
-            <a:srgbClr val="E7DED4"/>
-          </a:solidFill>
-          <a:ln>
-            <a:noFill/>
-          </a:ln>
-        </p:spPr>
-        <p:txBody>
-          <a:bodyPr rtlCol="0" anchor="ctr"/>
-          <a:lstStyle/>
-          <a:p>
-            <a:pPr algn="ctr"/>
-          </a:p>
-        </p:txBody>
-      </p:sp>
-      <p:sp>
-        <p:nvSpPr>
-          <p:cNvPr id="43" name="Rectangle 42"/>
-          <p:cNvSpPr/>
-          <p:nvPr/>
-        </p:nvSpPr>
-        <p:spPr>
-          <a:xfrm>
-            <a:off x="8375904" y="4636008"/>
-            <a:ext cx="141732" cy="141732"/>
-          </a:xfrm>
-          <a:prstGeom prst="rect">
-            <a:avLst/>
-          </a:prstGeom>
-          <a:solidFill>
-            <a:srgbClr val="E8456B"/>
-          </a:solidFill>
-          <a:ln>
-            <a:noFill/>
-          </a:ln>
-        </p:spPr>
-        <p:txBody>
-          <a:bodyPr rtlCol="0" anchor="ctr"/>
-          <a:lstStyle/>
-          <a:p>
-            <a:pPr algn="ctr"/>
-          </a:p>
-        </p:txBody>
-      </p:sp>
-      <p:sp>
-        <p:nvSpPr>
-          <p:cNvPr id="44" name="Rectangle 43"/>
-          <p:cNvSpPr/>
-          <p:nvPr/>
-        </p:nvSpPr>
-        <p:spPr>
-          <a:xfrm>
-            <a:off x="8558784" y="4636008"/>
-            <a:ext cx="141732" cy="141732"/>
-          </a:xfrm>
-          <a:prstGeom prst="rect">
-            <a:avLst/>
-          </a:prstGeom>
-          <a:solidFill>
-            <a:srgbClr val="E7DED4"/>
-          </a:solidFill>
-          <a:ln>
-            <a:noFill/>
-          </a:ln>
-        </p:spPr>
-        <p:txBody>
-          <a:bodyPr rtlCol="0" anchor="ctr"/>
-          <a:lstStyle/>
-          <a:p>
-            <a:pPr algn="ctr"/>
-          </a:p>
-        </p:txBody>
-      </p:sp>
-      <p:sp>
-        <p:nvSpPr>
-          <p:cNvPr id="45" name="Rectangle 44"/>
-          <p:cNvSpPr/>
-          <p:nvPr/>
-        </p:nvSpPr>
-        <p:spPr>
-          <a:xfrm>
-            <a:off x="8741664" y="4636008"/>
-            <a:ext cx="141732" cy="141732"/>
-          </a:xfrm>
-          <a:prstGeom prst="rect">
-            <a:avLst/>
-          </a:prstGeom>
-          <a:solidFill>
-            <a:srgbClr val="E7DED4"/>
-          </a:solidFill>
-          <a:ln>
-            <a:noFill/>
-          </a:ln>
-        </p:spPr>
-        <p:txBody>
-          <a:bodyPr rtlCol="0" anchor="ctr"/>
-          <a:lstStyle/>
-          <a:p>
-            <a:pPr algn="ctr"/>
-          </a:p>
-        </p:txBody>
-      </p:sp>
-      <p:sp>
-        <p:nvSpPr>
-          <p:cNvPr id="46" name="Rectangle 45"/>
-          <p:cNvSpPr/>
-          <p:nvPr/>
-        </p:nvSpPr>
-        <p:spPr>
-          <a:xfrm>
-            <a:off x="8924544" y="4636008"/>
-            <a:ext cx="141732" cy="141732"/>
-          </a:xfrm>
-          <a:prstGeom prst="rect">
-            <a:avLst/>
-          </a:prstGeom>
-          <a:solidFill>
-            <a:srgbClr val="E7DED4"/>
-          </a:solidFill>
-          <a:ln>
-            <a:noFill/>
-          </a:ln>
-        </p:spPr>
-        <p:txBody>
-          <a:bodyPr rtlCol="0" anchor="ctr"/>
-          <a:lstStyle/>
-          <a:p>
-            <a:pPr algn="ctr"/>
-          </a:p>
-        </p:txBody>
-      </p:sp>
-      <p:sp>
-        <p:nvSpPr>
-          <p:cNvPr id="47" name="Rectangle 46"/>
-          <p:cNvSpPr/>
-          <p:nvPr/>
-        </p:nvSpPr>
-        <p:spPr>
-          <a:xfrm>
-            <a:off x="9107424" y="4636008"/>
-            <a:ext cx="141732" cy="141732"/>
-          </a:xfrm>
-          <a:prstGeom prst="rect">
-            <a:avLst/>
-          </a:prstGeom>
-          <a:solidFill>
-            <a:srgbClr val="E7DED4"/>
-          </a:solidFill>
-          <a:ln>
-            <a:noFill/>
-          </a:ln>
-        </p:spPr>
-        <p:txBody>
-          <a:bodyPr rtlCol="0" anchor="ctr"/>
-          <a:lstStyle/>
-          <a:p>
-            <a:pPr algn="ctr"/>
-          </a:p>
-        </p:txBody>
-      </p:sp>
-      <p:sp>
-        <p:nvSpPr>
-          <p:cNvPr id="48" name="Rectangle 47"/>
-          <p:cNvSpPr/>
-          <p:nvPr/>
-        </p:nvSpPr>
-        <p:spPr>
-          <a:xfrm>
-            <a:off x="7827264" y="4818888"/>
-            <a:ext cx="141732" cy="141732"/>
-          </a:xfrm>
-          <a:prstGeom prst="rect">
-            <a:avLst/>
-          </a:prstGeom>
-          <a:solidFill>
-            <a:srgbClr val="E7DED4"/>
-          </a:solidFill>
-          <a:ln>
-            <a:noFill/>
-          </a:ln>
-        </p:spPr>
-        <p:txBody>
-          <a:bodyPr rtlCol="0" anchor="ctr"/>
-          <a:lstStyle/>
-          <a:p>
-            <a:pPr algn="ctr"/>
-          </a:p>
-        </p:txBody>
-      </p:sp>
-      <p:sp>
-        <p:nvSpPr>
-          <p:cNvPr id="49" name="Rectangle 48"/>
-          <p:cNvSpPr/>
-          <p:nvPr/>
-        </p:nvSpPr>
-        <p:spPr>
-          <a:xfrm>
-            <a:off x="8010144" y="4818888"/>
-            <a:ext cx="141732" cy="141732"/>
-          </a:xfrm>
-          <a:prstGeom prst="rect">
-            <a:avLst/>
-          </a:prstGeom>
-          <a:solidFill>
-            <a:srgbClr val="E8456B"/>
-          </a:solidFill>
-          <a:ln>
-            <a:noFill/>
-          </a:ln>
-        </p:spPr>
-        <p:txBody>
-          <a:bodyPr rtlCol="0" anchor="ctr"/>
-          <a:lstStyle/>
-          <a:p>
-            <a:pPr algn="ctr"/>
-          </a:p>
-        </p:txBody>
-      </p:sp>
-      <p:sp>
-        <p:nvSpPr>
-          <p:cNvPr id="50" name="Rectangle 49"/>
-          <p:cNvSpPr/>
-          <p:nvPr/>
-        </p:nvSpPr>
-        <p:spPr>
-          <a:xfrm>
-            <a:off x="8193024" y="4818888"/>
-            <a:ext cx="141732" cy="141732"/>
-          </a:xfrm>
-          <a:prstGeom prst="rect">
-            <a:avLst/>
-          </a:prstGeom>
-          <a:solidFill>
-            <a:srgbClr val="E7DED4"/>
-          </a:solidFill>
-          <a:ln>
-            <a:noFill/>
-          </a:ln>
-        </p:spPr>
-        <p:txBody>
-          <a:bodyPr rtlCol="0" anchor="ctr"/>
-          <a:lstStyle/>
-          <a:p>
-            <a:pPr algn="ctr"/>
-          </a:p>
-        </p:txBody>
-      </p:sp>
-      <p:sp>
-        <p:nvSpPr>
-          <p:cNvPr id="51" name="Rectangle 50"/>
-          <p:cNvSpPr/>
-          <p:nvPr/>
-        </p:nvSpPr>
-        <p:spPr>
-          <a:xfrm>
-            <a:off x="8375904" y="4818888"/>
-            <a:ext cx="141732" cy="141732"/>
-          </a:xfrm>
-          <a:prstGeom prst="rect">
-            <a:avLst/>
-          </a:prstGeom>
-          <a:solidFill>
-            <a:srgbClr val="E7DED4"/>
-          </a:solidFill>
-          <a:ln>
-            <a:noFill/>
-          </a:ln>
-        </p:spPr>
-        <p:txBody>
-          <a:bodyPr rtlCol="0" anchor="ctr"/>
-          <a:lstStyle/>
-          <a:p>
-            <a:pPr algn="ctr"/>
-          </a:p>
-        </p:txBody>
-      </p:sp>
-      <p:sp>
-        <p:nvSpPr>
-          <p:cNvPr id="52" name="Rectangle 51"/>
-          <p:cNvSpPr/>
-          <p:nvPr/>
-        </p:nvSpPr>
-        <p:spPr>
-          <a:xfrm>
-            <a:off x="8558784" y="4818888"/>
-            <a:ext cx="141732" cy="141732"/>
-          </a:xfrm>
-          <a:prstGeom prst="rect">
-            <a:avLst/>
-          </a:prstGeom>
-          <a:solidFill>
-            <a:srgbClr val="E8456B"/>
-          </a:solidFill>
-          <a:ln>
-            <a:noFill/>
-          </a:ln>
-        </p:spPr>
-        <p:txBody>
-          <a:bodyPr rtlCol="0" anchor="ctr"/>
-          <a:lstStyle/>
-          <a:p>
-            <a:pPr algn="ctr"/>
-          </a:p>
-        </p:txBody>
-      </p:sp>
-      <p:sp>
-        <p:nvSpPr>
-          <p:cNvPr id="53" name="Rectangle 52"/>
-          <p:cNvSpPr/>
-          <p:nvPr/>
-        </p:nvSpPr>
-        <p:spPr>
-          <a:xfrm>
-            <a:off x="8741664" y="4818888"/>
-            <a:ext cx="141732" cy="141732"/>
-          </a:xfrm>
-          <a:prstGeom prst="rect">
-            <a:avLst/>
-          </a:prstGeom>
-          <a:solidFill>
-            <a:srgbClr val="E7DED4"/>
-          </a:solidFill>
-          <a:ln>
-            <a:noFill/>
-          </a:ln>
-        </p:spPr>
-        <p:txBody>
-          <a:bodyPr rtlCol="0" anchor="ctr"/>
-          <a:lstStyle/>
-          <a:p>
-            <a:pPr algn="ctr"/>
-          </a:p>
-        </p:txBody>
-      </p:sp>
-      <p:sp>
-        <p:nvSpPr>
-          <p:cNvPr id="54" name="Rectangle 53"/>
-          <p:cNvSpPr/>
-          <p:nvPr/>
-        </p:nvSpPr>
-        <p:spPr>
-          <a:xfrm>
-            <a:off x="8924544" y="4818888"/>
-            <a:ext cx="141732" cy="141732"/>
-          </a:xfrm>
-          <a:prstGeom prst="rect">
-            <a:avLst/>
-          </a:prstGeom>
-          <a:solidFill>
-            <a:srgbClr val="E7DED4"/>
-          </a:solidFill>
-          <a:ln>
-            <a:noFill/>
-          </a:ln>
-        </p:spPr>
-        <p:txBody>
-          <a:bodyPr rtlCol="0" anchor="ctr"/>
-          <a:lstStyle/>
-          <a:p>
-            <a:pPr algn="ctr"/>
-          </a:p>
-        </p:txBody>
-      </p:sp>
-      <p:sp>
-        <p:nvSpPr>
-          <p:cNvPr id="55" name="Rectangle 54"/>
-          <p:cNvSpPr/>
-          <p:nvPr/>
-        </p:nvSpPr>
-        <p:spPr>
-          <a:xfrm>
-            <a:off x="9107424" y="4818888"/>
-            <a:ext cx="141732" cy="141732"/>
-          </a:xfrm>
-          <a:prstGeom prst="rect">
-            <a:avLst/>
-          </a:prstGeom>
-          <a:solidFill>
-            <a:srgbClr val="E7DED4"/>
-          </a:solidFill>
-          <a:ln>
-            <a:noFill/>
-          </a:ln>
-        </p:spPr>
-        <p:txBody>
-          <a:bodyPr rtlCol="0" anchor="ctr"/>
-          <a:lstStyle/>
-          <a:p>
-            <a:pPr algn="ctr"/>
-          </a:p>
-        </p:txBody>
-      </p:sp>
-      <p:sp>
-        <p:nvSpPr>
-          <p:cNvPr id="56" name="Rectangle 55"/>
-          <p:cNvSpPr/>
-          <p:nvPr/>
-        </p:nvSpPr>
-        <p:spPr>
-          <a:xfrm>
-            <a:off x="777240" y="6327648"/>
-            <a:ext cx="10637215" cy="8229"/>
-          </a:xfrm>
-          <a:prstGeom prst="rect">
-            <a:avLst/>
-          </a:prstGeom>
-          <a:solidFill>
-            <a:srgbClr val="E7DED4"/>
-          </a:solidFill>
-          <a:ln>
-            <a:noFill/>
-          </a:ln>
-        </p:spPr>
-        <p:txBody>
-          <a:bodyPr rtlCol="0" anchor="ctr"/>
-          <a:lstStyle/>
-          <a:p>
-            <a:pPr algn="ctr"/>
-          </a:p>
-        </p:txBody>
-      </p:sp>
-      <p:sp>
-        <p:nvSpPr>
-          <p:cNvPr id="57" name="TextBox 56"/>
+              <a:t>celdas en 128 × 128</a:t>
+            </a:r>
+          </a:p>
+        </p:txBody>
+      </p:sp>
+      <p:sp>
+        <p:nvSpPr>
+          <p:cNvPr id="16" name="TextBox 15"/>
           <p:cNvSpPr txBox="1"/>
           <p:nvPr/>
         </p:nvSpPr>
         <p:spPr>
           <a:xfrm>
-            <a:off x="777240" y="6419088"/>
-            <a:ext cx="4572000" cy="228600"/>
+            <a:off x="7808975" y="3767328"/>
+            <a:ext cx="3291839" cy="228600"/>
           </a:xfrm>
           <a:prstGeom prst="rect">
             <a:avLst/>
@@ -10532,9 +9343,1241 @@
               </a:spcAft>
             </a:pPr>
             <a:r>
+              <a:rPr sz="1050" b="0" i="0">
+                <a:solidFill>
+                  <a:srgbClr val="8A8699"/>
+                </a:solidFill>
+                <a:latin typeface="Segoe UI"/>
+              </a:rPr>
+              <a:t>hasta 64 colores reales</a:t>
+            </a:r>
+          </a:p>
+        </p:txBody>
+      </p:sp>
+      <p:sp>
+        <p:nvSpPr>
+          <p:cNvPr id="17" name="Rectangle 16"/>
+          <p:cNvSpPr/>
+          <p:nvPr/>
+        </p:nvSpPr>
+        <p:spPr>
+          <a:xfrm>
+            <a:off x="7827264" y="4087368"/>
+            <a:ext cx="141732" cy="141732"/>
+          </a:xfrm>
+          <a:prstGeom prst="rect">
+            <a:avLst/>
+          </a:prstGeom>
+          <a:solidFill>
+            <a:srgbClr val="F1E7E2"/>
+          </a:solidFill>
+          <a:ln>
+            <a:noFill/>
+          </a:ln>
+        </p:spPr>
+        <p:txBody>
+          <a:bodyPr rtlCol="0" anchor="ctr"/>
+          <a:lstStyle/>
+          <a:p>
+            <a:pPr algn="ctr"/>
+          </a:p>
+        </p:txBody>
+      </p:sp>
+      <p:sp>
+        <p:nvSpPr>
+          <p:cNvPr id="18" name="Rectangle 17"/>
+          <p:cNvSpPr/>
+          <p:nvPr/>
+        </p:nvSpPr>
+        <p:spPr>
+          <a:xfrm>
+            <a:off x="8010144" y="4087368"/>
+            <a:ext cx="141732" cy="141732"/>
+          </a:xfrm>
+          <a:prstGeom prst="rect">
+            <a:avLst/>
+          </a:prstGeom>
+          <a:solidFill>
+            <a:srgbClr val="C9587E"/>
+          </a:solidFill>
+          <a:ln>
+            <a:noFill/>
+          </a:ln>
+        </p:spPr>
+        <p:txBody>
+          <a:bodyPr rtlCol="0" anchor="ctr"/>
+          <a:lstStyle/>
+          <a:p>
+            <a:pPr algn="ctr"/>
+          </a:p>
+        </p:txBody>
+      </p:sp>
+      <p:sp>
+        <p:nvSpPr>
+          <p:cNvPr id="19" name="Rectangle 18"/>
+          <p:cNvSpPr/>
+          <p:nvPr/>
+        </p:nvSpPr>
+        <p:spPr>
+          <a:xfrm>
+            <a:off x="8193024" y="4087368"/>
+            <a:ext cx="141732" cy="141732"/>
+          </a:xfrm>
+          <a:prstGeom prst="rect">
+            <a:avLst/>
+          </a:prstGeom>
+          <a:solidFill>
+            <a:srgbClr val="F1E7E2"/>
+          </a:solidFill>
+          <a:ln>
+            <a:noFill/>
+          </a:ln>
+        </p:spPr>
+        <p:txBody>
+          <a:bodyPr rtlCol="0" anchor="ctr"/>
+          <a:lstStyle/>
+          <a:p>
+            <a:pPr algn="ctr"/>
+          </a:p>
+        </p:txBody>
+      </p:sp>
+      <p:sp>
+        <p:nvSpPr>
+          <p:cNvPr id="20" name="Rectangle 19"/>
+          <p:cNvSpPr/>
+          <p:nvPr/>
+        </p:nvSpPr>
+        <p:spPr>
+          <a:xfrm>
+            <a:off x="8375904" y="4087368"/>
+            <a:ext cx="141732" cy="141732"/>
+          </a:xfrm>
+          <a:prstGeom prst="rect">
+            <a:avLst/>
+          </a:prstGeom>
+          <a:solidFill>
+            <a:srgbClr val="F1E7E2"/>
+          </a:solidFill>
+          <a:ln>
+            <a:noFill/>
+          </a:ln>
+        </p:spPr>
+        <p:txBody>
+          <a:bodyPr rtlCol="0" anchor="ctr"/>
+          <a:lstStyle/>
+          <a:p>
+            <a:pPr algn="ctr"/>
+          </a:p>
+        </p:txBody>
+      </p:sp>
+      <p:sp>
+        <p:nvSpPr>
+          <p:cNvPr id="21" name="Rectangle 20"/>
+          <p:cNvSpPr/>
+          <p:nvPr/>
+        </p:nvSpPr>
+        <p:spPr>
+          <a:xfrm>
+            <a:off x="8558784" y="4087368"/>
+            <a:ext cx="141732" cy="141732"/>
+          </a:xfrm>
+          <a:prstGeom prst="rect">
+            <a:avLst/>
+          </a:prstGeom>
+          <a:solidFill>
+            <a:srgbClr val="C9587E"/>
+          </a:solidFill>
+          <a:ln>
+            <a:noFill/>
+          </a:ln>
+        </p:spPr>
+        <p:txBody>
+          <a:bodyPr rtlCol="0" anchor="ctr"/>
+          <a:lstStyle/>
+          <a:p>
+            <a:pPr algn="ctr"/>
+          </a:p>
+        </p:txBody>
+      </p:sp>
+      <p:sp>
+        <p:nvSpPr>
+          <p:cNvPr id="22" name="Rectangle 21"/>
+          <p:cNvSpPr/>
+          <p:nvPr/>
+        </p:nvSpPr>
+        <p:spPr>
+          <a:xfrm>
+            <a:off x="8741664" y="4087368"/>
+            <a:ext cx="141732" cy="141732"/>
+          </a:xfrm>
+          <a:prstGeom prst="rect">
+            <a:avLst/>
+          </a:prstGeom>
+          <a:solidFill>
+            <a:srgbClr val="F1E7E2"/>
+          </a:solidFill>
+          <a:ln>
+            <a:noFill/>
+          </a:ln>
+        </p:spPr>
+        <p:txBody>
+          <a:bodyPr rtlCol="0" anchor="ctr"/>
+          <a:lstStyle/>
+          <a:p>
+            <a:pPr algn="ctr"/>
+          </a:p>
+        </p:txBody>
+      </p:sp>
+      <p:sp>
+        <p:nvSpPr>
+          <p:cNvPr id="23" name="Rectangle 22"/>
+          <p:cNvSpPr/>
+          <p:nvPr/>
+        </p:nvSpPr>
+        <p:spPr>
+          <a:xfrm>
+            <a:off x="8924544" y="4087368"/>
+            <a:ext cx="141732" cy="141732"/>
+          </a:xfrm>
+          <a:prstGeom prst="rect">
+            <a:avLst/>
+          </a:prstGeom>
+          <a:solidFill>
+            <a:srgbClr val="F1E7E2"/>
+          </a:solidFill>
+          <a:ln>
+            <a:noFill/>
+          </a:ln>
+        </p:spPr>
+        <p:txBody>
+          <a:bodyPr rtlCol="0" anchor="ctr"/>
+          <a:lstStyle/>
+          <a:p>
+            <a:pPr algn="ctr"/>
+          </a:p>
+        </p:txBody>
+      </p:sp>
+      <p:sp>
+        <p:nvSpPr>
+          <p:cNvPr id="24" name="Rectangle 23"/>
+          <p:cNvSpPr/>
+          <p:nvPr/>
+        </p:nvSpPr>
+        <p:spPr>
+          <a:xfrm>
+            <a:off x="9107424" y="4087368"/>
+            <a:ext cx="141732" cy="141732"/>
+          </a:xfrm>
+          <a:prstGeom prst="rect">
+            <a:avLst/>
+          </a:prstGeom>
+          <a:solidFill>
+            <a:srgbClr val="F1E7E2"/>
+          </a:solidFill>
+          <a:ln>
+            <a:noFill/>
+          </a:ln>
+        </p:spPr>
+        <p:txBody>
+          <a:bodyPr rtlCol="0" anchor="ctr"/>
+          <a:lstStyle/>
+          <a:p>
+            <a:pPr algn="ctr"/>
+          </a:p>
+        </p:txBody>
+      </p:sp>
+      <p:sp>
+        <p:nvSpPr>
+          <p:cNvPr id="25" name="Rectangle 24"/>
+          <p:cNvSpPr/>
+          <p:nvPr/>
+        </p:nvSpPr>
+        <p:spPr>
+          <a:xfrm>
+            <a:off x="7827264" y="4270248"/>
+            <a:ext cx="141732" cy="141732"/>
+          </a:xfrm>
+          <a:prstGeom prst="rect">
+            <a:avLst/>
+          </a:prstGeom>
+          <a:solidFill>
+            <a:srgbClr val="F1E7E2"/>
+          </a:solidFill>
+          <a:ln>
+            <a:noFill/>
+          </a:ln>
+        </p:spPr>
+        <p:txBody>
+          <a:bodyPr rtlCol="0" anchor="ctr"/>
+          <a:lstStyle/>
+          <a:p>
+            <a:pPr algn="ctr"/>
+          </a:p>
+        </p:txBody>
+      </p:sp>
+      <p:sp>
+        <p:nvSpPr>
+          <p:cNvPr id="26" name="Rectangle 25"/>
+          <p:cNvSpPr/>
+          <p:nvPr/>
+        </p:nvSpPr>
+        <p:spPr>
+          <a:xfrm>
+            <a:off x="8010144" y="4270248"/>
+            <a:ext cx="141732" cy="141732"/>
+          </a:xfrm>
+          <a:prstGeom prst="rect">
+            <a:avLst/>
+          </a:prstGeom>
+          <a:solidFill>
+            <a:srgbClr val="F1E7E2"/>
+          </a:solidFill>
+          <a:ln>
+            <a:noFill/>
+          </a:ln>
+        </p:spPr>
+        <p:txBody>
+          <a:bodyPr rtlCol="0" anchor="ctr"/>
+          <a:lstStyle/>
+          <a:p>
+            <a:pPr algn="ctr"/>
+          </a:p>
+        </p:txBody>
+      </p:sp>
+      <p:sp>
+        <p:nvSpPr>
+          <p:cNvPr id="27" name="Rectangle 26"/>
+          <p:cNvSpPr/>
+          <p:nvPr/>
+        </p:nvSpPr>
+        <p:spPr>
+          <a:xfrm>
+            <a:off x="8193024" y="4270248"/>
+            <a:ext cx="141732" cy="141732"/>
+          </a:xfrm>
+          <a:prstGeom prst="rect">
+            <a:avLst/>
+          </a:prstGeom>
+          <a:solidFill>
+            <a:srgbClr val="C9587E"/>
+          </a:solidFill>
+          <a:ln>
+            <a:noFill/>
+          </a:ln>
+        </p:spPr>
+        <p:txBody>
+          <a:bodyPr rtlCol="0" anchor="ctr"/>
+          <a:lstStyle/>
+          <a:p>
+            <a:pPr algn="ctr"/>
+          </a:p>
+        </p:txBody>
+      </p:sp>
+      <p:sp>
+        <p:nvSpPr>
+          <p:cNvPr id="28" name="Rectangle 27"/>
+          <p:cNvSpPr/>
+          <p:nvPr/>
+        </p:nvSpPr>
+        <p:spPr>
+          <a:xfrm>
+            <a:off x="8375904" y="4270248"/>
+            <a:ext cx="141732" cy="141732"/>
+          </a:xfrm>
+          <a:prstGeom prst="rect">
+            <a:avLst/>
+          </a:prstGeom>
+          <a:solidFill>
+            <a:srgbClr val="F1E7E2"/>
+          </a:solidFill>
+          <a:ln>
+            <a:noFill/>
+          </a:ln>
+        </p:spPr>
+        <p:txBody>
+          <a:bodyPr rtlCol="0" anchor="ctr"/>
+          <a:lstStyle/>
+          <a:p>
+            <a:pPr algn="ctr"/>
+          </a:p>
+        </p:txBody>
+      </p:sp>
+      <p:sp>
+        <p:nvSpPr>
+          <p:cNvPr id="29" name="Rectangle 28"/>
+          <p:cNvSpPr/>
+          <p:nvPr/>
+        </p:nvSpPr>
+        <p:spPr>
+          <a:xfrm>
+            <a:off x="8558784" y="4270248"/>
+            <a:ext cx="141732" cy="141732"/>
+          </a:xfrm>
+          <a:prstGeom prst="rect">
+            <a:avLst/>
+          </a:prstGeom>
+          <a:solidFill>
+            <a:srgbClr val="F1E7E2"/>
+          </a:solidFill>
+          <a:ln>
+            <a:noFill/>
+          </a:ln>
+        </p:spPr>
+        <p:txBody>
+          <a:bodyPr rtlCol="0" anchor="ctr"/>
+          <a:lstStyle/>
+          <a:p>
+            <a:pPr algn="ctr"/>
+          </a:p>
+        </p:txBody>
+      </p:sp>
+      <p:sp>
+        <p:nvSpPr>
+          <p:cNvPr id="30" name="Rectangle 29"/>
+          <p:cNvSpPr/>
+          <p:nvPr/>
+        </p:nvSpPr>
+        <p:spPr>
+          <a:xfrm>
+            <a:off x="8741664" y="4270248"/>
+            <a:ext cx="141732" cy="141732"/>
+          </a:xfrm>
+          <a:prstGeom prst="rect">
+            <a:avLst/>
+          </a:prstGeom>
+          <a:solidFill>
+            <a:srgbClr val="F1E7E2"/>
+          </a:solidFill>
+          <a:ln>
+            <a:noFill/>
+          </a:ln>
+        </p:spPr>
+        <p:txBody>
+          <a:bodyPr rtlCol="0" anchor="ctr"/>
+          <a:lstStyle/>
+          <a:p>
+            <a:pPr algn="ctr"/>
+          </a:p>
+        </p:txBody>
+      </p:sp>
+      <p:sp>
+        <p:nvSpPr>
+          <p:cNvPr id="31" name="Rectangle 30"/>
+          <p:cNvSpPr/>
+          <p:nvPr/>
+        </p:nvSpPr>
+        <p:spPr>
+          <a:xfrm>
+            <a:off x="8924544" y="4270248"/>
+            <a:ext cx="141732" cy="141732"/>
+          </a:xfrm>
+          <a:prstGeom prst="rect">
+            <a:avLst/>
+          </a:prstGeom>
+          <a:solidFill>
+            <a:srgbClr val="F1E7E2"/>
+          </a:solidFill>
+          <a:ln>
+            <a:noFill/>
+          </a:ln>
+        </p:spPr>
+        <p:txBody>
+          <a:bodyPr rtlCol="0" anchor="ctr"/>
+          <a:lstStyle/>
+          <a:p>
+            <a:pPr algn="ctr"/>
+          </a:p>
+        </p:txBody>
+      </p:sp>
+      <p:sp>
+        <p:nvSpPr>
+          <p:cNvPr id="32" name="Rectangle 31"/>
+          <p:cNvSpPr/>
+          <p:nvPr/>
+        </p:nvSpPr>
+        <p:spPr>
+          <a:xfrm>
+            <a:off x="9107424" y="4270248"/>
+            <a:ext cx="141732" cy="141732"/>
+          </a:xfrm>
+          <a:prstGeom prst="rect">
+            <a:avLst/>
+          </a:prstGeom>
+          <a:solidFill>
+            <a:srgbClr val="F1E7E2"/>
+          </a:solidFill>
+          <a:ln>
+            <a:noFill/>
+          </a:ln>
+        </p:spPr>
+        <p:txBody>
+          <a:bodyPr rtlCol="0" anchor="ctr"/>
+          <a:lstStyle/>
+          <a:p>
+            <a:pPr algn="ctr"/>
+          </a:p>
+        </p:txBody>
+      </p:sp>
+      <p:sp>
+        <p:nvSpPr>
+          <p:cNvPr id="33" name="Rectangle 32"/>
+          <p:cNvSpPr/>
+          <p:nvPr/>
+        </p:nvSpPr>
+        <p:spPr>
+          <a:xfrm>
+            <a:off x="7827264" y="4453128"/>
+            <a:ext cx="141732" cy="141732"/>
+          </a:xfrm>
+          <a:prstGeom prst="rect">
+            <a:avLst/>
+          </a:prstGeom>
+          <a:solidFill>
+            <a:srgbClr val="C9587E"/>
+          </a:solidFill>
+          <a:ln>
+            <a:noFill/>
+          </a:ln>
+        </p:spPr>
+        <p:txBody>
+          <a:bodyPr rtlCol="0" anchor="ctr"/>
+          <a:lstStyle/>
+          <a:p>
+            <a:pPr algn="ctr"/>
+          </a:p>
+        </p:txBody>
+      </p:sp>
+      <p:sp>
+        <p:nvSpPr>
+          <p:cNvPr id="34" name="Rectangle 33"/>
+          <p:cNvSpPr/>
+          <p:nvPr/>
+        </p:nvSpPr>
+        <p:spPr>
+          <a:xfrm>
+            <a:off x="8010144" y="4453128"/>
+            <a:ext cx="141732" cy="141732"/>
+          </a:xfrm>
+          <a:prstGeom prst="rect">
+            <a:avLst/>
+          </a:prstGeom>
+          <a:solidFill>
+            <a:srgbClr val="F1E7E2"/>
+          </a:solidFill>
+          <a:ln>
+            <a:noFill/>
+          </a:ln>
+        </p:spPr>
+        <p:txBody>
+          <a:bodyPr rtlCol="0" anchor="ctr"/>
+          <a:lstStyle/>
+          <a:p>
+            <a:pPr algn="ctr"/>
+          </a:p>
+        </p:txBody>
+      </p:sp>
+      <p:sp>
+        <p:nvSpPr>
+          <p:cNvPr id="35" name="Rectangle 34"/>
+          <p:cNvSpPr/>
+          <p:nvPr/>
+        </p:nvSpPr>
+        <p:spPr>
+          <a:xfrm>
+            <a:off x="8193024" y="4453128"/>
+            <a:ext cx="141732" cy="141732"/>
+          </a:xfrm>
+          <a:prstGeom prst="rect">
+            <a:avLst/>
+          </a:prstGeom>
+          <a:solidFill>
+            <a:srgbClr val="F1E7E2"/>
+          </a:solidFill>
+          <a:ln>
+            <a:noFill/>
+          </a:ln>
+        </p:spPr>
+        <p:txBody>
+          <a:bodyPr rtlCol="0" anchor="ctr"/>
+          <a:lstStyle/>
+          <a:p>
+            <a:pPr algn="ctr"/>
+          </a:p>
+        </p:txBody>
+      </p:sp>
+      <p:sp>
+        <p:nvSpPr>
+          <p:cNvPr id="36" name="Rectangle 35"/>
+          <p:cNvSpPr/>
+          <p:nvPr/>
+        </p:nvSpPr>
+        <p:spPr>
+          <a:xfrm>
+            <a:off x="8375904" y="4453128"/>
+            <a:ext cx="141732" cy="141732"/>
+          </a:xfrm>
+          <a:prstGeom prst="rect">
+            <a:avLst/>
+          </a:prstGeom>
+          <a:solidFill>
+            <a:srgbClr val="F1E7E2"/>
+          </a:solidFill>
+          <a:ln>
+            <a:noFill/>
+          </a:ln>
+        </p:spPr>
+        <p:txBody>
+          <a:bodyPr rtlCol="0" anchor="ctr"/>
+          <a:lstStyle/>
+          <a:p>
+            <a:pPr algn="ctr"/>
+          </a:p>
+        </p:txBody>
+      </p:sp>
+      <p:sp>
+        <p:nvSpPr>
+          <p:cNvPr id="37" name="Rectangle 36"/>
+          <p:cNvSpPr/>
+          <p:nvPr/>
+        </p:nvSpPr>
+        <p:spPr>
+          <a:xfrm>
+            <a:off x="8558784" y="4453128"/>
+            <a:ext cx="141732" cy="141732"/>
+          </a:xfrm>
+          <a:prstGeom prst="rect">
+            <a:avLst/>
+          </a:prstGeom>
+          <a:solidFill>
+            <a:srgbClr val="F1E7E2"/>
+          </a:solidFill>
+          <a:ln>
+            <a:noFill/>
+          </a:ln>
+        </p:spPr>
+        <p:txBody>
+          <a:bodyPr rtlCol="0" anchor="ctr"/>
+          <a:lstStyle/>
+          <a:p>
+            <a:pPr algn="ctr"/>
+          </a:p>
+        </p:txBody>
+      </p:sp>
+      <p:sp>
+        <p:nvSpPr>
+          <p:cNvPr id="38" name="Rectangle 37"/>
+          <p:cNvSpPr/>
+          <p:nvPr/>
+        </p:nvSpPr>
+        <p:spPr>
+          <a:xfrm>
+            <a:off x="8741664" y="4453128"/>
+            <a:ext cx="141732" cy="141732"/>
+          </a:xfrm>
+          <a:prstGeom prst="rect">
+            <a:avLst/>
+          </a:prstGeom>
+          <a:solidFill>
+            <a:srgbClr val="C9587E"/>
+          </a:solidFill>
+          <a:ln>
+            <a:noFill/>
+          </a:ln>
+        </p:spPr>
+        <p:txBody>
+          <a:bodyPr rtlCol="0" anchor="ctr"/>
+          <a:lstStyle/>
+          <a:p>
+            <a:pPr algn="ctr"/>
+          </a:p>
+        </p:txBody>
+      </p:sp>
+      <p:sp>
+        <p:nvSpPr>
+          <p:cNvPr id="39" name="Rectangle 38"/>
+          <p:cNvSpPr/>
+          <p:nvPr/>
+        </p:nvSpPr>
+        <p:spPr>
+          <a:xfrm>
+            <a:off x="8924544" y="4453128"/>
+            <a:ext cx="141732" cy="141732"/>
+          </a:xfrm>
+          <a:prstGeom prst="rect">
+            <a:avLst/>
+          </a:prstGeom>
+          <a:solidFill>
+            <a:srgbClr val="F1E7E2"/>
+          </a:solidFill>
+          <a:ln>
+            <a:noFill/>
+          </a:ln>
+        </p:spPr>
+        <p:txBody>
+          <a:bodyPr rtlCol="0" anchor="ctr"/>
+          <a:lstStyle/>
+          <a:p>
+            <a:pPr algn="ctr"/>
+          </a:p>
+        </p:txBody>
+      </p:sp>
+      <p:sp>
+        <p:nvSpPr>
+          <p:cNvPr id="40" name="Rectangle 39"/>
+          <p:cNvSpPr/>
+          <p:nvPr/>
+        </p:nvSpPr>
+        <p:spPr>
+          <a:xfrm>
+            <a:off x="9107424" y="4453128"/>
+            <a:ext cx="141732" cy="141732"/>
+          </a:xfrm>
+          <a:prstGeom prst="rect">
+            <a:avLst/>
+          </a:prstGeom>
+          <a:solidFill>
+            <a:srgbClr val="F1E7E2"/>
+          </a:solidFill>
+          <a:ln>
+            <a:noFill/>
+          </a:ln>
+        </p:spPr>
+        <p:txBody>
+          <a:bodyPr rtlCol="0" anchor="ctr"/>
+          <a:lstStyle/>
+          <a:p>
+            <a:pPr algn="ctr"/>
+          </a:p>
+        </p:txBody>
+      </p:sp>
+      <p:sp>
+        <p:nvSpPr>
+          <p:cNvPr id="41" name="Rectangle 40"/>
+          <p:cNvSpPr/>
+          <p:nvPr/>
+        </p:nvSpPr>
+        <p:spPr>
+          <a:xfrm>
+            <a:off x="7827264" y="4636008"/>
+            <a:ext cx="141732" cy="141732"/>
+          </a:xfrm>
+          <a:prstGeom prst="rect">
+            <a:avLst/>
+          </a:prstGeom>
+          <a:solidFill>
+            <a:srgbClr val="F1E7E2"/>
+          </a:solidFill>
+          <a:ln>
+            <a:noFill/>
+          </a:ln>
+        </p:spPr>
+        <p:txBody>
+          <a:bodyPr rtlCol="0" anchor="ctr"/>
+          <a:lstStyle/>
+          <a:p>
+            <a:pPr algn="ctr"/>
+          </a:p>
+        </p:txBody>
+      </p:sp>
+      <p:sp>
+        <p:nvSpPr>
+          <p:cNvPr id="42" name="Rectangle 41"/>
+          <p:cNvSpPr/>
+          <p:nvPr/>
+        </p:nvSpPr>
+        <p:spPr>
+          <a:xfrm>
+            <a:off x="8010144" y="4636008"/>
+            <a:ext cx="141732" cy="141732"/>
+          </a:xfrm>
+          <a:prstGeom prst="rect">
+            <a:avLst/>
+          </a:prstGeom>
+          <a:solidFill>
+            <a:srgbClr val="F1E7E2"/>
+          </a:solidFill>
+          <a:ln>
+            <a:noFill/>
+          </a:ln>
+        </p:spPr>
+        <p:txBody>
+          <a:bodyPr rtlCol="0" anchor="ctr"/>
+          <a:lstStyle/>
+          <a:p>
+            <a:pPr algn="ctr"/>
+          </a:p>
+        </p:txBody>
+      </p:sp>
+      <p:sp>
+        <p:nvSpPr>
+          <p:cNvPr id="43" name="Rectangle 42"/>
+          <p:cNvSpPr/>
+          <p:nvPr/>
+        </p:nvSpPr>
+        <p:spPr>
+          <a:xfrm>
+            <a:off x="8193024" y="4636008"/>
+            <a:ext cx="141732" cy="141732"/>
+          </a:xfrm>
+          <a:prstGeom prst="rect">
+            <a:avLst/>
+          </a:prstGeom>
+          <a:solidFill>
+            <a:srgbClr val="F1E7E2"/>
+          </a:solidFill>
+          <a:ln>
+            <a:noFill/>
+          </a:ln>
+        </p:spPr>
+        <p:txBody>
+          <a:bodyPr rtlCol="0" anchor="ctr"/>
+          <a:lstStyle/>
+          <a:p>
+            <a:pPr algn="ctr"/>
+          </a:p>
+        </p:txBody>
+      </p:sp>
+      <p:sp>
+        <p:nvSpPr>
+          <p:cNvPr id="44" name="Rectangle 43"/>
+          <p:cNvSpPr/>
+          <p:nvPr/>
+        </p:nvSpPr>
+        <p:spPr>
+          <a:xfrm>
+            <a:off x="8375904" y="4636008"/>
+            <a:ext cx="141732" cy="141732"/>
+          </a:xfrm>
+          <a:prstGeom prst="rect">
+            <a:avLst/>
+          </a:prstGeom>
+          <a:solidFill>
+            <a:srgbClr val="C9587E"/>
+          </a:solidFill>
+          <a:ln>
+            <a:noFill/>
+          </a:ln>
+        </p:spPr>
+        <p:txBody>
+          <a:bodyPr rtlCol="0" anchor="ctr"/>
+          <a:lstStyle/>
+          <a:p>
+            <a:pPr algn="ctr"/>
+          </a:p>
+        </p:txBody>
+      </p:sp>
+      <p:sp>
+        <p:nvSpPr>
+          <p:cNvPr id="45" name="Rectangle 44"/>
+          <p:cNvSpPr/>
+          <p:nvPr/>
+        </p:nvSpPr>
+        <p:spPr>
+          <a:xfrm>
+            <a:off x="8558784" y="4636008"/>
+            <a:ext cx="141732" cy="141732"/>
+          </a:xfrm>
+          <a:prstGeom prst="rect">
+            <a:avLst/>
+          </a:prstGeom>
+          <a:solidFill>
+            <a:srgbClr val="F1E7E2"/>
+          </a:solidFill>
+          <a:ln>
+            <a:noFill/>
+          </a:ln>
+        </p:spPr>
+        <p:txBody>
+          <a:bodyPr rtlCol="0" anchor="ctr"/>
+          <a:lstStyle/>
+          <a:p>
+            <a:pPr algn="ctr"/>
+          </a:p>
+        </p:txBody>
+      </p:sp>
+      <p:sp>
+        <p:nvSpPr>
+          <p:cNvPr id="46" name="Rectangle 45"/>
+          <p:cNvSpPr/>
+          <p:nvPr/>
+        </p:nvSpPr>
+        <p:spPr>
+          <a:xfrm>
+            <a:off x="8741664" y="4636008"/>
+            <a:ext cx="141732" cy="141732"/>
+          </a:xfrm>
+          <a:prstGeom prst="rect">
+            <a:avLst/>
+          </a:prstGeom>
+          <a:solidFill>
+            <a:srgbClr val="F1E7E2"/>
+          </a:solidFill>
+          <a:ln>
+            <a:noFill/>
+          </a:ln>
+        </p:spPr>
+        <p:txBody>
+          <a:bodyPr rtlCol="0" anchor="ctr"/>
+          <a:lstStyle/>
+          <a:p>
+            <a:pPr algn="ctr"/>
+          </a:p>
+        </p:txBody>
+      </p:sp>
+      <p:sp>
+        <p:nvSpPr>
+          <p:cNvPr id="47" name="Rectangle 46"/>
+          <p:cNvSpPr/>
+          <p:nvPr/>
+        </p:nvSpPr>
+        <p:spPr>
+          <a:xfrm>
+            <a:off x="8924544" y="4636008"/>
+            <a:ext cx="141732" cy="141732"/>
+          </a:xfrm>
+          <a:prstGeom prst="rect">
+            <a:avLst/>
+          </a:prstGeom>
+          <a:solidFill>
+            <a:srgbClr val="F1E7E2"/>
+          </a:solidFill>
+          <a:ln>
+            <a:noFill/>
+          </a:ln>
+        </p:spPr>
+        <p:txBody>
+          <a:bodyPr rtlCol="0" anchor="ctr"/>
+          <a:lstStyle/>
+          <a:p>
+            <a:pPr algn="ctr"/>
+          </a:p>
+        </p:txBody>
+      </p:sp>
+      <p:sp>
+        <p:nvSpPr>
+          <p:cNvPr id="48" name="Rectangle 47"/>
+          <p:cNvSpPr/>
+          <p:nvPr/>
+        </p:nvSpPr>
+        <p:spPr>
+          <a:xfrm>
+            <a:off x="9107424" y="4636008"/>
+            <a:ext cx="141732" cy="141732"/>
+          </a:xfrm>
+          <a:prstGeom prst="rect">
+            <a:avLst/>
+          </a:prstGeom>
+          <a:solidFill>
+            <a:srgbClr val="F1E7E2"/>
+          </a:solidFill>
+          <a:ln>
+            <a:noFill/>
+          </a:ln>
+        </p:spPr>
+        <p:txBody>
+          <a:bodyPr rtlCol="0" anchor="ctr"/>
+          <a:lstStyle/>
+          <a:p>
+            <a:pPr algn="ctr"/>
+          </a:p>
+        </p:txBody>
+      </p:sp>
+      <p:sp>
+        <p:nvSpPr>
+          <p:cNvPr id="49" name="Rectangle 48"/>
+          <p:cNvSpPr/>
+          <p:nvPr/>
+        </p:nvSpPr>
+        <p:spPr>
+          <a:xfrm>
+            <a:off x="7827264" y="4818888"/>
+            <a:ext cx="141732" cy="141732"/>
+          </a:xfrm>
+          <a:prstGeom prst="rect">
+            <a:avLst/>
+          </a:prstGeom>
+          <a:solidFill>
+            <a:srgbClr val="F1E7E2"/>
+          </a:solidFill>
+          <a:ln>
+            <a:noFill/>
+          </a:ln>
+        </p:spPr>
+        <p:txBody>
+          <a:bodyPr rtlCol="0" anchor="ctr"/>
+          <a:lstStyle/>
+          <a:p>
+            <a:pPr algn="ctr"/>
+          </a:p>
+        </p:txBody>
+      </p:sp>
+      <p:sp>
+        <p:nvSpPr>
+          <p:cNvPr id="50" name="Rectangle 49"/>
+          <p:cNvSpPr/>
+          <p:nvPr/>
+        </p:nvSpPr>
+        <p:spPr>
+          <a:xfrm>
+            <a:off x="8010144" y="4818888"/>
+            <a:ext cx="141732" cy="141732"/>
+          </a:xfrm>
+          <a:prstGeom prst="rect">
+            <a:avLst/>
+          </a:prstGeom>
+          <a:solidFill>
+            <a:srgbClr val="C9587E"/>
+          </a:solidFill>
+          <a:ln>
+            <a:noFill/>
+          </a:ln>
+        </p:spPr>
+        <p:txBody>
+          <a:bodyPr rtlCol="0" anchor="ctr"/>
+          <a:lstStyle/>
+          <a:p>
+            <a:pPr algn="ctr"/>
+          </a:p>
+        </p:txBody>
+      </p:sp>
+      <p:sp>
+        <p:nvSpPr>
+          <p:cNvPr id="51" name="Rectangle 50"/>
+          <p:cNvSpPr/>
+          <p:nvPr/>
+        </p:nvSpPr>
+        <p:spPr>
+          <a:xfrm>
+            <a:off x="8193024" y="4818888"/>
+            <a:ext cx="141732" cy="141732"/>
+          </a:xfrm>
+          <a:prstGeom prst="rect">
+            <a:avLst/>
+          </a:prstGeom>
+          <a:solidFill>
+            <a:srgbClr val="F1E7E2"/>
+          </a:solidFill>
+          <a:ln>
+            <a:noFill/>
+          </a:ln>
+        </p:spPr>
+        <p:txBody>
+          <a:bodyPr rtlCol="0" anchor="ctr"/>
+          <a:lstStyle/>
+          <a:p>
+            <a:pPr algn="ctr"/>
+          </a:p>
+        </p:txBody>
+      </p:sp>
+      <p:sp>
+        <p:nvSpPr>
+          <p:cNvPr id="52" name="Rectangle 51"/>
+          <p:cNvSpPr/>
+          <p:nvPr/>
+        </p:nvSpPr>
+        <p:spPr>
+          <a:xfrm>
+            <a:off x="8375904" y="4818888"/>
+            <a:ext cx="141732" cy="141732"/>
+          </a:xfrm>
+          <a:prstGeom prst="rect">
+            <a:avLst/>
+          </a:prstGeom>
+          <a:solidFill>
+            <a:srgbClr val="F1E7E2"/>
+          </a:solidFill>
+          <a:ln>
+            <a:noFill/>
+          </a:ln>
+        </p:spPr>
+        <p:txBody>
+          <a:bodyPr rtlCol="0" anchor="ctr"/>
+          <a:lstStyle/>
+          <a:p>
+            <a:pPr algn="ctr"/>
+          </a:p>
+        </p:txBody>
+      </p:sp>
+      <p:sp>
+        <p:nvSpPr>
+          <p:cNvPr id="53" name="Rectangle 52"/>
+          <p:cNvSpPr/>
+          <p:nvPr/>
+        </p:nvSpPr>
+        <p:spPr>
+          <a:xfrm>
+            <a:off x="8558784" y="4818888"/>
+            <a:ext cx="141732" cy="141732"/>
+          </a:xfrm>
+          <a:prstGeom prst="rect">
+            <a:avLst/>
+          </a:prstGeom>
+          <a:solidFill>
+            <a:srgbClr val="C9587E"/>
+          </a:solidFill>
+          <a:ln>
+            <a:noFill/>
+          </a:ln>
+        </p:spPr>
+        <p:txBody>
+          <a:bodyPr rtlCol="0" anchor="ctr"/>
+          <a:lstStyle/>
+          <a:p>
+            <a:pPr algn="ctr"/>
+          </a:p>
+        </p:txBody>
+      </p:sp>
+      <p:sp>
+        <p:nvSpPr>
+          <p:cNvPr id="54" name="Rectangle 53"/>
+          <p:cNvSpPr/>
+          <p:nvPr/>
+        </p:nvSpPr>
+        <p:spPr>
+          <a:xfrm>
+            <a:off x="8741664" y="4818888"/>
+            <a:ext cx="141732" cy="141732"/>
+          </a:xfrm>
+          <a:prstGeom prst="rect">
+            <a:avLst/>
+          </a:prstGeom>
+          <a:solidFill>
+            <a:srgbClr val="F1E7E2"/>
+          </a:solidFill>
+          <a:ln>
+            <a:noFill/>
+          </a:ln>
+        </p:spPr>
+        <p:txBody>
+          <a:bodyPr rtlCol="0" anchor="ctr"/>
+          <a:lstStyle/>
+          <a:p>
+            <a:pPr algn="ctr"/>
+          </a:p>
+        </p:txBody>
+      </p:sp>
+      <p:sp>
+        <p:nvSpPr>
+          <p:cNvPr id="55" name="Rectangle 54"/>
+          <p:cNvSpPr/>
+          <p:nvPr/>
+        </p:nvSpPr>
+        <p:spPr>
+          <a:xfrm>
+            <a:off x="8924544" y="4818888"/>
+            <a:ext cx="141732" cy="141732"/>
+          </a:xfrm>
+          <a:prstGeom prst="rect">
+            <a:avLst/>
+          </a:prstGeom>
+          <a:solidFill>
+            <a:srgbClr val="F1E7E2"/>
+          </a:solidFill>
+          <a:ln>
+            <a:noFill/>
+          </a:ln>
+        </p:spPr>
+        <p:txBody>
+          <a:bodyPr rtlCol="0" anchor="ctr"/>
+          <a:lstStyle/>
+          <a:p>
+            <a:pPr algn="ctr"/>
+          </a:p>
+        </p:txBody>
+      </p:sp>
+      <p:sp>
+        <p:nvSpPr>
+          <p:cNvPr id="56" name="Rectangle 55"/>
+          <p:cNvSpPr/>
+          <p:nvPr/>
+        </p:nvSpPr>
+        <p:spPr>
+          <a:xfrm>
+            <a:off x="9107424" y="4818888"/>
+            <a:ext cx="141732" cy="141732"/>
+          </a:xfrm>
+          <a:prstGeom prst="rect">
+            <a:avLst/>
+          </a:prstGeom>
+          <a:solidFill>
+            <a:srgbClr val="F1E7E2"/>
+          </a:solidFill>
+          <a:ln>
+            <a:noFill/>
+          </a:ln>
+        </p:spPr>
+        <p:txBody>
+          <a:bodyPr rtlCol="0" anchor="ctr"/>
+          <a:lstStyle/>
+          <a:p>
+            <a:pPr algn="ctr"/>
+          </a:p>
+        </p:txBody>
+      </p:sp>
+      <p:sp>
+        <p:nvSpPr>
+          <p:cNvPr id="57" name="Rectangle 56"/>
+          <p:cNvSpPr/>
+          <p:nvPr/>
+        </p:nvSpPr>
+        <p:spPr>
+          <a:xfrm>
+            <a:off x="777240" y="6327648"/>
+            <a:ext cx="10637215" cy="8229"/>
+          </a:xfrm>
+          <a:prstGeom prst="rect">
+            <a:avLst/>
+          </a:prstGeom>
+          <a:solidFill>
+            <a:srgbClr val="F1E7E2"/>
+          </a:solidFill>
+          <a:ln>
+            <a:noFill/>
+          </a:ln>
+        </p:spPr>
+        <p:txBody>
+          <a:bodyPr rtlCol="0" anchor="ctr"/>
+          <a:lstStyle/>
+          <a:p>
+            <a:pPr algn="ctr"/>
+          </a:p>
+        </p:txBody>
+      </p:sp>
+      <p:sp>
+        <p:nvSpPr>
+          <p:cNvPr id="58" name="TextBox 57"/>
+          <p:cNvSpPr txBox="1"/>
+          <p:nvPr/>
+        </p:nvSpPr>
+        <p:spPr>
+          <a:xfrm>
+            <a:off x="777240" y="6419088"/>
+            <a:ext cx="4572000" cy="228600"/>
+          </a:xfrm>
+          <a:prstGeom prst="rect">
+            <a:avLst/>
+          </a:prstGeom>
+          <a:noFill/>
+        </p:spPr>
+        <p:txBody>
+          <a:bodyPr wrap="square" anchor="t" lIns="0" tIns="0" rIns="0" bIns="0"/>
+          <a:lstStyle/>
+          <a:p>
+            <a:pPr algn="l">
+              <a:lnSpc>
+                <a:spcPct val="100000"/>
+              </a:lnSpc>
+              <a:spcBef>
+                <a:spcPts val="0"/>
+              </a:spcBef>
+              <a:spcAft>
+                <a:spcPts val="0"/>
+              </a:spcAft>
+            </a:pPr>
+            <a:r>
               <a:rPr sz="900" b="0" i="0">
                 <a:solidFill>
-                  <a:srgbClr val="6E6A7C"/>
+                  <a:srgbClr val="8A8699"/>
                 </a:solidFill>
                 <a:latin typeface="Segoe UI"/>
               </a:rPr>
@@ -10545,7 +10588,7 @@
       </p:sp>
       <p:sp>
         <p:nvSpPr>
-          <p:cNvPr id="58" name="TextBox 57"/>
+          <p:cNvPr id="59" name="TextBox 58"/>
           <p:cNvSpPr txBox="1"/>
           <p:nvPr/>
         </p:nvSpPr>
@@ -10577,7 +10620,7 @@
             <a:r>
               <a:rPr sz="900" b="0" i="0">
                 <a:solidFill>
-                  <a:srgbClr val="6E6A7C"/>
+                  <a:srgbClr val="8A8699"/>
                 </a:solidFill>
                 <a:latin typeface="Segoe UI"/>
               </a:rPr>
@@ -10600,7 +10643,7 @@
     <p:bg>
       <p:bgPr>
         <a:solidFill>
-          <a:srgbClr val="FBF8F4"/>
+          <a:srgbClr val="FFF9F5"/>
         </a:solidFill>
         <a:effectLst/>
       </p:bgPr>
@@ -10646,7 +10689,7 @@
             <a:r>
               <a:rPr sz="1050" b="1" i="0" spc="190">
                 <a:solidFill>
-                  <a:srgbClr val="E8456B"/>
+                  <a:srgbClr val="C9587E"/>
                 </a:solidFill>
                 <a:latin typeface="Segoe UI"/>
               </a:rPr>
@@ -10689,7 +10732,7 @@
             <a:r>
               <a:rPr sz="4000" b="1" i="0">
                 <a:solidFill>
-                  <a:srgbClr val="1F1D2B"/>
+                  <a:srgbClr val="3D3A4F"/>
                 </a:solidFill>
                 <a:latin typeface="Segoe UI"/>
               </a:rPr>
@@ -10713,7 +10756,7 @@
             <a:avLst/>
           </a:prstGeom>
           <a:solidFill>
-            <a:srgbClr val="E8456B"/>
+            <a:srgbClr val="C9587E"/>
           </a:solidFill>
           <a:ln>
             <a:noFill/>
@@ -10742,7 +10785,7 @@
             <a:avLst/>
           </a:prstGeom>
           <a:solidFill>
-            <a:srgbClr val="E8456B"/>
+            <a:srgbClr val="C9587E"/>
           </a:solidFill>
           <a:ln>
             <a:noFill/>
@@ -10771,7 +10814,7 @@
             <a:avLst/>
           </a:prstGeom>
           <a:solidFill>
-            <a:srgbClr val="F28CA4"/>
+            <a:srgbClr val="F3B7C8"/>
           </a:solidFill>
           <a:ln>
             <a:noFill/>
@@ -10800,7 +10843,7 @@
             <a:avLst/>
           </a:prstGeom>
           <a:solidFill>
-            <a:srgbClr val="1F1D2B"/>
+            <a:srgbClr val="3D3A4F"/>
           </a:solidFill>
           <a:ln>
             <a:noFill/>
@@ -10829,7 +10872,7 @@
             <a:avLst/>
           </a:prstGeom>
           <a:solidFill>
-            <a:srgbClr val="CB3155"/>
+            <a:srgbClr val="B2496C"/>
           </a:solidFill>
           <a:ln>
             <a:noFill/>
@@ -10877,7 +10920,7 @@
             <a:r>
               <a:rPr sz="1050" b="1" i="0" spc="190">
                 <a:solidFill>
-                  <a:srgbClr val="E8456B"/>
+                  <a:srgbClr val="C9587E"/>
                 </a:solidFill>
                 <a:latin typeface="Segoe UI"/>
               </a:rPr>
@@ -10920,11 +10963,11 @@
             <a:r>
               <a:rPr sz="1800" b="0" i="0">
                 <a:solidFill>
-                  <a:srgbClr val="1F1D2B"/>
+                  <a:srgbClr val="3D3A4F"/>
                 </a:solidFill>
                 <a:latin typeface="Segoe UI"/>
               </a:rPr>
-              <a:t>Foto o dibujo → patrón con colores Hama y DMC.</a:t>
+              <a:t>Foto o dibujo → patrón con paleta real Hama o DMC.</a:t>
             </a:r>
           </a:p>
         </p:txBody>
@@ -10944,7 +10987,7 @@
             <a:avLst/>
           </a:prstGeom>
           <a:solidFill>
-            <a:srgbClr val="E8456B"/>
+            <a:srgbClr val="C9587E"/>
           </a:solidFill>
           <a:ln>
             <a:noFill/>
@@ -10973,7 +11016,7 @@
             <a:avLst/>
           </a:prstGeom>
           <a:solidFill>
-            <a:srgbClr val="F28CA4"/>
+            <a:srgbClr val="F3B7C8"/>
           </a:solidFill>
           <a:ln>
             <a:noFill/>
@@ -11002,7 +11045,7 @@
             <a:avLst/>
           </a:prstGeom>
           <a:solidFill>
-            <a:srgbClr val="1F1D2B"/>
+            <a:srgbClr val="3D3A4F"/>
           </a:solidFill>
           <a:ln>
             <a:noFill/>
@@ -11031,7 +11074,7 @@
             <a:avLst/>
           </a:prstGeom>
           <a:solidFill>
-            <a:srgbClr val="CB3155"/>
+            <a:srgbClr val="B2496C"/>
           </a:solidFill>
           <a:ln>
             <a:noFill/>
@@ -11079,7 +11122,7 @@
             <a:r>
               <a:rPr sz="1050" b="1" i="0" spc="190">
                 <a:solidFill>
-                  <a:srgbClr val="E8456B"/>
+                  <a:srgbClr val="C9587E"/>
                 </a:solidFill>
                 <a:latin typeface="Segoe UI"/>
               </a:rPr>
@@ -11122,11 +11165,11 @@
             <a:r>
               <a:rPr sz="1800" b="0" i="0">
                 <a:solidFill>
-                  <a:srgbClr val="1F1D2B"/>
+                  <a:srgbClr val="3D3A4F"/>
                 </a:solidFill>
                 <a:latin typeface="Segoe UI"/>
               </a:rPr>
-              <a:t>Edita, exporta e imprime.</a:t>
+              <a:t>Editor con deshacer y simetría, progreso y materiales.</a:t>
             </a:r>
           </a:p>
         </p:txBody>
@@ -11146,7 +11189,7 @@
             <a:avLst/>
           </a:prstGeom>
           <a:solidFill>
-            <a:srgbClr val="E8456B"/>
+            <a:srgbClr val="C9587E"/>
           </a:solidFill>
           <a:ln>
             <a:noFill/>
@@ -11175,7 +11218,7 @@
             <a:avLst/>
           </a:prstGeom>
           <a:solidFill>
-            <a:srgbClr val="F28CA4"/>
+            <a:srgbClr val="F3B7C8"/>
           </a:solidFill>
           <a:ln>
             <a:noFill/>
@@ -11204,7 +11247,7 @@
             <a:avLst/>
           </a:prstGeom>
           <a:solidFill>
-            <a:srgbClr val="1F1D2B"/>
+            <a:srgbClr val="3D3A4F"/>
           </a:solidFill>
           <a:ln>
             <a:noFill/>
@@ -11233,7 +11276,7 @@
             <a:avLst/>
           </a:prstGeom>
           <a:solidFill>
-            <a:srgbClr val="CB3155"/>
+            <a:srgbClr val="B2496C"/>
           </a:solidFill>
           <a:ln>
             <a:noFill/>
@@ -11281,7 +11324,7 @@
             <a:r>
               <a:rPr sz="1050" b="1" i="0" spc="190">
                 <a:solidFill>
-                  <a:srgbClr val="E8456B"/>
+                  <a:srgbClr val="C9587E"/>
                 </a:solidFill>
                 <a:latin typeface="Segoe UI"/>
               </a:rPr>
@@ -11324,11 +11367,11 @@
             <a:r>
               <a:rPr sz="1800" b="0" i="0">
                 <a:solidFill>
-                  <a:srgbClr val="1F1D2B"/>
+                  <a:srgbClr val="3D3A4F"/>
                 </a:solidFill>
                 <a:latin typeface="Segoe UI"/>
               </a:rPr>
-              <a:t>Feed, perfiles y remix.</a:t>
+              <a:t>Feed, búsqueda sin acentos, #tags y remix.</a:t>
             </a:r>
           </a:p>
         </p:txBody>
@@ -11354,7 +11397,7 @@
           </a:solidFill>
           <a:ln w="12700">
             <a:solidFill>
-              <a:srgbClr val="E7DED4"/>
+              <a:srgbClr val="F1E7E2"/>
             </a:solidFill>
           </a:ln>
           <a:effectLst>
@@ -11390,11 +11433,11 @@
             </a:avLst>
           </a:prstGeom>
           <a:solidFill>
-            <a:srgbClr val="ECE5DC"/>
+            <a:srgbClr val="FDF1EA"/>
           </a:solidFill>
           <a:ln w="15875">
             <a:solidFill>
-              <a:srgbClr val="C9BFB4"/>
+              <a:srgbClr val="E4DAF5"/>
             </a:solidFill>
             <a:prstDash val="dash"/>
           </a:ln>
@@ -11441,7 +11484,7 @@
             <a:r>
               <a:rPr sz="1400" b="0" i="0">
                 <a:solidFill>
-                  <a:srgbClr val="6E6A7C"/>
+                  <a:srgbClr val="8A8699"/>
                 </a:solidFill>
                 <a:latin typeface="Segoe UI"/>
               </a:rPr>
@@ -11465,7 +11508,7 @@
             <a:avLst/>
           </a:prstGeom>
           <a:solidFill>
-            <a:srgbClr val="E7DED4"/>
+            <a:srgbClr val="F1E7E2"/>
           </a:solidFill>
           <a:ln>
             <a:noFill/>
@@ -11513,7 +11556,7 @@
             <a:r>
               <a:rPr sz="900" b="0" i="0">
                 <a:solidFill>
-                  <a:srgbClr val="6E6A7C"/>
+                  <a:srgbClr val="8A8699"/>
                 </a:solidFill>
                 <a:latin typeface="Segoe UI"/>
               </a:rPr>
@@ -11556,7 +11599,7 @@
             <a:r>
               <a:rPr sz="900" b="0" i="0">
                 <a:solidFill>
-                  <a:srgbClr val="6E6A7C"/>
+                  <a:srgbClr val="8A8699"/>
                 </a:solidFill>
                 <a:latin typeface="Segoe UI"/>
               </a:rPr>
@@ -11579,7 +11622,7 @@
     <p:bg>
       <p:bgPr>
         <a:solidFill>
-          <a:srgbClr val="FBF8F4"/>
+          <a:srgbClr val="FFF9F5"/>
         </a:solidFill>
         <a:effectLst/>
       </p:bgPr>
@@ -11625,7 +11668,7 @@
             <a:r>
               <a:rPr sz="1050" b="1" i="0" spc="190">
                 <a:solidFill>
-                  <a:srgbClr val="E8456B"/>
+                  <a:srgbClr val="C9587E"/>
                 </a:solidFill>
                 <a:latin typeface="Segoe UI"/>
               </a:rPr>
@@ -11668,7 +11711,7 @@
             <a:r>
               <a:rPr sz="4000" b="1" i="0">
                 <a:solidFill>
-                  <a:srgbClr val="1F1D2B"/>
+                  <a:srgbClr val="3D3A4F"/>
                 </a:solidFill>
                 <a:latin typeface="Segoe UI"/>
               </a:rPr>
@@ -11692,7 +11735,7 @@
             <a:avLst/>
           </a:prstGeom>
           <a:solidFill>
-            <a:srgbClr val="E8456B"/>
+            <a:srgbClr val="C9587E"/>
           </a:solidFill>
           <a:ln>
             <a:noFill/>
@@ -11721,7 +11764,7 @@
             <a:avLst/>
           </a:prstGeom>
           <a:solidFill>
-            <a:srgbClr val="E7DED4"/>
+            <a:srgbClr val="F1E7E2"/>
           </a:solidFill>
           <a:ln>
             <a:noFill/>
@@ -11752,7 +11795,7 @@
             </a:avLst>
           </a:prstGeom>
           <a:solidFill>
-            <a:srgbClr val="FBE7ED"/>
+            <a:srgbClr val="FCE4EC"/>
           </a:solidFill>
           <a:ln>
             <a:noFill/>
@@ -11800,7 +11843,7 @@
             <a:r>
               <a:rPr sz="1050" b="1" i="0">
                 <a:solidFill>
-                  <a:srgbClr val="E8456B"/>
+                  <a:srgbClr val="C9587E"/>
                 </a:solidFill>
                 <a:latin typeface="Segoe UI"/>
               </a:rPr>
@@ -11843,7 +11886,7 @@
             <a:r>
               <a:rPr sz="1800" b="0" i="0">
                 <a:solidFill>
-                  <a:srgbClr val="1F1D2B"/>
+                  <a:srgbClr val="3D3A4F"/>
                 </a:solidFill>
                 <a:latin typeface="Segoe UI"/>
               </a:rPr>
@@ -11869,7 +11912,7 @@
             </a:avLst>
           </a:prstGeom>
           <a:solidFill>
-            <a:srgbClr val="FBE7ED"/>
+            <a:srgbClr val="FCE4EC"/>
           </a:solidFill>
           <a:ln>
             <a:noFill/>
@@ -11917,7 +11960,7 @@
             <a:r>
               <a:rPr sz="1050" b="1" i="0">
                 <a:solidFill>
-                  <a:srgbClr val="E8456B"/>
+                  <a:srgbClr val="C9587E"/>
                 </a:solidFill>
                 <a:latin typeface="Segoe UI"/>
               </a:rPr>
@@ -11960,11 +12003,11 @@
             <a:r>
               <a:rPr sz="1800" b="0" i="0">
                 <a:solidFill>
-                  <a:srgbClr val="1F1D2B"/>
+                  <a:srgbClr val="3D3A4F"/>
                 </a:solidFill>
                 <a:latin typeface="Segoe UI"/>
               </a:rPr>
-              <a:t>Simplifica a dibujo</a:t>
+              <a:t>Ancho 4–128 y 2–64 colores</a:t>
             </a:r>
           </a:p>
         </p:txBody>
@@ -11986,7 +12029,7 @@
             </a:avLst>
           </a:prstGeom>
           <a:solidFill>
-            <a:srgbClr val="FBE7ED"/>
+            <a:srgbClr val="FCE4EC"/>
           </a:solidFill>
           <a:ln>
             <a:noFill/>
@@ -12034,7 +12077,7 @@
             <a:r>
               <a:rPr sz="1050" b="1" i="0">
                 <a:solidFill>
-                  <a:srgbClr val="E8456B"/>
+                  <a:srgbClr val="C9587E"/>
                 </a:solidFill>
                 <a:latin typeface="Segoe UI"/>
               </a:rPr>
@@ -12077,11 +12120,11 @@
             <a:r>
               <a:rPr sz="1800" b="0" i="0">
                 <a:solidFill>
-                  <a:srgbClr val="1F1D2B"/>
+                  <a:srgbClr val="3D3A4F"/>
                 </a:solidFill>
                 <a:latin typeface="Segoe UI"/>
               </a:rPr>
-              <a:t>Colores reales Hama / DMC</a:t>
+              <a:t>Simplifica a dibujo</a:t>
             </a:r>
           </a:p>
         </p:txBody>
@@ -12103,7 +12146,7 @@
             </a:avLst>
           </a:prstGeom>
           <a:solidFill>
-            <a:srgbClr val="FBE7ED"/>
+            <a:srgbClr val="FCE4EC"/>
           </a:solidFill>
           <a:ln>
             <a:noFill/>
@@ -12151,7 +12194,7 @@
             <a:r>
               <a:rPr sz="1050" b="1" i="0">
                 <a:solidFill>
-                  <a:srgbClr val="E8456B"/>
+                  <a:srgbClr val="C9587E"/>
                 </a:solidFill>
                 <a:latin typeface="Segoe UI"/>
               </a:rPr>
@@ -12194,7 +12237,7 @@
             <a:r>
               <a:rPr sz="1800" b="0" i="0">
                 <a:solidFill>
-                  <a:srgbClr val="1F1D2B"/>
+                  <a:srgbClr val="3D3A4F"/>
                 </a:solidFill>
                 <a:latin typeface="Segoe UI"/>
               </a:rPr>
@@ -12211,6 +12254,80 @@
         </p:nvSpPr>
         <p:spPr>
           <a:xfrm>
+            <a:off x="1627632" y="5486400"/>
+            <a:ext cx="3749039" cy="384048"/>
+          </a:xfrm>
+          <a:prstGeom prst="roundRect">
+            <a:avLst>
+              <a:gd name="adj" fmla="val 50000"/>
+            </a:avLst>
+          </a:prstGeom>
+          <a:solidFill>
+            <a:srgbClr val="FCE4EC"/>
+          </a:solidFill>
+          <a:ln>
+            <a:noFill/>
+          </a:ln>
+        </p:spPr>
+        <p:txBody>
+          <a:bodyPr rtlCol="0" anchor="ctr"/>
+          <a:lstStyle/>
+          <a:p>
+            <a:pPr algn="ctr"/>
+          </a:p>
+        </p:txBody>
+      </p:sp>
+      <p:sp>
+        <p:nvSpPr>
+          <p:cNvPr id="19" name="TextBox 18"/>
+          <p:cNvSpPr txBox="1"/>
+          <p:nvPr/>
+        </p:nvSpPr>
+        <p:spPr>
+          <a:xfrm>
+            <a:off x="1627632" y="5486400"/>
+            <a:ext cx="3749039" cy="384048"/>
+          </a:xfrm>
+          <a:prstGeom prst="rect">
+            <a:avLst/>
+          </a:prstGeom>
+          <a:noFill/>
+        </p:spPr>
+        <p:txBody>
+          <a:bodyPr wrap="square" anchor="ctr" lIns="0" tIns="0" rIns="0" bIns="0"/>
+          <a:lstStyle/>
+          <a:p>
+            <a:pPr algn="ctr">
+              <a:lnSpc>
+                <a:spcPct val="100000"/>
+              </a:lnSpc>
+              <a:spcBef>
+                <a:spcPts val="0"/>
+              </a:spcBef>
+              <a:spcAft>
+                <a:spcPts val="0"/>
+              </a:spcAft>
+            </a:pPr>
+            <a:r>
+              <a:rPr sz="1050" b="1" i="0">
+                <a:solidFill>
+                  <a:srgbClr val="C9587E"/>
+                </a:solidFill>
+                <a:latin typeface="Segoe UI"/>
+              </a:rPr>
+              <a:t>OpenCV + k-means CIELAB · 0,3–0,6 s</a:t>
+            </a:r>
+          </a:p>
+        </p:txBody>
+      </p:sp>
+      <p:sp>
+        <p:nvSpPr>
+          <p:cNvPr id="20" name="Rounded Rectangle 19"/>
+          <p:cNvSpPr/>
+          <p:nvPr/>
+        </p:nvSpPr>
+        <p:spPr>
+          <a:xfrm>
             <a:off x="5788152" y="1389888"/>
             <a:ext cx="5641848" cy="4553712"/>
           </a:xfrm>
@@ -12224,7 +12341,7 @@
           </a:solidFill>
           <a:ln w="12700">
             <a:solidFill>
-              <a:srgbClr val="E7DED4"/>
+              <a:srgbClr val="F1E7E2"/>
             </a:solidFill>
           </a:ln>
           <a:effectLst>
@@ -12245,7 +12362,7 @@
       </p:sp>
       <p:sp>
         <p:nvSpPr>
-          <p:cNvPr id="19" name="Rounded Rectangle 18"/>
+          <p:cNvPr id="21" name="Rounded Rectangle 20"/>
           <p:cNvSpPr/>
           <p:nvPr/>
         </p:nvSpPr>
@@ -12260,11 +12377,11 @@
             </a:avLst>
           </a:prstGeom>
           <a:solidFill>
-            <a:srgbClr val="ECE5DC"/>
+            <a:srgbClr val="FDF1EA"/>
           </a:solidFill>
           <a:ln w="15875">
             <a:solidFill>
-              <a:srgbClr val="C9BFB4"/>
+              <a:srgbClr val="E4DAF5"/>
             </a:solidFill>
             <a:prstDash val="dash"/>
           </a:ln>
@@ -12279,7 +12396,7 @@
       </p:sp>
       <p:sp>
         <p:nvSpPr>
-          <p:cNvPr id="20" name="TextBox 19"/>
+          <p:cNvPr id="22" name="TextBox 21"/>
           <p:cNvSpPr txBox="1"/>
           <p:nvPr/>
         </p:nvSpPr>
@@ -12311,7 +12428,7 @@
             <a:r>
               <a:rPr sz="1400" b="0" i="0">
                 <a:solidFill>
-                  <a:srgbClr val="6E6A7C"/>
+                  <a:srgbClr val="8A8699"/>
                 </a:solidFill>
                 <a:latin typeface="Segoe UI"/>
               </a:rPr>
@@ -12322,7 +12439,7 @@
       </p:sp>
       <p:sp>
         <p:nvSpPr>
-          <p:cNvPr id="21" name="Rectangle 20"/>
+          <p:cNvPr id="23" name="Rectangle 22"/>
           <p:cNvSpPr/>
           <p:nvPr/>
         </p:nvSpPr>
@@ -12335,23 +12452,23 @@
             <a:avLst/>
           </a:prstGeom>
           <a:solidFill>
-            <a:srgbClr val="E7DED4"/>
-          </a:solidFill>
-          <a:ln>
-            <a:noFill/>
-          </a:ln>
-        </p:spPr>
-        <p:txBody>
-          <a:bodyPr rtlCol="0" anchor="ctr"/>
-          <a:lstStyle/>
-          <a:p>
-            <a:pPr algn="ctr"/>
-          </a:p>
-        </p:txBody>
-      </p:sp>
-      <p:sp>
-        <p:nvSpPr>
-          <p:cNvPr id="22" name="TextBox 21"/>
+            <a:srgbClr val="F1E7E2"/>
+          </a:solidFill>
+          <a:ln>
+            <a:noFill/>
+          </a:ln>
+        </p:spPr>
+        <p:txBody>
+          <a:bodyPr rtlCol="0" anchor="ctr"/>
+          <a:lstStyle/>
+          <a:p>
+            <a:pPr algn="ctr"/>
+          </a:p>
+        </p:txBody>
+      </p:sp>
+      <p:sp>
+        <p:nvSpPr>
+          <p:cNvPr id="24" name="TextBox 23"/>
           <p:cNvSpPr txBox="1"/>
           <p:nvPr/>
         </p:nvSpPr>
@@ -12383,7 +12500,7 @@
             <a:r>
               <a:rPr sz="900" b="0" i="0">
                 <a:solidFill>
-                  <a:srgbClr val="6E6A7C"/>
+                  <a:srgbClr val="8A8699"/>
                 </a:solidFill>
                 <a:latin typeface="Segoe UI"/>
               </a:rPr>
@@ -12394,7 +12511,7 @@
       </p:sp>
       <p:sp>
         <p:nvSpPr>
-          <p:cNvPr id="23" name="TextBox 22"/>
+          <p:cNvPr id="25" name="TextBox 24"/>
           <p:cNvSpPr txBox="1"/>
           <p:nvPr/>
         </p:nvSpPr>
@@ -12426,7 +12543,7 @@
             <a:r>
               <a:rPr sz="900" b="0" i="0">
                 <a:solidFill>
-                  <a:srgbClr val="6E6A7C"/>
+                  <a:srgbClr val="8A8699"/>
                 </a:solidFill>
                 <a:latin typeface="Segoe UI"/>
               </a:rPr>
@@ -12449,7 +12566,7 @@
     <p:bg>
       <p:bgPr>
         <a:solidFill>
-          <a:srgbClr val="FBF8F4"/>
+          <a:srgbClr val="FFF9F5"/>
         </a:solidFill>
         <a:effectLst/>
       </p:bgPr>
@@ -12495,7 +12612,7 @@
             <a:r>
               <a:rPr sz="1050" b="1" i="0" spc="190">
                 <a:solidFill>
-                  <a:srgbClr val="E8456B"/>
+                  <a:srgbClr val="C9587E"/>
                 </a:solidFill>
                 <a:latin typeface="Segoe UI"/>
               </a:rPr>
@@ -12538,7 +12655,7 @@
             <a:r>
               <a:rPr sz="4000" b="1" i="0">
                 <a:solidFill>
-                  <a:srgbClr val="1F1D2B"/>
+                  <a:srgbClr val="3D3A4F"/>
                 </a:solidFill>
                 <a:latin typeface="Segoe UI"/>
               </a:rPr>
@@ -12562,7 +12679,7 @@
             <a:avLst/>
           </a:prstGeom>
           <a:solidFill>
-            <a:srgbClr val="E8456B"/>
+            <a:srgbClr val="C9587E"/>
           </a:solidFill>
           <a:ln>
             <a:noFill/>
@@ -12593,7 +12710,7 @@
             </a:avLst>
           </a:prstGeom>
           <a:solidFill>
-            <a:srgbClr val="1F1D2B"/>
+            <a:srgbClr val="3D3A4F"/>
           </a:solidFill>
           <a:ln>
             <a:noFill/>
@@ -12641,7 +12758,7 @@
             <a:r>
               <a:rPr sz="850" b="1" i="0" spc="80">
                 <a:solidFill>
-                  <a:srgbClr val="E7DED4"/>
+                  <a:srgbClr val="F1E7E2"/>
                 </a:solidFill>
                 <a:latin typeface="Segoe UI"/>
               </a:rPr>
@@ -12727,7 +12844,7 @@
             <a:r>
               <a:rPr sz="850" b="0" i="0">
                 <a:solidFill>
-                  <a:srgbClr val="E7DED4"/>
+                  <a:srgbClr val="F1E7E2"/>
                 </a:solidFill>
                 <a:latin typeface="Segoe UI"/>
               </a:rPr>
@@ -12786,7 +12903,7 @@
           </a:solidFill>
           <a:ln w="12700">
             <a:solidFill>
-              <a:srgbClr val="E7DED4"/>
+              <a:srgbClr val="F1E7E2"/>
             </a:solidFill>
           </a:ln>
           <a:effectLst>
@@ -12839,7 +12956,7 @@
             <a:r>
               <a:rPr sz="850" b="1" i="0" spc="80">
                 <a:solidFill>
-                  <a:srgbClr val="6E6A7C"/>
+                  <a:srgbClr val="8A8699"/>
                 </a:solidFill>
                 <a:latin typeface="Segoe UI"/>
               </a:rPr>
@@ -12882,7 +12999,7 @@
             <a:r>
               <a:rPr sz="1250" b="1" i="0">
                 <a:solidFill>
-                  <a:srgbClr val="1F1D2B"/>
+                  <a:srgbClr val="3D3A4F"/>
                 </a:solidFill>
                 <a:latin typeface="Segoe UI"/>
               </a:rPr>
@@ -12925,7 +13042,7 @@
             <a:r>
               <a:rPr sz="850" b="0" i="0">
                 <a:solidFill>
-                  <a:srgbClr val="6E6A7C"/>
+                  <a:srgbClr val="8A8699"/>
                 </a:solidFill>
                 <a:latin typeface="Segoe UI"/>
               </a:rPr>
@@ -12984,7 +13101,7 @@
           </a:solidFill>
           <a:ln w="12700">
             <a:solidFill>
-              <a:srgbClr val="E7DED4"/>
+              <a:srgbClr val="F1E7E2"/>
             </a:solidFill>
           </a:ln>
           <a:effectLst>
@@ -13037,7 +13154,7 @@
             <a:r>
               <a:rPr sz="850" b="1" i="0" spc="80">
                 <a:solidFill>
-                  <a:srgbClr val="6E6A7C"/>
+                  <a:srgbClr val="8A8699"/>
                 </a:solidFill>
                 <a:latin typeface="Segoe UI"/>
               </a:rPr>
@@ -13080,7 +13197,7 @@
             <a:r>
               <a:rPr sz="1250" b="1" i="0">
                 <a:solidFill>
-                  <a:srgbClr val="1F1D2B"/>
+                  <a:srgbClr val="3D3A4F"/>
                 </a:solidFill>
                 <a:latin typeface="Segoe UI"/>
               </a:rPr>
@@ -13123,11 +13240,11 @@
             <a:r>
               <a:rPr sz="850" b="0" i="0">
                 <a:solidFill>
-                  <a:srgbClr val="6E6A7C"/>
+                  <a:srgbClr val="8A8699"/>
                 </a:solidFill>
                 <a:latin typeface="Segoe UI"/>
               </a:rPr>
-              <a:t/>
+              <a:t>área</a:t>
             </a:r>
           </a:p>
         </p:txBody>
@@ -13178,7 +13295,7 @@
             </a:avLst>
           </a:prstGeom>
           <a:solidFill>
-            <a:srgbClr val="E8456B"/>
+            <a:srgbClr val="C9587E"/>
           </a:solidFill>
           <a:ln>
             <a:noFill/>
@@ -13371,7 +13488,7 @@
           </a:solidFill>
           <a:ln w="12700">
             <a:solidFill>
-              <a:srgbClr val="E7DED4"/>
+              <a:srgbClr val="F1E7E2"/>
             </a:solidFill>
           </a:ln>
           <a:effectLst>
@@ -13424,7 +13541,7 @@
             <a:r>
               <a:rPr sz="850" b="1" i="0" spc="80">
                 <a:solidFill>
-                  <a:srgbClr val="6E6A7C"/>
+                  <a:srgbClr val="8A8699"/>
                 </a:solidFill>
                 <a:latin typeface="Segoe UI"/>
               </a:rPr>
@@ -13467,7 +13584,7 @@
             <a:r>
               <a:rPr sz="1250" b="1" i="0">
                 <a:solidFill>
-                  <a:srgbClr val="1F1D2B"/>
+                  <a:srgbClr val="3D3A4F"/>
                 </a:solidFill>
                 <a:latin typeface="Segoe UI"/>
               </a:rPr>
@@ -13510,11 +13627,11 @@
             <a:r>
               <a:rPr sz="850" b="0" i="0">
                 <a:solidFill>
-                  <a:srgbClr val="6E6A7C"/>
+                  <a:srgbClr val="8A8699"/>
                 </a:solidFill>
                 <a:latin typeface="Segoe UI"/>
               </a:rPr>
-              <a:t>Hama · DMC</a:t>
+              <a:t>Hama 60 · DMC 190</a:t>
             </a:r>
           </a:p>
         </p:txBody>
@@ -13569,7 +13686,7 @@
           </a:solidFill>
           <a:ln w="12700">
             <a:solidFill>
-              <a:srgbClr val="E7DED4"/>
+              <a:srgbClr val="F1E7E2"/>
             </a:solidFill>
           </a:ln>
           <a:effectLst>
@@ -13622,7 +13739,7 @@
             <a:r>
               <a:rPr sz="850" b="1" i="0" spc="80">
                 <a:solidFill>
-                  <a:srgbClr val="6E6A7C"/>
+                  <a:srgbClr val="8A8699"/>
                 </a:solidFill>
                 <a:latin typeface="Segoe UI"/>
               </a:rPr>
@@ -13665,7 +13782,7 @@
             <a:r>
               <a:rPr sz="1250" b="1" i="0">
                 <a:solidFill>
-                  <a:srgbClr val="1F1D2B"/>
+                  <a:srgbClr val="3D3A4F"/>
                 </a:solidFill>
                 <a:latin typeface="Segoe UI"/>
               </a:rPr>
@@ -13708,11 +13825,11 @@
             <a:r>
               <a:rPr sz="850" b="0" i="0">
                 <a:solidFill>
-                  <a:srgbClr val="6E6A7C"/>
+                  <a:srgbClr val="8A8699"/>
                 </a:solidFill>
                 <a:latin typeface="Segoe UI"/>
               </a:rPr>
-              <a:t>píxeles sueltos</a:t>
+              <a:t>ruido y aislados</a:t>
             </a:r>
           </a:p>
         </p:txBody>
@@ -13763,7 +13880,7 @@
             </a:avLst>
           </a:prstGeom>
           <a:solidFill>
-            <a:srgbClr val="1F1D2B"/>
+            <a:srgbClr val="3D3A4F"/>
           </a:solidFill>
           <a:ln>
             <a:noFill/>
@@ -13811,7 +13928,7 @@
             <a:r>
               <a:rPr sz="850" b="1" i="0" spc="80">
                 <a:solidFill>
-                  <a:srgbClr val="E7DED4"/>
+                  <a:srgbClr val="F1E7E2"/>
                 </a:solidFill>
                 <a:latin typeface="Segoe UI"/>
               </a:rPr>
@@ -13897,11 +14014,11 @@
             <a:r>
               <a:rPr sz="850" b="0" i="0">
                 <a:solidFill>
-                  <a:srgbClr val="E7DED4"/>
+                  <a:srgbClr val="F1E7E2"/>
                 </a:solidFill>
                 <a:latin typeface="Segoe UI"/>
               </a:rPr>
-              <a:t/>
+              <a:t>PatternData</a:t>
             </a:r>
           </a:p>
         </p:txBody>
@@ -13923,7 +14040,7 @@
             </a:avLst>
           </a:prstGeom>
           <a:solidFill>
-            <a:srgbClr val="FBE7ED"/>
+            <a:srgbClr val="FCE4EC"/>
           </a:solidFill>
           <a:ln>
             <a:noFill/>
@@ -13946,7 +14063,7 @@
         <p:spPr>
           <a:xfrm>
             <a:off x="1106424" y="4434840"/>
-            <a:ext cx="9978847" cy="914400"/>
+            <a:ext cx="6492240" cy="914400"/>
           </a:xfrm>
           <a:prstGeom prst="rect">
             <a:avLst/>
@@ -13965,7 +14082,7 @@
             <a:r>
               <a:rPr sz="1650" b="1" i="0">
                 <a:solidFill>
-                  <a:srgbClr val="E8456B"/>
+                  <a:srgbClr val="C9587E"/>
                 </a:solidFill>
                 <a:latin typeface="Segoe UI"/>
               </a:rPr>
@@ -13974,7 +14091,7 @@
             <a:r>
               <a:rPr sz="1650" b="0" i="0">
                 <a:solidFill>
-                  <a:srgbClr val="1F1D2B"/>
+                  <a:srgbClr val="3D3A4F"/>
                 </a:solidFill>
                 <a:latin typeface="Segoe UI"/>
               </a:rPr>
@@ -13985,7 +14102,72 @@
       </p:sp>
       <p:sp>
         <p:nvSpPr>
-          <p:cNvPr id="41" name="Rectangle 40"/>
+          <p:cNvPr id="41" name="TextBox 40"/>
+          <p:cNvSpPr txBox="1"/>
+          <p:nvPr/>
+        </p:nvSpPr>
+        <p:spPr>
+          <a:xfrm>
+            <a:off x="7818120" y="4434840"/>
+            <a:ext cx="3520440" cy="914400"/>
+          </a:xfrm>
+          <a:prstGeom prst="rect">
+            <a:avLst/>
+          </a:prstGeom>
+          <a:noFill/>
+        </p:spPr>
+        <p:txBody>
+          <a:bodyPr wrap="square" anchor="ctr" lIns="0" tIns="0" rIns="0" bIns="0"/>
+          <a:lstStyle/>
+          <a:p>
+            <a:pPr algn="r">
+              <a:lnSpc>
+                <a:spcPct val="120000"/>
+              </a:lnSpc>
+              <a:spcBef>
+                <a:spcPts val="0"/>
+              </a:spcBef>
+              <a:spcAft>
+                <a:spcPts val="0"/>
+              </a:spcAft>
+            </a:pPr>
+            <a:r>
+              <a:rPr sz="1150" b="0" i="0">
+                <a:solidFill>
+                  <a:srgbClr val="8A8699"/>
+                </a:solidFill>
+                <a:latin typeface="Segoe UI"/>
+              </a:rPr>
+              <a:t>60 colores Hama · 190 DMC</a:t>
+            </a:r>
+          </a:p>
+          <a:p>
+            <a:pPr algn="r">
+              <a:lnSpc>
+                <a:spcPct val="120000"/>
+              </a:lnSpc>
+              <a:spcBef>
+                <a:spcPts val="0"/>
+              </a:spcBef>
+              <a:spcAft>
+                <a:spcPts val="0"/>
+              </a:spcAft>
+            </a:pPr>
+            <a:r>
+              <a:rPr sz="1150" b="0" i="0">
+                <a:solidFill>
+                  <a:srgbClr val="8A8699"/>
+                </a:solidFill>
+                <a:latin typeface="Segoe UI"/>
+              </a:rPr>
+              <a:t>Contorno Canny · fondo ΔE</a:t>
+            </a:r>
+          </a:p>
+        </p:txBody>
+      </p:sp>
+      <p:sp>
+        <p:nvSpPr>
+          <p:cNvPr id="42" name="Rectangle 41"/>
           <p:cNvSpPr/>
           <p:nvPr/>
         </p:nvSpPr>
@@ -13998,23 +14180,23 @@
             <a:avLst/>
           </a:prstGeom>
           <a:solidFill>
-            <a:srgbClr val="E7DED4"/>
-          </a:solidFill>
-          <a:ln>
-            <a:noFill/>
-          </a:ln>
-        </p:spPr>
-        <p:txBody>
-          <a:bodyPr rtlCol="0" anchor="ctr"/>
-          <a:lstStyle/>
-          <a:p>
-            <a:pPr algn="ctr"/>
-          </a:p>
-        </p:txBody>
-      </p:sp>
-      <p:sp>
-        <p:nvSpPr>
-          <p:cNvPr id="42" name="TextBox 41"/>
+            <a:srgbClr val="F1E7E2"/>
+          </a:solidFill>
+          <a:ln>
+            <a:noFill/>
+          </a:ln>
+        </p:spPr>
+        <p:txBody>
+          <a:bodyPr rtlCol="0" anchor="ctr"/>
+          <a:lstStyle/>
+          <a:p>
+            <a:pPr algn="ctr"/>
+          </a:p>
+        </p:txBody>
+      </p:sp>
+      <p:sp>
+        <p:nvSpPr>
+          <p:cNvPr id="43" name="TextBox 42"/>
           <p:cNvSpPr txBox="1"/>
           <p:nvPr/>
         </p:nvSpPr>
@@ -14046,7 +14228,7 @@
             <a:r>
               <a:rPr sz="900" b="0" i="0">
                 <a:solidFill>
-                  <a:srgbClr val="6E6A7C"/>
+                  <a:srgbClr val="8A8699"/>
                 </a:solidFill>
                 <a:latin typeface="Segoe UI"/>
               </a:rPr>
@@ -14057,7 +14239,7 @@
       </p:sp>
       <p:sp>
         <p:nvSpPr>
-          <p:cNvPr id="43" name="TextBox 42"/>
+          <p:cNvPr id="44" name="TextBox 43"/>
           <p:cNvSpPr txBox="1"/>
           <p:nvPr/>
         </p:nvSpPr>
@@ -14089,7 +14271,7 @@
             <a:r>
               <a:rPr sz="900" b="0" i="0">
                 <a:solidFill>
-                  <a:srgbClr val="6E6A7C"/>
+                  <a:srgbClr val="8A8699"/>
                 </a:solidFill>
                 <a:latin typeface="Segoe UI"/>
               </a:rPr>
@@ -14112,7 +14294,7 @@
     <p:bg>
       <p:bgPr>
         <a:solidFill>
-          <a:srgbClr val="FBF8F4"/>
+          <a:srgbClr val="FFF9F5"/>
         </a:solidFill>
         <a:effectLst/>
       </p:bgPr>
@@ -14158,7 +14340,7 @@
             <a:r>
               <a:rPr sz="1050" b="1" i="0" spc="190">
                 <a:solidFill>
-                  <a:srgbClr val="E8456B"/>
+                  <a:srgbClr val="C9587E"/>
                 </a:solidFill>
                 <a:latin typeface="Segoe UI"/>
               </a:rPr>
@@ -14201,7 +14383,7 @@
             <a:r>
               <a:rPr sz="4000" b="1" i="0">
                 <a:solidFill>
-                  <a:srgbClr val="1F1D2B"/>
+                  <a:srgbClr val="3D3A4F"/>
                 </a:solidFill>
                 <a:latin typeface="Segoe UI"/>
               </a:rPr>
@@ -14225,7 +14407,7 @@
             <a:avLst/>
           </a:prstGeom>
           <a:solidFill>
-            <a:srgbClr val="E8456B"/>
+            <a:srgbClr val="C9587E"/>
           </a:solidFill>
           <a:ln>
             <a:noFill/>
@@ -14260,7 +14442,7 @@
           </a:solidFill>
           <a:ln w="12700">
             <a:solidFill>
-              <a:srgbClr val="E7DED4"/>
+              <a:srgbClr val="F1E7E2"/>
             </a:solidFill>
           </a:ln>
           <a:effectLst>
@@ -14296,11 +14478,11 @@
             </a:avLst>
           </a:prstGeom>
           <a:solidFill>
-            <a:srgbClr val="ECE5DC"/>
+            <a:srgbClr val="FDF1EA"/>
           </a:solidFill>
           <a:ln w="15875">
             <a:solidFill>
-              <a:srgbClr val="C9BFB4"/>
+              <a:srgbClr val="E4DAF5"/>
             </a:solidFill>
             <a:prstDash val="dash"/>
           </a:ln>
@@ -14347,7 +14529,7 @@
             <a:r>
               <a:rPr sz="1400" b="0" i="0">
                 <a:solidFill>
-                  <a:srgbClr val="6E6A7C"/>
+                  <a:srgbClr val="8A8699"/>
                 </a:solidFill>
                 <a:latin typeface="Segoe UI"/>
               </a:rPr>
@@ -14371,7 +14553,7 @@
             <a:avLst/>
           </a:prstGeom>
           <a:solidFill>
-            <a:srgbClr val="E8456B"/>
+            <a:srgbClr val="C9587E"/>
           </a:solidFill>
           <a:ln>
             <a:noFill/>
@@ -14419,11 +14601,11 @@
             <a:r>
               <a:rPr sz="1900" b="0" i="0">
                 <a:solidFill>
-                  <a:srgbClr val="1F1D2B"/>
+                  <a:srgbClr val="3D3A4F"/>
                 </a:solidFill>
                 <a:latin typeface="Segoe UI"/>
               </a:rPr>
-              <a:t>Modo por color</a:t>
+              <a:t>Progreso persistente</a:t>
             </a:r>
           </a:p>
         </p:txBody>
@@ -14443,7 +14625,7 @@
             <a:avLst/>
           </a:prstGeom>
           <a:solidFill>
-            <a:srgbClr val="E8456B"/>
+            <a:srgbClr val="C9587E"/>
           </a:solidFill>
           <a:ln>
             <a:noFill/>
@@ -14491,11 +14673,11 @@
             <a:r>
               <a:rPr sz="1900" b="0" i="0">
                 <a:solidFill>
-                  <a:srgbClr val="1F1D2B"/>
+                  <a:srgbClr val="3D3A4F"/>
                 </a:solidFill>
                 <a:latin typeface="Segoe UI"/>
               </a:rPr>
-              <a:t>Progreso cuenta a cuenta</a:t>
+              <a:t>Modo por color y por fila</a:t>
             </a:r>
           </a:p>
         </p:txBody>
@@ -14515,7 +14697,7 @@
             <a:avLst/>
           </a:prstGeom>
           <a:solidFill>
-            <a:srgbClr val="E8456B"/>
+            <a:srgbClr val="C9587E"/>
           </a:solidFill>
           <a:ln>
             <a:noFill/>
@@ -14563,11 +14745,11 @@
             <a:r>
               <a:rPr sz="1900" b="0" i="0">
                 <a:solidFill>
-                  <a:srgbClr val="1F1D2B"/>
+                  <a:srgbClr val="3D3A4F"/>
                 </a:solidFill>
                 <a:latin typeface="Segoe UI"/>
               </a:rPr>
-              <a:t>Lista de materiales y nº de placas</a:t>
+              <a:t>Cuentas y placas 29×29</a:t>
             </a:r>
           </a:p>
         </p:txBody>
@@ -14587,7 +14769,7 @@
             <a:avLst/>
           </a:prstGeom>
           <a:solidFill>
-            <a:srgbClr val="E8456B"/>
+            <a:srgbClr val="C9587E"/>
           </a:solidFill>
           <a:ln>
             <a:noFill/>
@@ -14635,11 +14817,11 @@
             <a:r>
               <a:rPr sz="1900" b="0" i="0">
                 <a:solidFill>
-                  <a:srgbClr val="1F1D2B"/>
+                  <a:srgbClr val="3D3A4F"/>
                 </a:solidFill>
                 <a:latin typeface="Segoe UI"/>
               </a:rPr>
-              <a:t>PDF imprimible</a:t>
+              <a:t>PDF A4 imprimible</a:t>
             </a:r>
           </a:p>
         </p:txBody>
@@ -14659,7 +14841,7 @@
             <a:avLst/>
           </a:prstGeom>
           <a:solidFill>
-            <a:srgbClr val="E7DED4"/>
+            <a:srgbClr val="F1E7E2"/>
           </a:solidFill>
           <a:ln>
             <a:noFill/>
@@ -14707,7 +14889,7 @@
             <a:r>
               <a:rPr sz="900" b="0" i="0">
                 <a:solidFill>
-                  <a:srgbClr val="6E6A7C"/>
+                  <a:srgbClr val="8A8699"/>
                 </a:solidFill>
                 <a:latin typeface="Segoe UI"/>
               </a:rPr>
@@ -14750,7 +14932,7 @@
             <a:r>
               <a:rPr sz="900" b="0" i="0">
                 <a:solidFill>
-                  <a:srgbClr val="6E6A7C"/>
+                  <a:srgbClr val="8A8699"/>
                 </a:solidFill>
                 <a:latin typeface="Segoe UI"/>
               </a:rPr>
@@ -14773,7 +14955,7 @@
     <p:bg>
       <p:bgPr>
         <a:solidFill>
-          <a:srgbClr val="FBF8F4"/>
+          <a:srgbClr val="FFF9F5"/>
         </a:solidFill>
         <a:effectLst/>
       </p:bgPr>
@@ -14819,7 +15001,7 @@
             <a:r>
               <a:rPr sz="1050" b="1" i="0" spc="190">
                 <a:solidFill>
-                  <a:srgbClr val="E8456B"/>
+                  <a:srgbClr val="C9587E"/>
                 </a:solidFill>
                 <a:latin typeface="Segoe UI"/>
               </a:rPr>
@@ -14862,7 +15044,7 @@
             <a:r>
               <a:rPr sz="4000" b="1" i="0">
                 <a:solidFill>
-                  <a:srgbClr val="1F1D2B"/>
+                  <a:srgbClr val="3D3A4F"/>
                 </a:solidFill>
                 <a:latin typeface="Segoe UI"/>
               </a:rPr>
@@ -14886,7 +15068,7 @@
             <a:avLst/>
           </a:prstGeom>
           <a:solidFill>
-            <a:srgbClr val="E8456B"/>
+            <a:srgbClr val="C9587E"/>
           </a:solidFill>
           <a:ln>
             <a:noFill/>
@@ -14921,7 +15103,7 @@
           </a:solidFill>
           <a:ln w="12700">
             <a:solidFill>
-              <a:srgbClr val="E7DED4"/>
+              <a:srgbClr val="F1E7E2"/>
             </a:solidFill>
           </a:ln>
           <a:effectLst>
@@ -14957,11 +15139,11 @@
             </a:avLst>
           </a:prstGeom>
           <a:solidFill>
-            <a:srgbClr val="ECE5DC"/>
+            <a:srgbClr val="FDF1EA"/>
           </a:solidFill>
           <a:ln w="15875">
             <a:solidFill>
-              <a:srgbClr val="C9BFB4"/>
+              <a:srgbClr val="E4DAF5"/>
             </a:solidFill>
             <a:prstDash val="dash"/>
           </a:ln>
@@ -15008,7 +15190,7 @@
             <a:r>
               <a:rPr sz="1400" b="0" i="0">
                 <a:solidFill>
-                  <a:srgbClr val="6E6A7C"/>
+                  <a:srgbClr val="8A8699"/>
                 </a:solidFill>
                 <a:latin typeface="Segoe UI"/>
               </a:rPr>
@@ -15038,7 +15220,7 @@
           </a:solidFill>
           <a:ln w="12700">
             <a:solidFill>
-              <a:srgbClr val="E7DED4"/>
+              <a:srgbClr val="F1E7E2"/>
             </a:solidFill>
           </a:ln>
           <a:effectLst>
@@ -15074,11 +15256,11 @@
             </a:avLst>
           </a:prstGeom>
           <a:solidFill>
-            <a:srgbClr val="ECE5DC"/>
+            <a:srgbClr val="FDF1EA"/>
           </a:solidFill>
           <a:ln w="15875">
             <a:solidFill>
-              <a:srgbClr val="C9BFB4"/>
+              <a:srgbClr val="E4DAF5"/>
             </a:solidFill>
             <a:prstDash val="dash"/>
           </a:ln>
@@ -15125,7 +15307,7 @@
             <a:r>
               <a:rPr sz="1400" b="0" i="0">
                 <a:solidFill>
-                  <a:srgbClr val="6E6A7C"/>
+                  <a:srgbClr val="8A8699"/>
                 </a:solidFill>
                 <a:latin typeface="Segoe UI"/>
               </a:rPr>
@@ -15143,7 +15325,7 @@
         <p:spPr>
           <a:xfrm>
             <a:off x="777240" y="5504688"/>
-            <a:ext cx="1874519" cy="402336"/>
+            <a:ext cx="2240280" cy="402336"/>
           </a:xfrm>
           <a:prstGeom prst="roundRect">
             <a:avLst>
@@ -15155,7 +15337,7 @@
           </a:solidFill>
           <a:ln w="12700">
             <a:solidFill>
-              <a:srgbClr val="E7DED4"/>
+              <a:srgbClr val="F1E7E2"/>
             </a:solidFill>
           </a:ln>
         </p:spPr>
@@ -15176,7 +15358,7 @@
         <p:spPr>
           <a:xfrm>
             <a:off x="777240" y="5504688"/>
-            <a:ext cx="1874519" cy="402336"/>
+            <a:ext cx="2240280" cy="402336"/>
           </a:xfrm>
           <a:prstGeom prst="rect">
             <a:avLst/>
@@ -15201,11 +15383,11 @@
             <a:r>
               <a:rPr sz="1050" b="0" i="0">
                 <a:solidFill>
-                  <a:srgbClr val="6E6A7C"/>
+                  <a:srgbClr val="8A8699"/>
                 </a:solidFill>
                 <a:latin typeface="Segoe UI"/>
               </a:rPr>
-              <a:t>Feed tipo Instagram</a:t>
+              <a:t>Feed Explorar / Siguiendo</a:t>
             </a:r>
           </a:p>
         </p:txBody>
@@ -15218,8 +15400,8 @@
         </p:nvSpPr>
         <p:spPr>
           <a:xfrm>
-            <a:off x="2816352" y="5504688"/>
-            <a:ext cx="2724912" cy="402336"/>
+            <a:off x="3182112" y="5504688"/>
+            <a:ext cx="2788920" cy="402336"/>
           </a:xfrm>
           <a:prstGeom prst="roundRect">
             <a:avLst>
@@ -15231,7 +15413,7 @@
           </a:solidFill>
           <a:ln w="12700">
             <a:solidFill>
-              <a:srgbClr val="E7DED4"/>
+              <a:srgbClr val="F1E7E2"/>
             </a:solidFill>
           </a:ln>
         </p:spPr>
@@ -15251,8 +15433,8 @@
         </p:nvSpPr>
         <p:spPr>
           <a:xfrm>
-            <a:off x="2816352" y="5504688"/>
-            <a:ext cx="2724912" cy="402336"/>
+            <a:off x="3182112" y="5504688"/>
+            <a:ext cx="2788920" cy="402336"/>
           </a:xfrm>
           <a:prstGeom prst="rect">
             <a:avLst/>
@@ -15277,11 +15459,11 @@
             <a:r>
               <a:rPr sz="1050" b="0" i="0">
                 <a:solidFill>
-                  <a:srgbClr val="6E6A7C"/>
+                  <a:srgbClr val="8A8699"/>
                 </a:solidFill>
                 <a:latin typeface="Segoe UI"/>
               </a:rPr>
-              <a:t>Likes, guardados, comentarios</a:t>
+              <a:t>Likes, guardados y comentarios</a:t>
             </a:r>
           </a:p>
         </p:txBody>
@@ -15294,8 +15476,8 @@
         </p:nvSpPr>
         <p:spPr>
           <a:xfrm>
-            <a:off x="5705856" y="5504688"/>
-            <a:ext cx="1700784" cy="402336"/>
+            <a:off x="6135624" y="5504688"/>
+            <a:ext cx="1600200" cy="402336"/>
           </a:xfrm>
           <a:prstGeom prst="roundRect">
             <a:avLst>
@@ -15307,7 +15489,7 @@
           </a:solidFill>
           <a:ln w="12700">
             <a:solidFill>
-              <a:srgbClr val="E7DED4"/>
+              <a:srgbClr val="F1E7E2"/>
             </a:solidFill>
           </a:ln>
         </p:spPr>
@@ -15327,8 +15509,8 @@
         </p:nvSpPr>
         <p:spPr>
           <a:xfrm>
-            <a:off x="5705856" y="5504688"/>
-            <a:ext cx="1700784" cy="402336"/>
+            <a:off x="6135624" y="5504688"/>
+            <a:ext cx="1600200" cy="402336"/>
           </a:xfrm>
           <a:prstGeom prst="rect">
             <a:avLst/>
@@ -15353,7 +15535,7 @@
             <a:r>
               <a:rPr sz="1050" b="0" i="0">
                 <a:solidFill>
-                  <a:srgbClr val="6E6A7C"/>
+                  <a:srgbClr val="8A8699"/>
                 </a:solidFill>
                 <a:latin typeface="Segoe UI"/>
               </a:rPr>
@@ -15370,8 +15552,8 @@
         </p:nvSpPr>
         <p:spPr>
           <a:xfrm>
-            <a:off x="7571232" y="5504688"/>
-            <a:ext cx="3794760" cy="402336"/>
+            <a:off x="7900416" y="5504688"/>
+            <a:ext cx="3246120" cy="402336"/>
           </a:xfrm>
           <a:prstGeom prst="roundRect">
             <a:avLst>
@@ -15383,7 +15565,7 @@
           </a:solidFill>
           <a:ln w="12700">
             <a:solidFill>
-              <a:srgbClr val="E7DED4"/>
+              <a:srgbClr val="F1E7E2"/>
             </a:solidFill>
           </a:ln>
         </p:spPr>
@@ -15403,8 +15585,8 @@
         </p:nvSpPr>
         <p:spPr>
           <a:xfrm>
-            <a:off x="7571232" y="5504688"/>
-            <a:ext cx="3794760" cy="402336"/>
+            <a:off x="7900416" y="5504688"/>
+            <a:ext cx="3246120" cy="402336"/>
           </a:xfrm>
           <a:prstGeom prst="rect">
             <a:avLst/>
@@ -15429,11 +15611,11 @@
             <a:r>
               <a:rPr sz="1050" b="0" i="0">
                 <a:solidFill>
-                  <a:srgbClr val="6E6A7C"/>
+                  <a:srgbClr val="8A8699"/>
                 </a:solidFill>
                 <a:latin typeface="Segoe UI"/>
               </a:rPr>
-              <a:t>Buscador: perfiles, patrones y #tags</a:t>
+              <a:t>Buscador sin acentos + #tags</a:t>
             </a:r>
           </a:p>
         </p:txBody>
@@ -15453,7 +15635,7 @@
             <a:avLst/>
           </a:prstGeom>
           <a:solidFill>
-            <a:srgbClr val="E7DED4"/>
+            <a:srgbClr val="F1E7E2"/>
           </a:solidFill>
           <a:ln>
             <a:noFill/>
@@ -15501,7 +15683,7 @@
             <a:r>
               <a:rPr sz="900" b="0" i="0">
                 <a:solidFill>
-                  <a:srgbClr val="6E6A7C"/>
+                  <a:srgbClr val="8A8699"/>
                 </a:solidFill>
                 <a:latin typeface="Segoe UI"/>
               </a:rPr>
@@ -15544,7 +15726,7 @@
             <a:r>
               <a:rPr sz="900" b="0" i="0">
                 <a:solidFill>
-                  <a:srgbClr val="6E6A7C"/>
+                  <a:srgbClr val="8A8699"/>
                 </a:solidFill>
                 <a:latin typeface="Segoe UI"/>
               </a:rPr>
@@ -15567,7 +15749,7 @@
     <p:bg>
       <p:bgPr>
         <a:solidFill>
-          <a:srgbClr val="FBF8F4"/>
+          <a:srgbClr val="FFF9F5"/>
         </a:solidFill>
         <a:effectLst/>
       </p:bgPr>
@@ -15613,7 +15795,7 @@
             <a:r>
               <a:rPr sz="1050" b="1" i="0" spc="190">
                 <a:solidFill>
-                  <a:srgbClr val="E8456B"/>
+                  <a:srgbClr val="C9587E"/>
                 </a:solidFill>
                 <a:latin typeface="Segoe UI"/>
               </a:rPr>
@@ -15656,7 +15838,7 @@
             <a:r>
               <a:rPr sz="4000" b="1" i="0">
                 <a:solidFill>
-                  <a:srgbClr val="1F1D2B"/>
+                  <a:srgbClr val="3D3A4F"/>
                 </a:solidFill>
                 <a:latin typeface="Segoe UI"/>
               </a:rPr>
@@ -15680,7 +15862,7 @@
             <a:avLst/>
           </a:prstGeom>
           <a:solidFill>
-            <a:srgbClr val="E8456B"/>
+            <a:srgbClr val="C9587E"/>
           </a:solidFill>
           <a:ln>
             <a:noFill/>
@@ -15715,7 +15897,7 @@
           </a:solidFill>
           <a:ln w="12700">
             <a:solidFill>
-              <a:srgbClr val="E7DED4"/>
+              <a:srgbClr val="F1E7E2"/>
             </a:solidFill>
           </a:ln>
           <a:effectLst>
@@ -15749,7 +15931,7 @@
             <a:avLst/>
           </a:prstGeom>
           <a:solidFill>
-            <a:srgbClr val="E8456B"/>
+            <a:srgbClr val="C9587E"/>
           </a:solidFill>
           <a:ln>
             <a:noFill/>
@@ -15778,7 +15960,7 @@
             <a:avLst/>
           </a:prstGeom>
           <a:solidFill>
-            <a:srgbClr val="F28CA4"/>
+            <a:srgbClr val="F3B7C8"/>
           </a:solidFill>
           <a:ln>
             <a:noFill/>
@@ -15807,7 +15989,7 @@
             <a:avLst/>
           </a:prstGeom>
           <a:solidFill>
-            <a:srgbClr val="1F1D2B"/>
+            <a:srgbClr val="3D3A4F"/>
           </a:solidFill>
           <a:ln>
             <a:noFill/>
@@ -15836,7 +16018,7 @@
             <a:avLst/>
           </a:prstGeom>
           <a:solidFill>
-            <a:srgbClr val="E8456B"/>
+            <a:srgbClr val="C9587E"/>
           </a:solidFill>
           <a:ln>
             <a:noFill/>
@@ -15884,7 +16066,7 @@
             <a:r>
               <a:rPr sz="950" b="1" i="0" spc="150">
                 <a:solidFill>
-                  <a:srgbClr val="E8456B"/>
+                  <a:srgbClr val="C9587E"/>
                 </a:solidFill>
                 <a:latin typeface="Segoe UI"/>
               </a:rPr>
@@ -15927,11 +16109,33 @@
             <a:r>
               <a:rPr sz="1700" b="1" i="0">
                 <a:solidFill>
-                  <a:srgbClr val="1F1D2B"/>
+                  <a:srgbClr val="3D3A4F"/>
                 </a:solidFill>
                 <a:latin typeface="Segoe UI"/>
               </a:rPr>
-              <a:t>React · TypeScript · Tailwind</a:t>
+              <a:t>React 18 · TypeScript</a:t>
+            </a:r>
+          </a:p>
+          <a:p>
+            <a:pPr algn="l">
+              <a:lnSpc>
+                <a:spcPct val="112000"/>
+              </a:lnSpc>
+              <a:spcBef>
+                <a:spcPts val="0"/>
+              </a:spcBef>
+              <a:spcAft>
+                <a:spcPts val="0"/>
+              </a:spcAft>
+            </a:pPr>
+            <a:r>
+              <a:rPr sz="1700" b="1" i="0">
+                <a:solidFill>
+                  <a:srgbClr val="3D3A4F"/>
+                </a:solidFill>
+                <a:latin typeface="Segoe UI"/>
+              </a:rPr>
+              <a:t>Tailwind · Vite</a:t>
             </a:r>
           </a:p>
         </p:txBody>
@@ -15953,7 +16157,7 @@
             </a:avLst>
           </a:prstGeom>
           <a:solidFill>
-            <a:srgbClr val="FBE7ED"/>
+            <a:srgbClr val="FCE4EC"/>
           </a:solidFill>
           <a:ln>
             <a:noFill/>
@@ -15982,7 +16186,7 @@
             <a:avLst/>
           </a:prstGeom>
           <a:solidFill>
-            <a:srgbClr val="E8456B"/>
+            <a:srgbClr val="C9587E"/>
           </a:solidFill>
           <a:ln>
             <a:noFill/>
@@ -16011,7 +16215,7 @@
             <a:avLst/>
           </a:prstGeom>
           <a:solidFill>
-            <a:srgbClr val="1F1D2B"/>
+            <a:srgbClr val="3D3A4F"/>
           </a:solidFill>
           <a:ln>
             <a:noFill/>
@@ -16040,7 +16244,7 @@
             <a:avLst/>
           </a:prstGeom>
           <a:solidFill>
-            <a:srgbClr val="F28CA4"/>
+            <a:srgbClr val="F3B7C8"/>
           </a:solidFill>
           <a:ln>
             <a:noFill/>
@@ -16069,7 +16273,7 @@
             <a:avLst/>
           </a:prstGeom>
           <a:solidFill>
-            <a:srgbClr val="CB3155"/>
+            <a:srgbClr val="B2496C"/>
           </a:solidFill>
           <a:ln>
             <a:noFill/>
@@ -16117,7 +16321,7 @@
             <a:r>
               <a:rPr sz="950" b="1" i="0" spc="150">
                 <a:solidFill>
-                  <a:srgbClr val="E8456B"/>
+                  <a:srgbClr val="C9587E"/>
                 </a:solidFill>
                 <a:latin typeface="Segoe UI"/>
               </a:rPr>
@@ -16160,11 +16364,33 @@
             <a:r>
               <a:rPr sz="1700" b="1" i="0">
                 <a:solidFill>
-                  <a:srgbClr val="1F1D2B"/>
+                  <a:srgbClr val="3D3A4F"/>
                 </a:solidFill>
                 <a:latin typeface="Segoe UI"/>
               </a:rPr>
-              <a:t>FastAPI · SQLite · JWT</a:t>
+              <a:t>FastAPI · SQLite</a:t>
+            </a:r>
+          </a:p>
+          <a:p>
+            <a:pPr algn="l">
+              <a:lnSpc>
+                <a:spcPct val="112000"/>
+              </a:lnSpc>
+              <a:spcBef>
+                <a:spcPts val="0"/>
+              </a:spcBef>
+              <a:spcAft>
+                <a:spcPts val="0"/>
+              </a:spcAft>
+            </a:pPr>
+            <a:r>
+              <a:rPr sz="1700" b="1" i="0">
+                <a:solidFill>
+                  <a:srgbClr val="3D3A4F"/>
+                </a:solidFill>
+                <a:latin typeface="Segoe UI"/>
+              </a:rPr>
+              <a:t>JWT · REST</a:t>
             </a:r>
           </a:p>
         </p:txBody>
@@ -16186,7 +16412,7 @@
             </a:avLst>
           </a:prstGeom>
           <a:solidFill>
-            <a:srgbClr val="1F1D2B"/>
+            <a:srgbClr val="3D3A4F"/>
           </a:solidFill>
           <a:ln>
             <a:noFill/>
@@ -16215,7 +16441,7 @@
             <a:avLst/>
           </a:prstGeom>
           <a:solidFill>
-            <a:srgbClr val="E8456B"/>
+            <a:srgbClr val="C9587E"/>
           </a:solidFill>
           <a:ln>
             <a:noFill/>
@@ -16244,7 +16470,7 @@
             <a:avLst/>
           </a:prstGeom>
           <a:solidFill>
-            <a:srgbClr val="F28CA4"/>
+            <a:srgbClr val="F3B7C8"/>
           </a:solidFill>
           <a:ln>
             <a:noFill/>
@@ -16273,7 +16499,7 @@
             <a:avLst/>
           </a:prstGeom>
           <a:solidFill>
-            <a:srgbClr val="F28CA4"/>
+            <a:srgbClr val="F3B7C8"/>
           </a:solidFill>
           <a:ln>
             <a:noFill/>
@@ -16302,7 +16528,7 @@
             <a:avLst/>
           </a:prstGeom>
           <a:solidFill>
-            <a:srgbClr val="E8456B"/>
+            <a:srgbClr val="C9587E"/>
           </a:solidFill>
           <a:ln>
             <a:noFill/>
@@ -16350,7 +16576,7 @@
             <a:r>
               <a:rPr sz="950" b="1" i="0" spc="150">
                 <a:solidFill>
-                  <a:srgbClr val="F28CA4"/>
+                  <a:srgbClr val="F3B7C8"/>
                 </a:solidFill>
                 <a:latin typeface="Segoe UI"/>
               </a:rPr>
@@ -16397,7 +16623,7 @@
                 </a:solidFill>
                 <a:latin typeface="Segoe UI"/>
               </a:rPr>
-              <a:t>NumPy · OpenCV</a:t>
+              <a:t>OpenCV · NumPy</a:t>
             </a:r>
           </a:p>
           <a:p>
@@ -16491,7 +16717,7 @@
         <p:spPr>
           <a:xfrm>
             <a:off x="777240" y="4937760"/>
-            <a:ext cx="10637215" cy="320040"/>
+            <a:ext cx="10637215" cy="594360"/>
           </a:xfrm>
           <a:prstGeom prst="rect">
             <a:avLst/>
@@ -16504,7 +16730,7 @@
           <a:p>
             <a:pPr algn="ctr">
               <a:lnSpc>
-                <a:spcPct val="100000"/>
+                <a:spcPct val="135000"/>
               </a:lnSpc>
               <a:spcBef>
                 <a:spcPts val="0"/>
@@ -16516,13 +16742,35 @@
             <a:r>
               <a:rPr sz="1300" b="0" i="0">
                 <a:solidFill>
-                  <a:srgbClr val="6E6A7C"/>
+                  <a:srgbClr val="8A8699"/>
                 </a:solidFill>
                 <a:latin typeface="Segoe UI"/>
               </a:rPr>
               <a:t>Un contrato de datos común: PatternData</a:t>
             </a:r>
           </a:p>
+          <a:p>
+            <a:pPr algn="ctr">
+              <a:lnSpc>
+                <a:spcPct val="135000"/>
+              </a:lnSpc>
+              <a:spcBef>
+                <a:spcPts val="0"/>
+              </a:spcBef>
+              <a:spcAft>
+                <a:spcPts val="0"/>
+              </a:spcAft>
+            </a:pPr>
+            <a:r>
+              <a:rPr sz="1300" b="0" i="0">
+                <a:solidFill>
+                  <a:srgbClr val="8A8699"/>
+                </a:solidFill>
+                <a:latin typeface="Segoe UI"/>
+              </a:rPr>
+              <a:t>76 tests en verde · 5 ramas · una sola API</a:t>
+            </a:r>
+          </a:p>
         </p:txBody>
       </p:sp>
       <p:sp>
@@ -16540,7 +16788,7 @@
             <a:avLst/>
           </a:prstGeom>
           <a:solidFill>
-            <a:srgbClr val="E7DED4"/>
+            <a:srgbClr val="F1E7E2"/>
           </a:solidFill>
           <a:ln>
             <a:noFill/>
@@ -16588,7 +16836,7 @@
             <a:r>
               <a:rPr sz="900" b="0" i="0">
                 <a:solidFill>
-                  <a:srgbClr val="6E6A7C"/>
+                  <a:srgbClr val="8A8699"/>
                 </a:solidFill>
                 <a:latin typeface="Segoe UI"/>
               </a:rPr>
@@ -16631,7 +16879,7 @@
             <a:r>
               <a:rPr sz="900" b="0" i="0">
                 <a:solidFill>
-                  <a:srgbClr val="6E6A7C"/>
+                  <a:srgbClr val="8A8699"/>
                 </a:solidFill>
                 <a:latin typeface="Segoe UI"/>
               </a:rPr>
@@ -16654,7 +16902,7 @@
     <p:bg>
       <p:bgPr>
         <a:solidFill>
-          <a:srgbClr val="FBF8F4"/>
+          <a:srgbClr val="FFF9F5"/>
         </a:solidFill>
         <a:effectLst/>
       </p:bgPr>
@@ -16700,7 +16948,7 @@
             <a:r>
               <a:rPr sz="1050" b="1" i="0" spc="190">
                 <a:solidFill>
-                  <a:srgbClr val="E8456B"/>
+                  <a:srgbClr val="C9587E"/>
                 </a:solidFill>
                 <a:latin typeface="Segoe UI"/>
               </a:rPr>
@@ -16743,7 +16991,7 @@
             <a:r>
               <a:rPr sz="4000" b="1" i="0">
                 <a:solidFill>
-                  <a:srgbClr val="1F1D2B"/>
+                  <a:srgbClr val="3D3A4F"/>
                 </a:solidFill>
                 <a:latin typeface="Segoe UI"/>
               </a:rPr>
@@ -16767,7 +17015,7 @@
             <a:avLst/>
           </a:prstGeom>
           <a:solidFill>
-            <a:srgbClr val="E8456B"/>
+            <a:srgbClr val="C9587E"/>
           </a:solidFill>
           <a:ln>
             <a:noFill/>
@@ -16796,7 +17044,7 @@
             <a:avLst/>
           </a:prstGeom>
           <a:solidFill>
-            <a:srgbClr val="E7DED4"/>
+            <a:srgbClr val="F1E7E2"/>
           </a:solidFill>
           <a:ln>
             <a:noFill/>
@@ -16827,7 +17075,7 @@
             </a:avLst>
           </a:prstGeom>
           <a:solidFill>
-            <a:srgbClr val="E8456B"/>
+            <a:srgbClr val="C9587E"/>
           </a:solidFill>
           <a:ln>
             <a:noFill/>
@@ -16918,7 +17166,7 @@
             <a:r>
               <a:rPr sz="1150" b="1" i="0">
                 <a:solidFill>
-                  <a:srgbClr val="1F1D2B"/>
+                  <a:srgbClr val="3D3A4F"/>
                 </a:solidFill>
                 <a:latin typeface="Segoe UI"/>
               </a:rPr>
@@ -16929,7 +17177,50 @@
       </p:sp>
       <p:sp>
         <p:nvSpPr>
-          <p:cNvPr id="9" name="Rounded Rectangle 8"/>
+          <p:cNvPr id="9" name="TextBox 8"/>
+          <p:cNvSpPr txBox="1"/>
+          <p:nvPr/>
+        </p:nvSpPr>
+        <p:spPr>
+          <a:xfrm>
+            <a:off x="640080" y="3419856"/>
+            <a:ext cx="1554480" cy="228600"/>
+          </a:xfrm>
+          <a:prstGeom prst="rect">
+            <a:avLst/>
+          </a:prstGeom>
+          <a:noFill/>
+        </p:spPr>
+        <p:txBody>
+          <a:bodyPr wrap="square" anchor="t" lIns="0" tIns="0" rIns="0" bIns="0"/>
+          <a:lstStyle/>
+          <a:p>
+            <a:pPr algn="ctr">
+              <a:lnSpc>
+                <a:spcPct val="100000"/>
+              </a:lnSpc>
+              <a:spcBef>
+                <a:spcPts val="0"/>
+              </a:spcBef>
+              <a:spcAft>
+                <a:spcPts val="0"/>
+              </a:spcAft>
+            </a:pPr>
+            <a:r>
+              <a:rPr sz="950" b="0" i="0">
+                <a:solidFill>
+                  <a:srgbClr val="8A8699"/>
+                </a:solidFill>
+                <a:latin typeface="Segoe UI"/>
+              </a:rPr>
+              <a:t>1.427 líneas</a:t>
+            </a:r>
+          </a:p>
+        </p:txBody>
+      </p:sp>
+      <p:sp>
+        <p:nvSpPr>
+          <p:cNvPr id="10" name="Rounded Rectangle 9"/>
           <p:cNvSpPr/>
           <p:nvPr/>
         </p:nvSpPr>
@@ -16944,23 +17235,23 @@
             </a:avLst>
           </a:prstGeom>
           <a:solidFill>
-            <a:srgbClr val="E8456B"/>
-          </a:solidFill>
-          <a:ln>
-            <a:noFill/>
-          </a:ln>
-        </p:spPr>
-        <p:txBody>
-          <a:bodyPr rtlCol="0" anchor="ctr"/>
-          <a:lstStyle/>
-          <a:p>
-            <a:pPr algn="ctr"/>
-          </a:p>
-        </p:txBody>
-      </p:sp>
-      <p:sp>
-        <p:nvSpPr>
-          <p:cNvPr id="10" name="TextBox 9"/>
+            <a:srgbClr val="C9587E"/>
+          </a:solidFill>
+          <a:ln>
+            <a:noFill/>
+          </a:ln>
+        </p:spPr>
+        <p:txBody>
+          <a:bodyPr rtlCol="0" anchor="ctr"/>
+          <a:lstStyle/>
+          <a:p>
+            <a:pPr algn="ctr"/>
+          </a:p>
+        </p:txBody>
+      </p:sp>
+      <p:sp>
+        <p:nvSpPr>
+          <p:cNvPr id="11" name="TextBox 10"/>
           <p:cNvSpPr txBox="1"/>
           <p:nvPr/>
         </p:nvSpPr>
@@ -17003,7 +17294,7 @@
       </p:sp>
       <p:sp>
         <p:nvSpPr>
-          <p:cNvPr id="11" name="TextBox 10"/>
+          <p:cNvPr id="12" name="TextBox 11"/>
           <p:cNvSpPr txBox="1"/>
           <p:nvPr/>
         </p:nvSpPr>
@@ -17035,7 +17326,7 @@
             <a:r>
               <a:rPr sz="1150" b="1" i="0">
                 <a:solidFill>
-                  <a:srgbClr val="1F1D2B"/>
+                  <a:srgbClr val="3D3A4F"/>
                 </a:solidFill>
                 <a:latin typeface="Segoe UI"/>
               </a:rPr>
@@ -17046,7 +17337,50 @@
       </p:sp>
       <p:sp>
         <p:nvSpPr>
-          <p:cNvPr id="12" name="Rounded Rectangle 11"/>
+          <p:cNvPr id="13" name="TextBox 12"/>
+          <p:cNvSpPr txBox="1"/>
+          <p:nvPr/>
+        </p:nvSpPr>
+        <p:spPr>
+          <a:xfrm>
+            <a:off x="2980944" y="3419856"/>
+            <a:ext cx="1554480" cy="228600"/>
+          </a:xfrm>
+          <a:prstGeom prst="rect">
+            <a:avLst/>
+          </a:prstGeom>
+          <a:noFill/>
+        </p:spPr>
+        <p:txBody>
+          <a:bodyPr wrap="square" anchor="t" lIns="0" tIns="0" rIns="0" bIns="0"/>
+          <a:lstStyle/>
+          <a:p>
+            <a:pPr algn="ctr">
+              <a:lnSpc>
+                <a:spcPct val="100000"/>
+              </a:lnSpc>
+              <a:spcBef>
+                <a:spcPts val="0"/>
+              </a:spcBef>
+              <a:spcAft>
+                <a:spcPts val="0"/>
+              </a:spcAft>
+            </a:pPr>
+            <a:r>
+              <a:rPr sz="950" b="0" i="0">
+                <a:solidFill>
+                  <a:srgbClr val="8A8699"/>
+                </a:solidFill>
+                <a:latin typeface="Segoe UI"/>
+              </a:rPr>
+              <a:t>1.534 líneas</a:t>
+            </a:r>
+          </a:p>
+        </p:txBody>
+      </p:sp>
+      <p:sp>
+        <p:nvSpPr>
+          <p:cNvPr id="14" name="Rounded Rectangle 13"/>
           <p:cNvSpPr/>
           <p:nvPr/>
         </p:nvSpPr>
@@ -17061,23 +17395,23 @@
             </a:avLst>
           </a:prstGeom>
           <a:solidFill>
-            <a:srgbClr val="E8456B"/>
-          </a:solidFill>
-          <a:ln>
-            <a:noFill/>
-          </a:ln>
-        </p:spPr>
-        <p:txBody>
-          <a:bodyPr rtlCol="0" anchor="ctr"/>
-          <a:lstStyle/>
-          <a:p>
-            <a:pPr algn="ctr"/>
-          </a:p>
-        </p:txBody>
-      </p:sp>
-      <p:sp>
-        <p:nvSpPr>
-          <p:cNvPr id="13" name="TextBox 12"/>
+            <a:srgbClr val="C9587E"/>
+          </a:solidFill>
+          <a:ln>
+            <a:noFill/>
+          </a:ln>
+        </p:spPr>
+        <p:txBody>
+          <a:bodyPr rtlCol="0" anchor="ctr"/>
+          <a:lstStyle/>
+          <a:p>
+            <a:pPr algn="ctr"/>
+          </a:p>
+        </p:txBody>
+      </p:sp>
+      <p:sp>
+        <p:nvSpPr>
+          <p:cNvPr id="15" name="TextBox 14"/>
           <p:cNvSpPr txBox="1"/>
           <p:nvPr/>
         </p:nvSpPr>
@@ -17120,7 +17454,7 @@
       </p:sp>
       <p:sp>
         <p:nvSpPr>
-          <p:cNvPr id="14" name="TextBox 13"/>
+          <p:cNvPr id="16" name="TextBox 15"/>
           <p:cNvSpPr txBox="1"/>
           <p:nvPr/>
         </p:nvSpPr>
@@ -17152,7 +17486,7 @@
             <a:r>
               <a:rPr sz="1150" b="1" i="0">
                 <a:solidFill>
-                  <a:srgbClr val="1F1D2B"/>
+                  <a:srgbClr val="3D3A4F"/>
                 </a:solidFill>
                 <a:latin typeface="Segoe UI"/>
               </a:rPr>
@@ -17163,7 +17497,50 @@
       </p:sp>
       <p:sp>
         <p:nvSpPr>
-          <p:cNvPr id="15" name="Rounded Rectangle 14"/>
+          <p:cNvPr id="17" name="TextBox 16"/>
+          <p:cNvSpPr txBox="1"/>
+          <p:nvPr/>
+        </p:nvSpPr>
+        <p:spPr>
+          <a:xfrm>
+            <a:off x="5312664" y="3419856"/>
+            <a:ext cx="1554480" cy="228600"/>
+          </a:xfrm>
+          <a:prstGeom prst="rect">
+            <a:avLst/>
+          </a:prstGeom>
+          <a:noFill/>
+        </p:spPr>
+        <p:txBody>
+          <a:bodyPr wrap="square" anchor="t" lIns="0" tIns="0" rIns="0" bIns="0"/>
+          <a:lstStyle/>
+          <a:p>
+            <a:pPr algn="ctr">
+              <a:lnSpc>
+                <a:spcPct val="100000"/>
+              </a:lnSpc>
+              <a:spcBef>
+                <a:spcPts val="0"/>
+              </a:spcBef>
+              <a:spcAft>
+                <a:spcPts val="0"/>
+              </a:spcAft>
+            </a:pPr>
+            <a:r>
+              <a:rPr sz="950" b="0" i="0">
+                <a:solidFill>
+                  <a:srgbClr val="8A8699"/>
+                </a:solidFill>
+                <a:latin typeface="Segoe UI"/>
+              </a:rPr>
+              <a:t>1.142 líneas</a:t>
+            </a:r>
+          </a:p>
+        </p:txBody>
+      </p:sp>
+      <p:sp>
+        <p:nvSpPr>
+          <p:cNvPr id="18" name="Rounded Rectangle 17"/>
           <p:cNvSpPr/>
           <p:nvPr/>
         </p:nvSpPr>
@@ -17178,23 +17555,23 @@
             </a:avLst>
           </a:prstGeom>
           <a:solidFill>
-            <a:srgbClr val="E8456B"/>
-          </a:solidFill>
-          <a:ln>
-            <a:noFill/>
-          </a:ln>
-        </p:spPr>
-        <p:txBody>
-          <a:bodyPr rtlCol="0" anchor="ctr"/>
-          <a:lstStyle/>
-          <a:p>
-            <a:pPr algn="ctr"/>
-          </a:p>
-        </p:txBody>
-      </p:sp>
-      <p:sp>
-        <p:nvSpPr>
-          <p:cNvPr id="16" name="TextBox 15"/>
+            <a:srgbClr val="C9587E"/>
+          </a:solidFill>
+          <a:ln>
+            <a:noFill/>
+          </a:ln>
+        </p:spPr>
+        <p:txBody>
+          <a:bodyPr rtlCol="0" anchor="ctr"/>
+          <a:lstStyle/>
+          <a:p>
+            <a:pPr algn="ctr"/>
+          </a:p>
+        </p:txBody>
+      </p:sp>
+      <p:sp>
+        <p:nvSpPr>
+          <p:cNvPr id="19" name="TextBox 18"/>
           <p:cNvSpPr txBox="1"/>
           <p:nvPr/>
         </p:nvSpPr>
@@ -17237,7 +17614,7 @@
       </p:sp>
       <p:sp>
         <p:nvSpPr>
-          <p:cNvPr id="17" name="TextBox 16"/>
+          <p:cNvPr id="20" name="TextBox 19"/>
           <p:cNvSpPr txBox="1"/>
           <p:nvPr/>
         </p:nvSpPr>
@@ -17269,7 +17646,7 @@
             <a:r>
               <a:rPr sz="1150" b="1" i="0">
                 <a:solidFill>
-                  <a:srgbClr val="1F1D2B"/>
+                  <a:srgbClr val="3D3A4F"/>
                 </a:solidFill>
                 <a:latin typeface="Segoe UI"/>
               </a:rPr>
@@ -17280,7 +17657,50 @@
       </p:sp>
       <p:sp>
         <p:nvSpPr>
-          <p:cNvPr id="18" name="Rounded Rectangle 17"/>
+          <p:cNvPr id="21" name="TextBox 20"/>
+          <p:cNvSpPr txBox="1"/>
+          <p:nvPr/>
+        </p:nvSpPr>
+        <p:spPr>
+          <a:xfrm>
+            <a:off x="7653528" y="3419856"/>
+            <a:ext cx="1554480" cy="228600"/>
+          </a:xfrm>
+          <a:prstGeom prst="rect">
+            <a:avLst/>
+          </a:prstGeom>
+          <a:noFill/>
+        </p:spPr>
+        <p:txBody>
+          <a:bodyPr wrap="square" anchor="t" lIns="0" tIns="0" rIns="0" bIns="0"/>
+          <a:lstStyle/>
+          <a:p>
+            <a:pPr algn="ctr">
+              <a:lnSpc>
+                <a:spcPct val="100000"/>
+              </a:lnSpc>
+              <a:spcBef>
+                <a:spcPts val="0"/>
+              </a:spcBef>
+              <a:spcAft>
+                <a:spcPts val="0"/>
+              </a:spcAft>
+            </a:pPr>
+            <a:r>
+              <a:rPr sz="950" b="0" i="0">
+                <a:solidFill>
+                  <a:srgbClr val="8A8699"/>
+                </a:solidFill>
+                <a:latin typeface="Segoe UI"/>
+              </a:rPr>
+              <a:t>3.412 líneas</a:t>
+            </a:r>
+          </a:p>
+        </p:txBody>
+      </p:sp>
+      <p:sp>
+        <p:nvSpPr>
+          <p:cNvPr id="22" name="Rounded Rectangle 21"/>
           <p:cNvSpPr/>
           <p:nvPr/>
         </p:nvSpPr>
@@ -17295,23 +17715,23 @@
             </a:avLst>
           </a:prstGeom>
           <a:solidFill>
-            <a:srgbClr val="E8456B"/>
-          </a:solidFill>
-          <a:ln>
-            <a:noFill/>
-          </a:ln>
-        </p:spPr>
-        <p:txBody>
-          <a:bodyPr rtlCol="0" anchor="ctr"/>
-          <a:lstStyle/>
-          <a:p>
-            <a:pPr algn="ctr"/>
-          </a:p>
-        </p:txBody>
-      </p:sp>
-      <p:sp>
-        <p:nvSpPr>
-          <p:cNvPr id="19" name="TextBox 18"/>
+            <a:srgbClr val="C9587E"/>
+          </a:solidFill>
+          <a:ln>
+            <a:noFill/>
+          </a:ln>
+        </p:spPr>
+        <p:txBody>
+          <a:bodyPr rtlCol="0" anchor="ctr"/>
+          <a:lstStyle/>
+          <a:p>
+            <a:pPr algn="ctr"/>
+          </a:p>
+        </p:txBody>
+      </p:sp>
+      <p:sp>
+        <p:nvSpPr>
+          <p:cNvPr id="23" name="TextBox 22"/>
           <p:cNvSpPr txBox="1"/>
           <p:nvPr/>
         </p:nvSpPr>
@@ -17354,7 +17774,7 @@
       </p:sp>
       <p:sp>
         <p:nvSpPr>
-          <p:cNvPr id="20" name="TextBox 19"/>
+          <p:cNvPr id="24" name="TextBox 23"/>
           <p:cNvSpPr txBox="1"/>
           <p:nvPr/>
         </p:nvSpPr>
@@ -17386,7 +17806,7 @@
             <a:r>
               <a:rPr sz="1150" b="1" i="0">
                 <a:solidFill>
-                  <a:srgbClr val="1F1D2B"/>
+                  <a:srgbClr val="3D3A4F"/>
                 </a:solidFill>
                 <a:latin typeface="Segoe UI"/>
               </a:rPr>
@@ -17397,7 +17817,93 @@
       </p:sp>
       <p:sp>
         <p:nvSpPr>
-          <p:cNvPr id="21" name="Rounded Rectangle 20"/>
+          <p:cNvPr id="25" name="TextBox 24"/>
+          <p:cNvSpPr txBox="1"/>
+          <p:nvPr/>
+        </p:nvSpPr>
+        <p:spPr>
+          <a:xfrm>
+            <a:off x="9994392" y="3419856"/>
+            <a:ext cx="1554480" cy="228600"/>
+          </a:xfrm>
+          <a:prstGeom prst="rect">
+            <a:avLst/>
+          </a:prstGeom>
+          <a:noFill/>
+        </p:spPr>
+        <p:txBody>
+          <a:bodyPr wrap="square" anchor="t" lIns="0" tIns="0" rIns="0" bIns="0"/>
+          <a:lstStyle/>
+          <a:p>
+            <a:pPr algn="ctr">
+              <a:lnSpc>
+                <a:spcPct val="100000"/>
+              </a:lnSpc>
+              <a:spcBef>
+                <a:spcPts val="0"/>
+              </a:spcBef>
+              <a:spcAft>
+                <a:spcPts val="0"/>
+              </a:spcAft>
+            </a:pPr>
+            <a:r>
+              <a:rPr sz="950" b="0" i="0">
+                <a:solidFill>
+                  <a:srgbClr val="8A8699"/>
+                </a:solidFill>
+                <a:latin typeface="Segoe UI"/>
+              </a:rPr>
+              <a:t>3.390 líneas</a:t>
+            </a:r>
+          </a:p>
+        </p:txBody>
+      </p:sp>
+      <p:sp>
+        <p:nvSpPr>
+          <p:cNvPr id="26" name="TextBox 25"/>
+          <p:cNvSpPr txBox="1"/>
+          <p:nvPr/>
+        </p:nvSpPr>
+        <p:spPr>
+          <a:xfrm>
+            <a:off x="777240" y="3712463"/>
+            <a:ext cx="10637215" cy="256032"/>
+          </a:xfrm>
+          <a:prstGeom prst="rect">
+            <a:avLst/>
+          </a:prstGeom>
+          <a:noFill/>
+        </p:spPr>
+        <p:txBody>
+          <a:bodyPr wrap="square" anchor="t" lIns="0" tIns="0" rIns="0" bIns="0"/>
+          <a:lstStyle/>
+          <a:p>
+            <a:pPr algn="ctr">
+              <a:lnSpc>
+                <a:spcPct val="100000"/>
+              </a:lnSpc>
+              <a:spcBef>
+                <a:spcPts val="0"/>
+              </a:spcBef>
+              <a:spcAft>
+                <a:spcPts val="0"/>
+              </a:spcAft>
+            </a:pPr>
+            <a:r>
+              <a:rPr sz="1050" b="0" i="0">
+                <a:solidFill>
+                  <a:srgbClr val="8A8699"/>
+                </a:solidFill>
+                <a:latin typeface="Segoe UI"/>
+              </a:rPr>
+              <a:t>10.905 líneas propias + 834 compartidas · 76 tests en verde</a:t>
+            </a:r>
+          </a:p>
+        </p:txBody>
+      </p:sp>
+      <p:sp>
+        <p:nvSpPr>
+          <p:cNvPr id="27" name="Rounded Rectangle 26"/>
           <p:cNvSpPr/>
           <p:nvPr/>
         </p:nvSpPr>
@@ -17416,7 +17922,7 @@
           </a:solidFill>
           <a:ln w="12700">
             <a:solidFill>
-              <a:srgbClr val="E7DED4"/>
+              <a:srgbClr val="F1E7E2"/>
             </a:solidFill>
           </a:ln>
           <a:effectLst>
@@ -17437,7 +17943,7 @@
       </p:sp>
       <p:sp>
         <p:nvSpPr>
-          <p:cNvPr id="22" name="Rectangle 21"/>
+          <p:cNvPr id="28" name="Rectangle 27"/>
           <p:cNvSpPr/>
           <p:nvPr/>
         </p:nvSpPr>
@@ -17450,23 +17956,23 @@
             <a:avLst/>
           </a:prstGeom>
           <a:solidFill>
-            <a:srgbClr val="E8456B"/>
-          </a:solidFill>
-          <a:ln>
-            <a:noFill/>
-          </a:ln>
-        </p:spPr>
-        <p:txBody>
-          <a:bodyPr rtlCol="0" anchor="ctr"/>
-          <a:lstStyle/>
-          <a:p>
-            <a:pPr algn="ctr"/>
-          </a:p>
-        </p:txBody>
-      </p:sp>
-      <p:sp>
-        <p:nvSpPr>
-          <p:cNvPr id="23" name="Rectangle 22"/>
+            <a:srgbClr val="C9587E"/>
+          </a:solidFill>
+          <a:ln>
+            <a:noFill/>
+          </a:ln>
+        </p:spPr>
+        <p:txBody>
+          <a:bodyPr rtlCol="0" anchor="ctr"/>
+          <a:lstStyle/>
+          <a:p>
+            <a:pPr algn="ctr"/>
+          </a:p>
+        </p:txBody>
+      </p:sp>
+      <p:sp>
+        <p:nvSpPr>
+          <p:cNvPr id="29" name="Rectangle 28"/>
           <p:cNvSpPr/>
           <p:nvPr/>
         </p:nvSpPr>
@@ -17479,23 +17985,23 @@
             <a:avLst/>
           </a:prstGeom>
           <a:solidFill>
-            <a:srgbClr val="F28CA4"/>
-          </a:solidFill>
-          <a:ln>
-            <a:noFill/>
-          </a:ln>
-        </p:spPr>
-        <p:txBody>
-          <a:bodyPr rtlCol="0" anchor="ctr"/>
-          <a:lstStyle/>
-          <a:p>
-            <a:pPr algn="ctr"/>
-          </a:p>
-        </p:txBody>
-      </p:sp>
-      <p:sp>
-        <p:nvSpPr>
-          <p:cNvPr id="24" name="Rectangle 23"/>
+            <a:srgbClr val="F3B7C8"/>
+          </a:solidFill>
+          <a:ln>
+            <a:noFill/>
+          </a:ln>
+        </p:spPr>
+        <p:txBody>
+          <a:bodyPr rtlCol="0" anchor="ctr"/>
+          <a:lstStyle/>
+          <a:p>
+            <a:pPr algn="ctr"/>
+          </a:p>
+        </p:txBody>
+      </p:sp>
+      <p:sp>
+        <p:nvSpPr>
+          <p:cNvPr id="30" name="Rectangle 29"/>
           <p:cNvSpPr/>
           <p:nvPr/>
         </p:nvSpPr>
@@ -17508,23 +18014,23 @@
             <a:avLst/>
           </a:prstGeom>
           <a:solidFill>
-            <a:srgbClr val="1F1D2B"/>
-          </a:solidFill>
-          <a:ln>
-            <a:noFill/>
-          </a:ln>
-        </p:spPr>
-        <p:txBody>
-          <a:bodyPr rtlCol="0" anchor="ctr"/>
-          <a:lstStyle/>
-          <a:p>
-            <a:pPr algn="ctr"/>
-          </a:p>
-        </p:txBody>
-      </p:sp>
-      <p:sp>
-        <p:nvSpPr>
-          <p:cNvPr id="25" name="Rectangle 24"/>
+            <a:srgbClr val="3D3A4F"/>
+          </a:solidFill>
+          <a:ln>
+            <a:noFill/>
+          </a:ln>
+        </p:spPr>
+        <p:txBody>
+          <a:bodyPr rtlCol="0" anchor="ctr"/>
+          <a:lstStyle/>
+          <a:p>
+            <a:pPr algn="ctr"/>
+          </a:p>
+        </p:txBody>
+      </p:sp>
+      <p:sp>
+        <p:nvSpPr>
+          <p:cNvPr id="31" name="Rectangle 30"/>
           <p:cNvSpPr/>
           <p:nvPr/>
         </p:nvSpPr>
@@ -17537,23 +18043,23 @@
             <a:avLst/>
           </a:prstGeom>
           <a:solidFill>
-            <a:srgbClr val="CB3155"/>
-          </a:solidFill>
-          <a:ln>
-            <a:noFill/>
-          </a:ln>
-        </p:spPr>
-        <p:txBody>
-          <a:bodyPr rtlCol="0" anchor="ctr"/>
-          <a:lstStyle/>
-          <a:p>
-            <a:pPr algn="ctr"/>
-          </a:p>
-        </p:txBody>
-      </p:sp>
-      <p:sp>
-        <p:nvSpPr>
-          <p:cNvPr id="26" name="TextBox 25"/>
+            <a:srgbClr val="B2496C"/>
+          </a:solidFill>
+          <a:ln>
+            <a:noFill/>
+          </a:ln>
+        </p:spPr>
+        <p:txBody>
+          <a:bodyPr rtlCol="0" anchor="ctr"/>
+          <a:lstStyle/>
+          <a:p>
+            <a:pPr algn="ctr"/>
+          </a:p>
+        </p:txBody>
+      </p:sp>
+      <p:sp>
+        <p:nvSpPr>
+          <p:cNvPr id="32" name="TextBox 31"/>
           <p:cNvSpPr txBox="1"/>
           <p:nvPr/>
         </p:nvSpPr>
@@ -17585,7 +18091,7 @@
             <a:r>
               <a:rPr sz="1600" b="0" i="0">
                 <a:solidFill>
-                  <a:srgbClr val="1F1D2B"/>
+                  <a:srgbClr val="3D3A4F"/>
                 </a:solidFill>
                 <a:latin typeface="Segoe UI"/>
               </a:rPr>
@@ -17596,7 +18102,7 @@
       </p:sp>
       <p:sp>
         <p:nvSpPr>
-          <p:cNvPr id="27" name="Rounded Rectangle 26"/>
+          <p:cNvPr id="33" name="Rounded Rectangle 32"/>
           <p:cNvSpPr/>
           <p:nvPr/>
         </p:nvSpPr>
@@ -17615,7 +18121,7 @@
           </a:solidFill>
           <a:ln w="12700">
             <a:solidFill>
-              <a:srgbClr val="E7DED4"/>
+              <a:srgbClr val="F1E7E2"/>
             </a:solidFill>
           </a:ln>
           <a:effectLst>
@@ -17636,7 +18142,7 @@
       </p:sp>
       <p:sp>
         <p:nvSpPr>
-          <p:cNvPr id="28" name="Rectangle 27"/>
+          <p:cNvPr id="34" name="Rectangle 33"/>
           <p:cNvSpPr/>
           <p:nvPr/>
         </p:nvSpPr>
@@ -17649,23 +18155,23 @@
             <a:avLst/>
           </a:prstGeom>
           <a:solidFill>
-            <a:srgbClr val="E8456B"/>
-          </a:solidFill>
-          <a:ln>
-            <a:noFill/>
-          </a:ln>
-        </p:spPr>
-        <p:txBody>
-          <a:bodyPr rtlCol="0" anchor="ctr"/>
-          <a:lstStyle/>
-          <a:p>
-            <a:pPr algn="ctr"/>
-          </a:p>
-        </p:txBody>
-      </p:sp>
-      <p:sp>
-        <p:nvSpPr>
-          <p:cNvPr id="29" name="Rectangle 28"/>
+            <a:srgbClr val="C9587E"/>
+          </a:solidFill>
+          <a:ln>
+            <a:noFill/>
+          </a:ln>
+        </p:spPr>
+        <p:txBody>
+          <a:bodyPr rtlCol="0" anchor="ctr"/>
+          <a:lstStyle/>
+          <a:p>
+            <a:pPr algn="ctr"/>
+          </a:p>
+        </p:txBody>
+      </p:sp>
+      <p:sp>
+        <p:nvSpPr>
+          <p:cNvPr id="35" name="Rectangle 34"/>
           <p:cNvSpPr/>
           <p:nvPr/>
         </p:nvSpPr>
@@ -17678,23 +18184,23 @@
             <a:avLst/>
           </a:prstGeom>
           <a:solidFill>
-            <a:srgbClr val="F28CA4"/>
-          </a:solidFill>
-          <a:ln>
-            <a:noFill/>
-          </a:ln>
-        </p:spPr>
-        <p:txBody>
-          <a:bodyPr rtlCol="0" anchor="ctr"/>
-          <a:lstStyle/>
-          <a:p>
-            <a:pPr algn="ctr"/>
-          </a:p>
-        </p:txBody>
-      </p:sp>
-      <p:sp>
-        <p:nvSpPr>
-          <p:cNvPr id="30" name="Rectangle 29"/>
+            <a:srgbClr val="F3B7C8"/>
+          </a:solidFill>
+          <a:ln>
+            <a:noFill/>
+          </a:ln>
+        </p:spPr>
+        <p:txBody>
+          <a:bodyPr rtlCol="0" anchor="ctr"/>
+          <a:lstStyle/>
+          <a:p>
+            <a:pPr algn="ctr"/>
+          </a:p>
+        </p:txBody>
+      </p:sp>
+      <p:sp>
+        <p:nvSpPr>
+          <p:cNvPr id="36" name="Rectangle 35"/>
           <p:cNvSpPr/>
           <p:nvPr/>
         </p:nvSpPr>
@@ -17707,23 +18213,23 @@
             <a:avLst/>
           </a:prstGeom>
           <a:solidFill>
-            <a:srgbClr val="1F1D2B"/>
-          </a:solidFill>
-          <a:ln>
-            <a:noFill/>
-          </a:ln>
-        </p:spPr>
-        <p:txBody>
-          <a:bodyPr rtlCol="0" anchor="ctr"/>
-          <a:lstStyle/>
-          <a:p>
-            <a:pPr algn="ctr"/>
-          </a:p>
-        </p:txBody>
-      </p:sp>
-      <p:sp>
-        <p:nvSpPr>
-          <p:cNvPr id="31" name="Rectangle 30"/>
+            <a:srgbClr val="3D3A4F"/>
+          </a:solidFill>
+          <a:ln>
+            <a:noFill/>
+          </a:ln>
+        </p:spPr>
+        <p:txBody>
+          <a:bodyPr rtlCol="0" anchor="ctr"/>
+          <a:lstStyle/>
+          <a:p>
+            <a:pPr algn="ctr"/>
+          </a:p>
+        </p:txBody>
+      </p:sp>
+      <p:sp>
+        <p:nvSpPr>
+          <p:cNvPr id="37" name="Rectangle 36"/>
           <p:cNvSpPr/>
           <p:nvPr/>
         </p:nvSpPr>
@@ -17736,23 +18242,23 @@
             <a:avLst/>
           </a:prstGeom>
           <a:solidFill>
-            <a:srgbClr val="CB3155"/>
-          </a:solidFill>
-          <a:ln>
-            <a:noFill/>
-          </a:ln>
-        </p:spPr>
-        <p:txBody>
-          <a:bodyPr rtlCol="0" anchor="ctr"/>
-          <a:lstStyle/>
-          <a:p>
-            <a:pPr algn="ctr"/>
-          </a:p>
-        </p:txBody>
-      </p:sp>
-      <p:sp>
-        <p:nvSpPr>
-          <p:cNvPr id="32" name="TextBox 31"/>
+            <a:srgbClr val="B2496C"/>
+          </a:solidFill>
+          <a:ln>
+            <a:noFill/>
+          </a:ln>
+        </p:spPr>
+        <p:txBody>
+          <a:bodyPr rtlCol="0" anchor="ctr"/>
+          <a:lstStyle/>
+          <a:p>
+            <a:pPr algn="ctr"/>
+          </a:p>
+        </p:txBody>
+      </p:sp>
+      <p:sp>
+        <p:nvSpPr>
+          <p:cNvPr id="38" name="TextBox 37"/>
           <p:cNvSpPr txBox="1"/>
           <p:nvPr/>
         </p:nvSpPr>
@@ -17784,7 +18290,7 @@
             <a:r>
               <a:rPr sz="1600" b="0" i="0">
                 <a:solidFill>
-                  <a:srgbClr val="1F1D2B"/>
+                  <a:srgbClr val="3D3A4F"/>
                 </a:solidFill>
                 <a:latin typeface="Segoe UI"/>
               </a:rPr>
@@ -17795,7 +18301,7 @@
       </p:sp>
       <p:sp>
         <p:nvSpPr>
-          <p:cNvPr id="33" name="Rounded Rectangle 32"/>
+          <p:cNvPr id="39" name="Rounded Rectangle 38"/>
           <p:cNvSpPr/>
           <p:nvPr/>
         </p:nvSpPr>
@@ -17814,7 +18320,7 @@
           </a:solidFill>
           <a:ln w="12700">
             <a:solidFill>
-              <a:srgbClr val="E7DED4"/>
+              <a:srgbClr val="F1E7E2"/>
             </a:solidFill>
           </a:ln>
           <a:effectLst>
@@ -17835,7 +18341,7 @@
       </p:sp>
       <p:sp>
         <p:nvSpPr>
-          <p:cNvPr id="34" name="Rectangle 33"/>
+          <p:cNvPr id="40" name="Rectangle 39"/>
           <p:cNvSpPr/>
           <p:nvPr/>
         </p:nvSpPr>
@@ -17848,23 +18354,23 @@
             <a:avLst/>
           </a:prstGeom>
           <a:solidFill>
-            <a:srgbClr val="E8456B"/>
-          </a:solidFill>
-          <a:ln>
-            <a:noFill/>
-          </a:ln>
-        </p:spPr>
-        <p:txBody>
-          <a:bodyPr rtlCol="0" anchor="ctr"/>
-          <a:lstStyle/>
-          <a:p>
-            <a:pPr algn="ctr"/>
-          </a:p>
-        </p:txBody>
-      </p:sp>
-      <p:sp>
-        <p:nvSpPr>
-          <p:cNvPr id="35" name="Rectangle 34"/>
+            <a:srgbClr val="C9587E"/>
+          </a:solidFill>
+          <a:ln>
+            <a:noFill/>
+          </a:ln>
+        </p:spPr>
+        <p:txBody>
+          <a:bodyPr rtlCol="0" anchor="ctr"/>
+          <a:lstStyle/>
+          <a:p>
+            <a:pPr algn="ctr"/>
+          </a:p>
+        </p:txBody>
+      </p:sp>
+      <p:sp>
+        <p:nvSpPr>
+          <p:cNvPr id="41" name="Rectangle 40"/>
           <p:cNvSpPr/>
           <p:nvPr/>
         </p:nvSpPr>
@@ -17877,23 +18383,23 @@
             <a:avLst/>
           </a:prstGeom>
           <a:solidFill>
-            <a:srgbClr val="F28CA4"/>
-          </a:solidFill>
-          <a:ln>
-            <a:noFill/>
-          </a:ln>
-        </p:spPr>
-        <p:txBody>
-          <a:bodyPr rtlCol="0" anchor="ctr"/>
-          <a:lstStyle/>
-          <a:p>
-            <a:pPr algn="ctr"/>
-          </a:p>
-        </p:txBody>
-      </p:sp>
-      <p:sp>
-        <p:nvSpPr>
-          <p:cNvPr id="36" name="Rectangle 35"/>
+            <a:srgbClr val="F3B7C8"/>
+          </a:solidFill>
+          <a:ln>
+            <a:noFill/>
+          </a:ln>
+        </p:spPr>
+        <p:txBody>
+          <a:bodyPr rtlCol="0" anchor="ctr"/>
+          <a:lstStyle/>
+          <a:p>
+            <a:pPr algn="ctr"/>
+          </a:p>
+        </p:txBody>
+      </p:sp>
+      <p:sp>
+        <p:nvSpPr>
+          <p:cNvPr id="42" name="Rectangle 41"/>
           <p:cNvSpPr/>
           <p:nvPr/>
         </p:nvSpPr>
@@ -17906,23 +18412,23 @@
             <a:avLst/>
           </a:prstGeom>
           <a:solidFill>
-            <a:srgbClr val="1F1D2B"/>
-          </a:solidFill>
-          <a:ln>
-            <a:noFill/>
-          </a:ln>
-        </p:spPr>
-        <p:txBody>
-          <a:bodyPr rtlCol="0" anchor="ctr"/>
-          <a:lstStyle/>
-          <a:p>
-            <a:pPr algn="ctr"/>
-          </a:p>
-        </p:txBody>
-      </p:sp>
-      <p:sp>
-        <p:nvSpPr>
-          <p:cNvPr id="37" name="Rectangle 36"/>
+            <a:srgbClr val="3D3A4F"/>
+          </a:solidFill>
+          <a:ln>
+            <a:noFill/>
+          </a:ln>
+        </p:spPr>
+        <p:txBody>
+          <a:bodyPr rtlCol="0" anchor="ctr"/>
+          <a:lstStyle/>
+          <a:p>
+            <a:pPr algn="ctr"/>
+          </a:p>
+        </p:txBody>
+      </p:sp>
+      <p:sp>
+        <p:nvSpPr>
+          <p:cNvPr id="43" name="Rectangle 42"/>
           <p:cNvSpPr/>
           <p:nvPr/>
         </p:nvSpPr>
@@ -17935,23 +18441,23 @@
             <a:avLst/>
           </a:prstGeom>
           <a:solidFill>
-            <a:srgbClr val="CB3155"/>
-          </a:solidFill>
-          <a:ln>
-            <a:noFill/>
-          </a:ln>
-        </p:spPr>
-        <p:txBody>
-          <a:bodyPr rtlCol="0" anchor="ctr"/>
-          <a:lstStyle/>
-          <a:p>
-            <a:pPr algn="ctr"/>
-          </a:p>
-        </p:txBody>
-      </p:sp>
-      <p:sp>
-        <p:nvSpPr>
-          <p:cNvPr id="38" name="TextBox 37"/>
+            <a:srgbClr val="B2496C"/>
+          </a:solidFill>
+          <a:ln>
+            <a:noFill/>
+          </a:ln>
+        </p:spPr>
+        <p:txBody>
+          <a:bodyPr rtlCol="0" anchor="ctr"/>
+          <a:lstStyle/>
+          <a:p>
+            <a:pPr algn="ctr"/>
+          </a:p>
+        </p:txBody>
+      </p:sp>
+      <p:sp>
+        <p:nvSpPr>
+          <p:cNvPr id="44" name="TextBox 43"/>
           <p:cNvSpPr txBox="1"/>
           <p:nvPr/>
         </p:nvSpPr>
@@ -17983,7 +18489,7 @@
             <a:r>
               <a:rPr sz="1600" b="0" i="0">
                 <a:solidFill>
-                  <a:srgbClr val="1F1D2B"/>
+                  <a:srgbClr val="3D3A4F"/>
                 </a:solidFill>
                 <a:latin typeface="Segoe UI"/>
               </a:rPr>
@@ -17994,7 +18500,7 @@
       </p:sp>
       <p:sp>
         <p:nvSpPr>
-          <p:cNvPr id="39" name="Rectangle 38"/>
+          <p:cNvPr id="45" name="Rectangle 44"/>
           <p:cNvSpPr/>
           <p:nvPr/>
         </p:nvSpPr>
@@ -18007,23 +18513,23 @@
             <a:avLst/>
           </a:prstGeom>
           <a:solidFill>
-            <a:srgbClr val="E7DED4"/>
-          </a:solidFill>
-          <a:ln>
-            <a:noFill/>
-          </a:ln>
-        </p:spPr>
-        <p:txBody>
-          <a:bodyPr rtlCol="0" anchor="ctr"/>
-          <a:lstStyle/>
-          <a:p>
-            <a:pPr algn="ctr"/>
-          </a:p>
-        </p:txBody>
-      </p:sp>
-      <p:sp>
-        <p:nvSpPr>
-          <p:cNvPr id="40" name="TextBox 39"/>
+            <a:srgbClr val="F1E7E2"/>
+          </a:solidFill>
+          <a:ln>
+            <a:noFill/>
+          </a:ln>
+        </p:spPr>
+        <p:txBody>
+          <a:bodyPr rtlCol="0" anchor="ctr"/>
+          <a:lstStyle/>
+          <a:p>
+            <a:pPr algn="ctr"/>
+          </a:p>
+        </p:txBody>
+      </p:sp>
+      <p:sp>
+        <p:nvSpPr>
+          <p:cNvPr id="46" name="TextBox 45"/>
           <p:cNvSpPr txBox="1"/>
           <p:nvPr/>
         </p:nvSpPr>
@@ -18055,7 +18561,7 @@
             <a:r>
               <a:rPr sz="900" b="0" i="0">
                 <a:solidFill>
-                  <a:srgbClr val="6E6A7C"/>
+                  <a:srgbClr val="8A8699"/>
                 </a:solidFill>
                 <a:latin typeface="Segoe UI"/>
               </a:rPr>
@@ -18066,7 +18572,7 @@
       </p:sp>
       <p:sp>
         <p:nvSpPr>
-          <p:cNvPr id="41" name="TextBox 40"/>
+          <p:cNvPr id="47" name="TextBox 46"/>
           <p:cNvSpPr txBox="1"/>
           <p:nvPr/>
         </p:nvSpPr>
@@ -18098,7 +18604,7 @@
             <a:r>
               <a:rPr sz="900" b="0" i="0">
                 <a:solidFill>
-                  <a:srgbClr val="6E6A7C"/>
+                  <a:srgbClr val="8A8699"/>
                 </a:solidFill>
                 <a:latin typeface="Segoe UI"/>
               </a:rPr>
